--- a/docs/presentation/FYP-demo.pptx
+++ b/docs/presentation/FYP-demo.pptx
@@ -513,25 +513,25 @@
           <a:p>
             <a:r>
               <a:rPr lang="en-US" dirty="0"/>
-              <a:t>[0:00]  ~177 words
-Good morning. My final year project is ConvoTrainer, an interview practice
-application.
-All three ways of practising today have the same hole. A question bank asks
-the same things in the same order; it never notices that you dodged the
-question. A human adapts perfectly, but isn't available at eleven at night and
-can't be repeated ten times. A general chatbot will role-play, but won't grade
-you against a rubric or push back when you're weak. Nothing connects how you
-answered to what you get asked next. That loop is the project.
-So: you describe the role, optionally attaching the real job description and
-your CV, which are used to ground the questions. You pick the rounds and shape
-the interviewer. Then you interview.
-Six round types, each with its own rubric — a system design answer isn't
-judged the way a behavioural one is. Text or voice, with a code editor on
-technical rounds. Afterwards, a scored report with per-answer coaching, model
-answers and competency coverage.
-The rest of the slides are how that works underneath.
+              <a:t>[0:00]  ~198 words
+Good morning. My final year project is called ConvoTrainer. It's a website
+where you practise job interviews against an AI interviewer.
+Why it exists: there are three ways to practise today, and all three have the
+same hole. A list of practice questions asks the same things in the same
+order, whatever you say. A real person reacts perfectly, but isn't available
+at eleven at night. A chatbot will play along, but won't mark you or push back
+when your answer is weak.
+None of them connect how you answered to what you get asked next. Closing that
+gap is the project.
+So you tell it what job you're going for, and you can attach the real job
+advert and your resume. You choose the kind of round, set what the interviewer
+is like, and start. There are six kinds of round, and each is marked
+differently — a coding answer isn't judged the way a "tell me about a time"
+answer is. You can type or speak. At the end you get a report with a score,
+feedback on every answer, and a better version of each one.
+The next four slides are how that works underneath.
 FILL IN before presenting: your supervisor's name and the date.
-SHORT VERSION: "Question banks don't adapt, humans don't scale, chatbots don't score. ConvoTrainer scores every answer and uses that score to pick the next question."</a:t>
+SHORT VERSION: "Practice question lists don't react to you, a real person can't be on call, and a chatbot won't mark you. This marks every answer and uses the mark to pick the next question."</a:t>
             </a:r>
             <a:endParaRPr lang="en-US" dirty="0"/>
           </a:p>
@@ -708,7 +708,7 @@
             <a:r>
               <a:rPr lang="en-US" dirty="0"/>
               <a:t>Good answer to 'how do you know it works?' and to any question about developer tooling being reachable by end users.
-The honest exception: a logged-in user can read their OWN token-usage rows over the API, because usage is written using their own session. They cannot read anyone else's, cannot modify any, and cannot derive cost — the price table is not in the browser. Documented as a trade-off, with the proper fix being a service-role write path.</a:t>
+On usage data: an earlier version let a signed-in user insert forged usage rows, because recording ran under their own session. That is now closed — usage is written server-side and attributed to the authenticated user, and the client no longer holds the insert grant. A user can still read their own token counts if they go looking; they cannot read anyone else's, cannot modify any, and cannot derive cost, because the price table is never sent to the browser.</a:t>
             </a:r>
             <a:endParaRPr lang="en-US" dirty="0"/>
           </a:p>
@@ -884,30 +884,27 @@
           <a:p>
             <a:r>
               <a:rPr lang="en-US" dirty="0"/>
-              <a:t>[1:11]  ~226 words  ★
-This is the centre of the project — one turn, left to right.
-Your answer arrives at the chat endpoint. Before anything is generated, a
-second model call scores it against the rubric for that round type, at low
-temperature, returning JSON.
-That verdict goes into a decision engine — ordinary deterministic code, no
-model involved. It picks one of seven questioning strategies: probe the
-action, challenge ownership, drill for specificity. It also computes a
-difficulty target. Those become a private steering block inside the
-interviewer's prompt, which the candidate never sees. Then the next question
-streams back.
-Why that order? A verdict that only arrives at the end of the interview cannot
-change the interview. Scoring before generating is what makes the questioning
-adaptive rather than scripted.
-Three engineering points. Scoring is bounded at four seconds — I measured the
-turn before changing it, rather than guessing. Past that deadline the question
-starts unsteered, but the verdict is still collected and stored, so the
-transcript and the report are unaffected.
-Both messages and the analysis commit in one Postgres transaction, so a turn
-can't half-exist.
-And every interviewer turn runs on the same model. The opening turn used to
-use a stronger one — but a different model is a different prompt cache, so the
-session paid full price twice and hit cache neither time.
-KEY SLIDE — this is the architecture. Do not rush it.</a:t>
+              <a:t>[1:19]  ~235 words  ★
+Here's the core idea, and it's the one thing I'd like to land.
+Four steps. You answer. The system marks that answer. It uses the mark to
+decide what to ask next. Then it asks the follow-up.
+The example at the bottom is a real question and answer from my test set.
+Asked about a project with an unrealistic deadline, the candidate says: "We
+had a launch date that was pretty tight. I worked with the team and we managed
+to get most of it done on time."
+A human interviewer would spot two things straight away. There's nothing
+concrete — no dates, no numbers. And it's "we" all the way through, so you
+can't tell what this person actually did.
+That's exactly what the system checks for. So instead of moving on, the
+follow-up presses for what they personally did.
+Why mark it first, rather than at the end? Because a score that only turns up
+at the end can't change the interview. Marking first is the whole reason the
+questions react to you instead of running down a list.
+And one word I want to be careful with: this isn't an AI agent. The AI writes
+the questions and marks the answers, but it doesn't decide what happens next.
+My code does. That's on purpose — it means the same answer leads to the same
+decision every time, and I can test it.
+KEY SLIDE — this is the whole idea. Do not rush it.</a:t>
             </a:r>
             <a:endParaRPr lang="en-US" dirty="0"/>
           </a:p>
@@ -995,26 +992,31 @@
           <a:p>
             <a:r>
               <a:rPr lang="en-US" dirty="0"/>
-              <a:t>[2:41]  ~205 words  ★
-This is the claim I can prove, and the one I'd most like you to look at.
-The persona reaches the model down two paths. Textually, each dial becomes a
-sentence in the system prompt — and prompt text has no effect you can compute,
-so you have to measure what comes back.
-The numeric path is arithmetic: strictness minus warmth, over four, plus a
-repetition boost, clamped one to ten. That number is injected as an explicit
-instruction — aim for difficulty seven out of ten.
-On the right is real output. Identical question, identical answer, identical
-round type. The only variable is who's asking. Yuki, at strictness nine and
-warmth four, targets seven. Isabella, at warmth nine and pushback four,
-targets five.
-That isn't a sample from a stochastic model, it's a computation — you can do
-the arithmetic by hand and get the same two numbers, every run, offline. And a
-test fails if a future edit brings those two personas' dials together, so the
-comparison can't quietly stop demonstrating anything.
-Two limits, before you ask. The dials are coarse: strictness one to ten moves
-difficulty only five to seven. And scoring deliberately ignores persona —
-grading shouldn't depend on who asked.
-KEY SLIDE — your strongest evidence. Slow down here.</a:t>
+              <a:t>[2:53]  ~263 words
+What it's built from. Four parts.
+The AI that asks and marks: a model from OpenAI called GPT-4o-mini. One model
+does all of it — asking, marking, writing feedback. Answers appear a word at a
+time rather than after a long pause.
+Speech: a service from Microsoft called Azure Speech. It turns what you say
+into text while you're still talking, and reads the questions out in a natural
+voice. The password for that service never reaches the browser — the page asks
+my server for a short-lived pass instead.
+Your documents: attach a job advert and it gets split into small pieces and
+stored so the system can search it by meaning rather than by exact words. So
+when it needs the part about required experience, it finds it even if that
+phrase was never used. Short documents skip the search and go in whole,
+because searching would cost more than it saves.
+Storage: a database service called Supabase. Every record is locked to the
+person it belongs to, and the database enforces that rather than my code
+remembering to check.
+That last point is the decision I'd defend hardest. The document search runs
+inside that same database, so it's covered by the same lock. A separate search
+product would have been a second place to get security right, and a second
+place to get it wrong.
+On progress: every time I change the code, an automatic check runs the tests
+and builds the whole site. I haven't put it online yet — it runs on my machine
+against the real services.
+The stack slide. Keep it moving — the detail is in the notes.</a:t>
             </a:r>
             <a:endParaRPr lang="en-US" dirty="0"/>
           </a:p>
@@ -1102,25 +1104,31 @@
           <a:p>
             <a:r>
               <a:rPr lang="en-US" dirty="0"/>
-              <a:t>[4:03]  ~215 words  ★
-Second — I don't estimate what this costs. I measure it.
-Every OpenAI call records its token usage, including how much was served from
-cache, into a Postgres table as the call happens. A command-line tool reads
-that table and prices it, reporting tokens per call site, cache hit rate, and
-cost per turn. So any cost figure I give you is a query you can re-run.
-The most useful result was a negative one. OpenAI only caches a prompt prefix
-once it reaches 1,024 tokens. I'd deliberately structured the prompt in two
-layers — stable part first, volatile part last — specifically so caching could
-engage. Then I measured it: on a bare session the stable prefix is about 590
-tokens. Under the floor. It never fires.
-I kept the structure, because it costs nothing and it's what makes caching
-possible once a job description is attached — which is when the prompt is big
-enough to matter. But the tool reports that it didn't fire, in words, rather
-than printing a zero I could quietly reinterpret.
-That's the claim I want to make. Not that this is cheap — a ten-question round
-is roughly a cent. It's that every model call is instrumented, priced and
-checkable, including the optimisation that provably doesn't work.
-KEY SLIDE — the negative result is the point, not a caveat.</a:t>
+              <a:t>[4:38]  ~279 words  ★
+This slide is about cost, because running an AI on every answer isn't free.
+AI services charge by the amount of text, not per request. Rather than
+estimate that, I record every call the moment it happens, and a small tool
+adds it up and prices it. So when I tell you what a session costs, that's
+something I can look up in front of you rather than a figure I worked out on
+paper.
+Once I could see where the money was going, some things were obvious to cut.
+If you type "ok", there's nothing to mark. Anything that's just counting — how
+many words, how often you hedged — is counted by ordinary code, because
+counting isn't judgement and the AI charges for it. And feedback that's
+already been written is reused rather than bought twice.
+Then the result I didn't expect. OpenAI will charge half price for the opening
+part of your instructions if it's identical every time — but only once that
+part reaches one thousand and twenty-four tokens. That threshold is theirs,
+not mine. So I arranged my instructions with the unchanging part first, to
+qualify. Then I checked: mine comes to about five hundred and ninety. Too
+short. The discount never applies.
+I kept the arrangement, because it costs nothing and it does start working
+once you attach a job advert — which is when there's enough text for it to
+matter. But the tool reports that it didn't apply, in plain words, rather than
+showing a saving I'm not getting.
+So the claim isn't that this is cheap. It's that it's measured — including the
+improvement that turned out not to work.
+KEY SLIDE — the surprise result is the point, not an apology.</a:t>
             </a:r>
             <a:endParaRPr lang="en-US" dirty="0"/>
           </a:p>
@@ -1208,27 +1216,35 @@
           <a:p>
             <a:r>
               <a:rPr lang="en-US" dirty="0"/>
-              <a:t>[5:29]  ~202 words
-Finally, where it honestly stands.
-Built and verified: 299 unit tests across 31 files, all passing in CI on every
-push alongside typecheck and lint. Ten migrations with row-level security on
-every table — and retrieval runs through pgvector inside Postgres, so it
-inherits the same access rules as everything else.
-Built but not yet measured, and I'll be direct. I wrote an evaluation harness
-for scoring accuracy, with eighteen hand-authored fixtures and defined
-metrics. The results aren't collected yet — not because the harness doesn't
-work, but because every run is billed, and I wanted the metrics and the
-fixture set settled first so the first run is the real one rather than a
-pilot. Same for user acceptance testing: the plan, the handout and the exit
-criteria are written; no participants have been through it.
-Some things are deliberately out of scope — submitted code is reviewed, never
-executed, and it's English only.
-The rule I held to throughout: never claim a number I haven't run. That's why
-the middle column is on this slide rather than left off it.
-So, three things to show you, ordered by how much can go wrong. Starting with
-the one that can't fail.
-Stop talking. Start demoing.
-SHORT VERSION: "299 tests passing in CI, RLS everywhere, voice and text working. The eval harness and the UAT plan are written but not yet run — I'm not going to show you results I don't have."</a:t>
+              <a:t>[6:30]  ~322 words  ★
+Last slide: what's going on inside the marking and the question-picking, and
+what you get to change.
+Marking first. There's a different checklist for each kind of round. For a
+"tell me about a time" question it checks whether you set the scene, said what
+you personally did, and said how it turned out. For a coding question, whether
+the answer is correct, whether it's efficient, and whether you handled the
+awkward cases. And the marking never knows who asked — a tough interviewer and
+a friendly one give the same answer the same mark, because your answer is
+worth what it's worth.
+Picking the next question is a list of rules over that mark, and the first one
+that fits wins. No scene set, it asks you to start again with the background.
+Nothing concrete, it asks for specifics. You said "we", it asks what you did.
+Same tactic twice, it gets harder. It's also told what it has already asked,
+so it doesn't repeat itself.
+Now, do the settings on the right actually do anything? Here's the result I'd
+like you to remember.
+Take the same question and the same answer, and change nothing but the
+interviewer. A strict one aims at seven out of ten for the next question. A
+warm one aims at five. Same input, different interviewer, genuinely different
+follow-up.
+And that isn't the AI being moody. It's a sum: your score sets a starting
+point, and the interviewer's strictness minus their warmth shifts it up or
+down. You could do it on paper and get those same two numbers every time.
+That's the trade I made. You set up the interview — the rounds, the
+interviewer, your documents. You don't change the marking rules underneath;
+those are fixed numbers in the code. And fixing them is exactly why the same
+answer gets the same mark twice, and why I can test each rule on its own.
+KEY SLIDE — the 5-versus-7 result is the thing to land.</a:t>
             </a:r>
             <a:endParaRPr lang="en-US" dirty="0"/>
           </a:p>
@@ -2085,7 +2101,7 @@
                 <a:ea typeface="Arial" pitchFamily="34" charset="-122"/>
                 <a:cs typeface="Arial" pitchFamily="34" charset="-120"/>
               </a:rPr>
-              <a:t>An AI interview partner that scores every answer — and lets that score steer the next question.</a:t>
+              <a:t>Practise a job interview against an AI that marks every answer — and uses that mark to choose what to ask you next.</a:t>
             </a:r>
             <a:endParaRPr lang="en-US" sz="1600" dirty="0"/>
           </a:p>
@@ -2153,7 +2169,7 @@
         <p:spPr>
           <a:xfrm>
             <a:off x="566928" y="2011680"/>
-            <a:ext cx="11057839" cy="676656"/>
+            <a:ext cx="11057839" cy="713232"/>
           </a:xfrm>
           <a:prstGeom prst="rect">
             <a:avLst/>
@@ -2178,7 +2194,7 @@
         <p:spPr>
           <a:xfrm>
             <a:off x="566928" y="2011680"/>
-            <a:ext cx="50292" cy="676656"/>
+            <a:ext cx="50292" cy="713232"/>
           </a:xfrm>
           <a:prstGeom prst="rect">
             <a:avLst/>
@@ -2203,7 +2219,7 @@
         <p:spPr>
           <a:xfrm>
             <a:off x="877824" y="2011680"/>
-            <a:ext cx="10509199" cy="676656"/>
+            <a:ext cx="10509199" cy="713232"/>
           </a:xfrm>
           <a:prstGeom prst="rect">
             <a:avLst/>
@@ -2222,7 +2238,7 @@
               <a:buNone/>
             </a:pPr>
             <a:r>
-              <a:rPr lang="en-US" sz="1350" dirty="0">
+              <a:rPr lang="en-US" sz="1300" dirty="0">
                 <a:solidFill>
                   <a:srgbClr val="3F4750"/>
                 </a:solidFill>
@@ -2230,7 +2246,7 @@
                 <a:ea typeface="Arial" pitchFamily="34" charset="-122"/>
                 <a:cs typeface="Arial" pitchFamily="34" charset="-120"/>
               </a:rPr>
-              <a:t>Question banks don't adapt. Humans don't scale. Chatbots don't score.   </a:t>
+              <a:t>A list of practice questions never notices what you said. A real person can't be there at 11pm. A chatbot won't mark you.   </a:t>
             </a:r>
             <a:pPr indent="0" marL="0">
               <a:lnSpc>
@@ -2239,7 +2255,7 @@
               <a:buNone/>
             </a:pPr>
             <a:r>
-              <a:rPr lang="en-US" sz="1350" b="1" dirty="0">
+              <a:rPr lang="en-US" sz="1300" b="1" dirty="0">
                 <a:solidFill>
                   <a:srgbClr val="14161A"/>
                 </a:solidFill>
@@ -2247,9 +2263,9 @@
                 <a:ea typeface="Arial" pitchFamily="34" charset="-122"/>
                 <a:cs typeface="Arial" pitchFamily="34" charset="-120"/>
               </a:rPr>
-              <a:t>Nothing closes the loop between how you answered and what you get asked next.</a:t>
-            </a:r>
-            <a:endParaRPr lang="en-US" sz="1350" dirty="0"/>
+              <a:t>None of them connect how you answered to what you get asked next.</a:t>
+            </a:r>
+            <a:endParaRPr lang="en-US" sz="1300" dirty="0"/>
           </a:p>
         </p:txBody>
       </p:sp>
@@ -2261,8 +2277,8 @@
         </p:nvSpPr>
         <p:spPr>
           <a:xfrm>
-            <a:off x="566928" y="2834640"/>
-            <a:ext cx="2558720" cy="932688"/>
+            <a:off x="566928" y="2871216"/>
+            <a:ext cx="2558720" cy="1042416"/>
           </a:xfrm>
           <a:prstGeom prst="rect">
             <a:avLst/>
@@ -2286,7 +2302,7 @@
         </p:nvSpPr>
         <p:spPr>
           <a:xfrm>
-            <a:off x="713232" y="2953512"/>
+            <a:off x="713232" y="2990088"/>
             <a:ext cx="2266112" cy="219456"/>
           </a:xfrm>
           <a:prstGeom prst="rect">
@@ -2325,7 +2341,7 @@
         </p:nvSpPr>
         <p:spPr>
           <a:xfrm>
-            <a:off x="713232" y="3182112"/>
+            <a:off x="713232" y="3218688"/>
             <a:ext cx="2266112" cy="310896"/>
           </a:xfrm>
           <a:prstGeom prst="rect">
@@ -2350,7 +2366,7 @@
                 <a:ea typeface="Arial" pitchFamily="34" charset="-122"/>
                 <a:cs typeface="Arial" pitchFamily="34" charset="-120"/>
               </a:rPr>
-              <a:t>Context</a:t>
+              <a:t>Say what you're preparing for</a:t>
             </a:r>
             <a:endParaRPr lang="en-US" sz="1400" dirty="0"/>
           </a:p>
@@ -2364,8 +2380,8 @@
         </p:nvSpPr>
         <p:spPr>
           <a:xfrm>
-            <a:off x="713232" y="3511296"/>
-            <a:ext cx="2266112" cy="109728"/>
+            <a:off x="713232" y="3547872"/>
+            <a:ext cx="2266112" cy="219456"/>
           </a:xfrm>
           <a:prstGeom prst="rect">
             <a:avLst/>
@@ -2392,7 +2408,7 @@
                 <a:ea typeface="Arial" pitchFamily="34" charset="-122"/>
                 <a:cs typeface="Arial" pitchFamily="34" charset="-120"/>
               </a:rPr>
-              <a:t>Role, job description, CV</a:t>
+              <a:t>Attach the real job advert and your resume</a:t>
             </a:r>
             <a:endParaRPr lang="en-US" sz="1100" dirty="0"/>
           </a:p>
@@ -2406,7 +2422,7 @@
         </p:nvSpPr>
         <p:spPr>
           <a:xfrm>
-            <a:off x="3125648" y="3154680"/>
+            <a:off x="3125648" y="3246120"/>
             <a:ext cx="274320" cy="292608"/>
           </a:xfrm>
           <a:prstGeom prst="rect">
@@ -2445,8 +2461,8 @@
         </p:nvSpPr>
         <p:spPr>
           <a:xfrm>
-            <a:off x="3399968" y="2834640"/>
-            <a:ext cx="2558720" cy="932688"/>
+            <a:off x="3399968" y="2871216"/>
+            <a:ext cx="2558720" cy="1042416"/>
           </a:xfrm>
           <a:prstGeom prst="rect">
             <a:avLst/>
@@ -2470,7 +2486,7 @@
         </p:nvSpPr>
         <p:spPr>
           <a:xfrm>
-            <a:off x="3546272" y="2953512"/>
+            <a:off x="3546272" y="2990088"/>
             <a:ext cx="2266112" cy="219456"/>
           </a:xfrm>
           <a:prstGeom prst="rect">
@@ -2509,7 +2525,7 @@
         </p:nvSpPr>
         <p:spPr>
           <a:xfrm>
-            <a:off x="3546272" y="3182112"/>
+            <a:off x="3546272" y="3218688"/>
             <a:ext cx="2266112" cy="310896"/>
           </a:xfrm>
           <a:prstGeom prst="rect">
@@ -2534,7 +2550,7 @@
                 <a:ea typeface="Arial" pitchFamily="34" charset="-122"/>
                 <a:cs typeface="Arial" pitchFamily="34" charset="-120"/>
               </a:rPr>
-              <a:t>Rounds</a:t>
+              <a:t>Pick the rounds</a:t>
             </a:r>
             <a:endParaRPr lang="en-US" sz="1400" dirty="0"/>
           </a:p>
@@ -2548,8 +2564,8 @@
         </p:nvSpPr>
         <p:spPr>
           <a:xfrm>
-            <a:off x="3546272" y="3511296"/>
-            <a:ext cx="2266112" cy="109728"/>
+            <a:off x="3546272" y="3547872"/>
+            <a:ext cx="2266112" cy="219456"/>
           </a:xfrm>
           <a:prstGeom prst="rect">
             <a:avLst/>
@@ -2576,7 +2592,7 @@
                 <a:ea typeface="Arial" pitchFamily="34" charset="-122"/>
                 <a:cs typeface="Arial" pitchFamily="34" charset="-120"/>
               </a:rPr>
-              <a:t>One round, or a full loop</a:t>
+              <a:t>One, or a whole interview day</a:t>
             </a:r>
             <a:endParaRPr lang="en-US" sz="1100" dirty="0"/>
           </a:p>
@@ -2590,7 +2606,7 @@
         </p:nvSpPr>
         <p:spPr>
           <a:xfrm>
-            <a:off x="5958688" y="3154680"/>
+            <a:off x="5958688" y="3246120"/>
             <a:ext cx="274320" cy="292608"/>
           </a:xfrm>
           <a:prstGeom prst="rect">
@@ -2629,8 +2645,8 @@
         </p:nvSpPr>
         <p:spPr>
           <a:xfrm>
-            <a:off x="6233008" y="2834640"/>
-            <a:ext cx="2558720" cy="932688"/>
+            <a:off x="6233008" y="2871216"/>
+            <a:ext cx="2558720" cy="1042416"/>
           </a:xfrm>
           <a:prstGeom prst="rect">
             <a:avLst/>
@@ -2654,7 +2670,7 @@
         </p:nvSpPr>
         <p:spPr>
           <a:xfrm>
-            <a:off x="6379312" y="2953512"/>
+            <a:off x="6379312" y="2990088"/>
             <a:ext cx="2266112" cy="219456"/>
           </a:xfrm>
           <a:prstGeom prst="rect">
@@ -2693,7 +2709,7 @@
         </p:nvSpPr>
         <p:spPr>
           <a:xfrm>
-            <a:off x="6379312" y="3182112"/>
+            <a:off x="6379312" y="3218688"/>
             <a:ext cx="2266112" cy="310896"/>
           </a:xfrm>
           <a:prstGeom prst="rect">
@@ -2718,7 +2734,7 @@
                 <a:ea typeface="Arial" pitchFamily="34" charset="-122"/>
                 <a:cs typeface="Arial" pitchFamily="34" charset="-120"/>
               </a:rPr>
-              <a:t>Interviewer</a:t>
+              <a:t>Set the interviewer</a:t>
             </a:r>
             <a:endParaRPr lang="en-US" sz="1400" dirty="0"/>
           </a:p>
@@ -2732,8 +2748,8 @@
         </p:nvSpPr>
         <p:spPr>
           <a:xfrm>
-            <a:off x="6379312" y="3511296"/>
-            <a:ext cx="2266112" cy="109728"/>
+            <a:off x="6379312" y="3547872"/>
+            <a:ext cx="2266112" cy="219456"/>
           </a:xfrm>
           <a:prstGeom prst="rect">
             <a:avLst/>
@@ -2760,7 +2776,7 @@
                 <a:ea typeface="Arial" pitchFamily="34" charset="-122"/>
                 <a:cs typeface="Arial" pitchFamily="34" charset="-120"/>
               </a:rPr>
-              <a:t>Persona + four dials</a:t>
+              <a:t>Background, and how tough they are</a:t>
             </a:r>
             <a:endParaRPr lang="en-US" sz="1100" dirty="0"/>
           </a:p>
@@ -2774,7 +2790,7 @@
         </p:nvSpPr>
         <p:spPr>
           <a:xfrm>
-            <a:off x="8791727" y="3154680"/>
+            <a:off x="8791727" y="3246120"/>
             <a:ext cx="274320" cy="292608"/>
           </a:xfrm>
           <a:prstGeom prst="rect">
@@ -2813,8 +2829,8 @@
         </p:nvSpPr>
         <p:spPr>
           <a:xfrm>
-            <a:off x="9066047" y="2834640"/>
-            <a:ext cx="2558720" cy="932688"/>
+            <a:off x="9066047" y="2871216"/>
+            <a:ext cx="2558720" cy="1042416"/>
           </a:xfrm>
           <a:prstGeom prst="rect">
             <a:avLst/>
@@ -2838,7 +2854,7 @@
         </p:nvSpPr>
         <p:spPr>
           <a:xfrm>
-            <a:off x="9212351" y="2953512"/>
+            <a:off x="9212351" y="2990088"/>
             <a:ext cx="2266112" cy="219456"/>
           </a:xfrm>
           <a:prstGeom prst="rect">
@@ -2877,7 +2893,7 @@
         </p:nvSpPr>
         <p:spPr>
           <a:xfrm>
-            <a:off x="9212351" y="3182112"/>
+            <a:off x="9212351" y="3218688"/>
             <a:ext cx="2266112" cy="310896"/>
           </a:xfrm>
           <a:prstGeom prst="rect">
@@ -2902,7 +2918,7 @@
                 <a:ea typeface="Arial" pitchFamily="34" charset="-122"/>
                 <a:cs typeface="Arial" pitchFamily="34" charset="-120"/>
               </a:rPr>
-              <a:t>Review</a:t>
+              <a:t>Interview</a:t>
             </a:r>
             <a:endParaRPr lang="en-US" sz="1400" dirty="0"/>
           </a:p>
@@ -2916,8 +2932,8 @@
         </p:nvSpPr>
         <p:spPr>
           <a:xfrm>
-            <a:off x="9212351" y="3511296"/>
-            <a:ext cx="2266112" cy="109728"/>
+            <a:off x="9212351" y="3547872"/>
+            <a:ext cx="2266112" cy="219456"/>
           </a:xfrm>
           <a:prstGeom prst="rect">
             <a:avLst/>
@@ -2944,7 +2960,7 @@
                 <a:ea typeface="Arial" pitchFamily="34" charset="-122"/>
                 <a:cs typeface="Arial" pitchFamily="34" charset="-120"/>
               </a:rPr>
-              <a:t>Confirm and launch</a:t>
+              <a:t>Then read the report</a:t>
             </a:r>
             <a:endParaRPr lang="en-US" sz="1100" dirty="0"/>
           </a:p>
@@ -2958,8 +2974,8 @@
         </p:nvSpPr>
         <p:spPr>
           <a:xfrm>
-            <a:off x="566928" y="3931920"/>
-            <a:ext cx="3478682" cy="1170432"/>
+            <a:off x="566928" y="4078224"/>
+            <a:ext cx="3478682" cy="1298448"/>
           </a:xfrm>
           <a:prstGeom prst="rect">
             <a:avLst/>
@@ -2983,8 +2999,8 @@
         </p:nvSpPr>
         <p:spPr>
           <a:xfrm>
-            <a:off x="566928" y="3931920"/>
-            <a:ext cx="50292" cy="1170432"/>
+            <a:off x="566928" y="4078224"/>
+            <a:ext cx="50292" cy="1298448"/>
           </a:xfrm>
           <a:prstGeom prst="rect">
             <a:avLst/>
@@ -3008,7 +3024,7 @@
         </p:nvSpPr>
         <p:spPr>
           <a:xfrm>
-            <a:off x="822960" y="4023360"/>
+            <a:off x="822960" y="4187952"/>
             <a:ext cx="3058058" cy="256032"/>
           </a:xfrm>
           <a:prstGeom prst="rect">
@@ -3033,7 +3049,7 @@
                 <a:ea typeface="Arial" pitchFamily="34" charset="-122"/>
                 <a:cs typeface="Arial" pitchFamily="34" charset="-120"/>
               </a:rPr>
-              <a:t>Six round types</a:t>
+              <a:t>Six kinds of round</a:t>
             </a:r>
             <a:endParaRPr lang="en-US" sz="1300" dirty="0"/>
           </a:p>
@@ -3047,8 +3063,8 @@
         </p:nvSpPr>
         <p:spPr>
           <a:xfrm>
-            <a:off x="822960" y="4297680"/>
-            <a:ext cx="3058058" cy="749808"/>
+            <a:off x="822960" y="4498848"/>
+            <a:ext cx="3058058" cy="786384"/>
           </a:xfrm>
           <a:prstGeom prst="rect">
             <a:avLst/>
@@ -3062,12 +3078,12 @@
           <a:p>
             <a:pPr indent="0" marL="0">
               <a:lnSpc>
-                <a:spcPts val="1450"/>
-              </a:lnSpc>
-              <a:buNone/>
-            </a:pPr>
-            <a:r>
-              <a:rPr lang="en-US" sz="1050" dirty="0">
+                <a:spcPts val="1600"/>
+              </a:lnSpc>
+              <a:buNone/>
+            </a:pPr>
+            <a:r>
+              <a:rPr lang="en-US" sz="1100" dirty="0">
                 <a:solidFill>
                   <a:srgbClr val="3F4750"/>
                 </a:solidFill>
@@ -3075,19 +3091,19 @@
                 <a:ea typeface="Arial" pitchFamily="34" charset="-122"/>
                 <a:cs typeface="Arial" pitchFamily="34" charset="-120"/>
               </a:rPr>
-              <a:t>Screening · behavioural · HR</a:t>
-            </a:r>
-            <a:endParaRPr lang="en-US" sz="1050" dirty="0"/>
-          </a:p>
-          <a:p>
-            <a:pPr indent="0" marL="0">
-              <a:lnSpc>
-                <a:spcPts val="1450"/>
-              </a:lnSpc>
-              <a:buNone/>
-            </a:pPr>
-            <a:r>
-              <a:rPr lang="en-US" sz="1050" dirty="0">
+              <a:t>First interview, “tell me about a time”, HR</a:t>
+            </a:r>
+            <a:endParaRPr lang="en-US" sz="1100" dirty="0"/>
+          </a:p>
+          <a:p>
+            <a:pPr indent="0" marL="0">
+              <a:lnSpc>
+                <a:spcPts val="1600"/>
+              </a:lnSpc>
+              <a:buNone/>
+            </a:pPr>
+            <a:r>
+              <a:rPr lang="en-US" sz="1100" dirty="0">
                 <a:solidFill>
                   <a:srgbClr val="3F4750"/>
                 </a:solidFill>
@@ -3095,19 +3111,19 @@
                 <a:ea typeface="Arial" pitchFamily="34" charset="-122"/>
                 <a:cs typeface="Arial" pitchFamily="34" charset="-120"/>
               </a:rPr>
-              <a:t>Technical SWE · system design · case</a:t>
-            </a:r>
-            <a:endParaRPr lang="en-US" sz="1050" dirty="0"/>
-          </a:p>
-          <a:p>
-            <a:pPr indent="0" marL="0">
-              <a:lnSpc>
-                <a:spcPts val="1450"/>
-              </a:lnSpc>
-              <a:buNone/>
-            </a:pPr>
-            <a:r>
-              <a:rPr lang="en-US" sz="1050" dirty="0">
+              <a:t>Coding, system design, business case</a:t>
+            </a:r>
+            <a:endParaRPr lang="en-US" sz="1100" dirty="0"/>
+          </a:p>
+          <a:p>
+            <a:pPr indent="0" marL="0">
+              <a:lnSpc>
+                <a:spcPts val="1600"/>
+              </a:lnSpc>
+              <a:buNone/>
+            </a:pPr>
+            <a:r>
+              <a:rPr lang="en-US" sz="1100" dirty="0">
                 <a:solidFill>
                   <a:srgbClr val="3F4750"/>
                 </a:solidFill>
@@ -3115,9 +3131,9 @@
                 <a:ea typeface="Arial" pitchFamily="34" charset="-122"/>
                 <a:cs typeface="Arial" pitchFamily="34" charset="-120"/>
               </a:rPr>
-              <a:t>Each with its own rubric</a:t>
-            </a:r>
-            <a:endParaRPr lang="en-US" sz="1050" dirty="0"/>
+              <a:t>Each one is marked differently</a:t>
+            </a:r>
+            <a:endParaRPr lang="en-US" sz="1100" dirty="0"/>
           </a:p>
         </p:txBody>
       </p:sp>
@@ -3129,8 +3145,8 @@
         </p:nvSpPr>
         <p:spPr>
           <a:xfrm>
-            <a:off x="4356506" y="3931920"/>
-            <a:ext cx="3478682" cy="1170432"/>
+            <a:off x="4356506" y="4078224"/>
+            <a:ext cx="3478682" cy="1298448"/>
           </a:xfrm>
           <a:prstGeom prst="rect">
             <a:avLst/>
@@ -3154,8 +3170,8 @@
         </p:nvSpPr>
         <p:spPr>
           <a:xfrm>
-            <a:off x="4356506" y="3931920"/>
-            <a:ext cx="50292" cy="1170432"/>
+            <a:off x="4356506" y="4078224"/>
+            <a:ext cx="50292" cy="1298448"/>
           </a:xfrm>
           <a:prstGeom prst="rect">
             <a:avLst/>
@@ -3179,7 +3195,7 @@
         </p:nvSpPr>
         <p:spPr>
           <a:xfrm>
-            <a:off x="4612538" y="4023360"/>
+            <a:off x="4612538" y="4187952"/>
             <a:ext cx="3058058" cy="256032"/>
           </a:xfrm>
           <a:prstGeom prst="rect">
@@ -3204,7 +3220,7 @@
                 <a:ea typeface="Arial" pitchFamily="34" charset="-122"/>
                 <a:cs typeface="Arial" pitchFamily="34" charset="-120"/>
               </a:rPr>
-              <a:t>Text or voice</a:t>
+              <a:t>Type or speak</a:t>
             </a:r>
             <a:endParaRPr lang="en-US" sz="1300" dirty="0"/>
           </a:p>
@@ -3218,8 +3234,8 @@
         </p:nvSpPr>
         <p:spPr>
           <a:xfrm>
-            <a:off x="4612538" y="4297680"/>
-            <a:ext cx="3058058" cy="749808"/>
+            <a:off x="4612538" y="4498848"/>
+            <a:ext cx="3058058" cy="786384"/>
           </a:xfrm>
           <a:prstGeom prst="rect">
             <a:avLst/>
@@ -3233,12 +3249,12 @@
           <a:p>
             <a:pPr indent="0" marL="0">
               <a:lnSpc>
-                <a:spcPts val="1450"/>
-              </a:lnSpc>
-              <a:buNone/>
-            </a:pPr>
-            <a:r>
-              <a:rPr lang="en-US" sz="1050" dirty="0">
+                <a:spcPts val="1600"/>
+              </a:lnSpc>
+              <a:buNone/>
+            </a:pPr>
+            <a:r>
+              <a:rPr lang="en-US" sz="1100" dirty="0">
                 <a:solidFill>
                   <a:srgbClr val="3F4750"/>
                 </a:solidFill>
@@ -3246,19 +3262,19 @@
                 <a:ea typeface="Arial" pitchFamily="34" charset="-122"/>
                 <a:cs typeface="Arial" pitchFamily="34" charset="-120"/>
               </a:rPr>
-              <a:t>Streamed replies, live coaching rail</a:t>
-            </a:r>
-            <a:endParaRPr lang="en-US" sz="1050" dirty="0"/>
-          </a:p>
-          <a:p>
-            <a:pPr indent="0" marL="0">
-              <a:lnSpc>
-                <a:spcPts val="1450"/>
-              </a:lnSpc>
-              <a:buNone/>
-            </a:pPr>
-            <a:r>
-              <a:rPr lang="en-US" sz="1050" dirty="0">
+              <a:t>Answers appear as they are written</a:t>
+            </a:r>
+            <a:endParaRPr lang="en-US" sz="1100" dirty="0"/>
+          </a:p>
+          <a:p>
+            <a:pPr indent="0" marL="0">
+              <a:lnSpc>
+                <a:spcPts val="1600"/>
+              </a:lnSpc>
+              <a:buNone/>
+            </a:pPr>
+            <a:r>
+              <a:rPr lang="en-US" sz="1100" dirty="0">
                 <a:solidFill>
                   <a:srgbClr val="3F4750"/>
                 </a:solidFill>
@@ -3266,19 +3282,19 @@
                 <a:ea typeface="Arial" pitchFamily="34" charset="-122"/>
                 <a:cs typeface="Arial" pitchFamily="34" charset="-120"/>
               </a:rPr>
-              <a:t>Code editor on technical rounds</a:t>
-            </a:r>
-            <a:endParaRPr lang="en-US" sz="1050" dirty="0"/>
-          </a:p>
-          <a:p>
-            <a:pPr indent="0" marL="0">
-              <a:lnSpc>
-                <a:spcPts val="1450"/>
-              </a:lnSpc>
-              <a:buNone/>
-            </a:pPr>
-            <a:r>
-              <a:rPr lang="en-US" sz="1050" dirty="0">
+              <a:t>Or spoken aloud, and you reply by voice</a:t>
+            </a:r>
+            <a:endParaRPr lang="en-US" sz="1100" dirty="0"/>
+          </a:p>
+          <a:p>
+            <a:pPr indent="0" marL="0">
+              <a:lnSpc>
+                <a:spcPts val="1600"/>
+              </a:lnSpc>
+              <a:buNone/>
+            </a:pPr>
+            <a:r>
+              <a:rPr lang="en-US" sz="1100" dirty="0">
                 <a:solidFill>
                   <a:srgbClr val="3F4750"/>
                 </a:solidFill>
@@ -3286,9 +3302,9 @@
                 <a:ea typeface="Arial" pitchFamily="34" charset="-122"/>
                 <a:cs typeface="Arial" pitchFamily="34" charset="-120"/>
               </a:rPr>
-              <a:t>Azure speech-to-text and TTS</a:t>
-            </a:r>
-            <a:endParaRPr lang="en-US" sz="1050" dirty="0"/>
+              <a:t>A code editor for coding rounds</a:t>
+            </a:r>
+            <a:endParaRPr lang="en-US" sz="1100" dirty="0"/>
           </a:p>
         </p:txBody>
       </p:sp>
@@ -3300,8 +3316,8 @@
         </p:nvSpPr>
         <p:spPr>
           <a:xfrm>
-            <a:off x="8146085" y="3931920"/>
-            <a:ext cx="3478682" cy="1170432"/>
+            <a:off x="8146085" y="4078224"/>
+            <a:ext cx="3478682" cy="1298448"/>
           </a:xfrm>
           <a:prstGeom prst="rect">
             <a:avLst/>
@@ -3325,8 +3341,8 @@
         </p:nvSpPr>
         <p:spPr>
           <a:xfrm>
-            <a:off x="8146085" y="3931920"/>
-            <a:ext cx="50292" cy="1170432"/>
+            <a:off x="8146085" y="4078224"/>
+            <a:ext cx="50292" cy="1298448"/>
           </a:xfrm>
           <a:prstGeom prst="rect">
             <a:avLst/>
@@ -3350,7 +3366,7 @@
         </p:nvSpPr>
         <p:spPr>
           <a:xfrm>
-            <a:off x="8402117" y="4023360"/>
+            <a:off x="8402117" y="4187952"/>
             <a:ext cx="3058058" cy="256032"/>
           </a:xfrm>
           <a:prstGeom prst="rect">
@@ -3375,7 +3391,7 @@
                 <a:ea typeface="Arial" pitchFamily="34" charset="-122"/>
                 <a:cs typeface="Arial" pitchFamily="34" charset="-120"/>
               </a:rPr>
-              <a:t>A scored report</a:t>
+              <a:t>A report at the end</a:t>
             </a:r>
             <a:endParaRPr lang="en-US" sz="1300" dirty="0"/>
           </a:p>
@@ -3389,8 +3405,8 @@
         </p:nvSpPr>
         <p:spPr>
           <a:xfrm>
-            <a:off x="8402117" y="4297680"/>
-            <a:ext cx="3058058" cy="749808"/>
+            <a:off x="8402117" y="4498848"/>
+            <a:ext cx="3058058" cy="786384"/>
           </a:xfrm>
           <a:prstGeom prst="rect">
             <a:avLst/>
@@ -3404,12 +3420,12 @@
           <a:p>
             <a:pPr indent="0" marL="0">
               <a:lnSpc>
-                <a:spcPts val="1450"/>
-              </a:lnSpc>
-              <a:buNone/>
-            </a:pPr>
-            <a:r>
-              <a:rPr lang="en-US" sz="1050" dirty="0">
+                <a:spcPts val="1600"/>
+              </a:lnSpc>
+              <a:buNone/>
+            </a:pPr>
+            <a:r>
+              <a:rPr lang="en-US" sz="1100" dirty="0">
                 <a:solidFill>
                   <a:srgbClr val="3F4750"/>
                 </a:solidFill>
@@ -3417,19 +3433,19 @@
                 <a:ea typeface="Arial" pitchFamily="34" charset="-122"/>
                 <a:cs typeface="Arial" pitchFamily="34" charset="-120"/>
               </a:rPr>
-              <a:t>Breakdown + per-answer coaching</a:t>
-            </a:r>
-            <a:endParaRPr lang="en-US" sz="1050" dirty="0"/>
-          </a:p>
-          <a:p>
-            <a:pPr indent="0" marL="0">
-              <a:lnSpc>
-                <a:spcPts val="1450"/>
-              </a:lnSpc>
-              <a:buNone/>
-            </a:pPr>
-            <a:r>
-              <a:rPr lang="en-US" sz="1050" dirty="0">
+              <a:t>A score, and feedback on every answer</a:t>
+            </a:r>
+            <a:endParaRPr lang="en-US" sz="1100" dirty="0"/>
+          </a:p>
+          <a:p>
+            <a:pPr indent="0" marL="0">
+              <a:lnSpc>
+                <a:spcPts val="1600"/>
+              </a:lnSpc>
+              <a:buNone/>
+            </a:pPr>
+            <a:r>
+              <a:rPr lang="en-US" sz="1100" dirty="0">
                 <a:solidFill>
                   <a:srgbClr val="3F4750"/>
                 </a:solidFill>
@@ -3437,19 +3453,19 @@
                 <a:ea typeface="Arial" pitchFamily="34" charset="-122"/>
                 <a:cs typeface="Arial" pitchFamily="34" charset="-120"/>
               </a:rPr>
-              <a:t>Model answers · competency coverage</a:t>
-            </a:r>
-            <a:endParaRPr lang="en-US" sz="1050" dirty="0"/>
-          </a:p>
-          <a:p>
-            <a:pPr indent="0" marL="0">
-              <a:lnSpc>
-                <a:spcPts val="1450"/>
-              </a:lnSpc>
-              <a:buNone/>
-            </a:pPr>
-            <a:r>
-              <a:rPr lang="en-US" sz="1050" dirty="0">
+              <a:t>A stronger version of each answer</a:t>
+            </a:r>
+            <a:endParaRPr lang="en-US" sz="1100" dirty="0"/>
+          </a:p>
+          <a:p>
+            <a:pPr indent="0" marL="0">
+              <a:lnSpc>
+                <a:spcPts val="1600"/>
+              </a:lnSpc>
+              <a:buNone/>
+            </a:pPr>
+            <a:r>
+              <a:rPr lang="en-US" sz="1100" dirty="0">
                 <a:solidFill>
                   <a:srgbClr val="3F4750"/>
                 </a:solidFill>
@@ -3457,71 +3473,7 @@
                 <a:ea typeface="Arial" pitchFamily="34" charset="-122"/>
                 <a:cs typeface="Arial" pitchFamily="34" charset="-120"/>
               </a:rPr>
-              <a:t>Calibration: guess before the reveal</a:t>
-            </a:r>
-            <a:endParaRPr lang="en-US" sz="1050" dirty="0"/>
-          </a:p>
-        </p:txBody>
-      </p:sp>
-      <p:sp>
-        <p:nvSpPr>
-          <p:cNvPr id="41" name="Shape 39"/>
-          <p:cNvSpPr/>
-          <p:nvPr/>
-        </p:nvSpPr>
-        <p:spPr>
-          <a:xfrm>
-            <a:off x="566928" y="5266944"/>
-            <a:ext cx="11057839" cy="475488"/>
-          </a:xfrm>
-          <a:prstGeom prst="rect">
-            <a:avLst/>
-          </a:prstGeom>
-          <a:solidFill>
-            <a:srgbClr val="F5F7FA"/>
-          </a:solidFill>
-          <a:ln w="12700">
-            <a:solidFill>
-              <a:srgbClr val="F5F7FA"/>
-            </a:solidFill>
-            <a:prstDash val="solid"/>
-          </a:ln>
-        </p:spPr>
-      </p:sp>
-      <p:sp>
-        <p:nvSpPr>
-          <p:cNvPr id="42" name="Text 40"/>
-          <p:cNvSpPr/>
-          <p:nvPr/>
-        </p:nvSpPr>
-        <p:spPr>
-          <a:xfrm>
-            <a:off x="841248" y="5266944"/>
-            <a:ext cx="10600639" cy="475488"/>
-          </a:xfrm>
-          <a:prstGeom prst="rect">
-            <a:avLst/>
-          </a:prstGeom>
-          <a:noFill/>
-          <a:ln/>
-        </p:spPr>
-        <p:txBody>
-          <a:bodyPr wrap="square" rtlCol="0" anchor="ctr"/>
-          <a:lstStyle/>
-          <a:p>
-            <a:pPr indent="0" marL="0">
-              <a:buNone/>
-            </a:pPr>
-            <a:r>
-              <a:rPr lang="en-US" sz="1100" dirty="0">
-                <a:solidFill>
-                  <a:srgbClr val="3F4750"/>
-                </a:solidFill>
-                <a:latin typeface="Arial" pitchFamily="34" charset="0"/>
-                <a:ea typeface="Arial" pitchFamily="34" charset="-122"/>
-                <a:cs typeface="Arial" pitchFamily="34" charset="-120"/>
-              </a:rPr>
-              <a:t>Next.js 16 · React 19 · TypeScript · Supabase (Postgres + pgvector + RLS) · OpenAI · Azure Speech</a:t>
+              <a:t>Which skills you did and didn't cover</a:t>
             </a:r>
             <a:endParaRPr lang="en-US" sz="1100" dirty="0"/>
           </a:p>
@@ -3529,7 +3481,7 @@
       </p:sp>
       <p:sp>
         <p:nvSpPr>
-          <p:cNvPr id="44" name="Text 41"/>
+          <p:cNvPr id="42" name="Text 39"/>
           <p:cNvSpPr/>
           <p:nvPr/>
         </p:nvSpPr>
@@ -3568,7 +3520,7 @@
       </p:sp>
       <p:sp>
         <p:nvSpPr>
-          <p:cNvPr id="45" name="Text 42"/>
+          <p:cNvPr id="43" name="Text 40"/>
           <p:cNvSpPr/>
           <p:nvPr/>
         </p:nvSpPr>
@@ -4572,7 +4524,7 @@
                 <a:ea typeface="Arial" pitchFamily="34" charset="-122"/>
                 <a:cs typeface="Arial" pitchFamily="34" charset="-120"/>
               </a:rPr>
-              <a:t>299 tests, 31 files, all passing.</a:t>
+              <a:t>482 tests, 55 files, all passing.</a:t>
             </a:r>
             <a:pPr indent="0" marL="0">
               <a:lnSpc>
@@ -4710,7 +4662,7 @@
                 <a:ea typeface="Arial" pitchFamily="34" charset="-122"/>
                 <a:cs typeface="Arial" pitchFamily="34" charset="-120"/>
               </a:rPr>
-              <a:t>CI runs typecheck, lint and tests</a:t>
+              <a:t>CI runs typecheck, lint, the tests and a production build</a:t>
             </a:r>
             <a:pPr indent="0" marL="0">
               <a:lnSpc>
@@ -4727,7 +4679,7 @@
                 <a:ea typeface="Arial" pitchFamily="34" charset="-122"/>
                 <a:cs typeface="Arial" pitchFamily="34" charset="-120"/>
               </a:rPr>
-              <a:t>  on every push and pull request.</a:t>
+              <a:t>  on every push and pull request. The build step catches what types cannot — a missing Suspense boundary is a build failure, not a type error.</a:t>
             </a:r>
             <a:endParaRPr lang="en-US" sz="1150" dirty="0"/>
           </a:p>
@@ -5945,7 +5897,7 @@
                 <a:ea typeface="Arial" pitchFamily="34" charset="-122"/>
                 <a:cs typeface="Arial" pitchFamily="34" charset="-120"/>
               </a:rPr>
-              <a:t>ARCHITECTURE · THE CORE</a:t>
+              <a:t>HOW IT WORKS</a:t>
             </a:r>
             <a:endParaRPr lang="en-US" sz="1100" dirty="0"/>
           </a:p>
@@ -5984,7 +5936,7 @@
                 <a:ea typeface="Arial" pitchFamily="34" charset="-122"/>
                 <a:cs typeface="Arial" pitchFamily="34" charset="-120"/>
               </a:rPr>
-              <a:t>One turn: score first, then decide what to ask.</a:t>
+              <a:t>It marks your answer, then uses that mark to choose the next question.</a:t>
             </a:r>
             <a:endParaRPr lang="en-US" sz="3000" dirty="0"/>
           </a:p>
@@ -5998,8 +5950,8 @@
         </p:nvSpPr>
         <p:spPr>
           <a:xfrm>
-            <a:off x="566928" y="1682496"/>
-            <a:ext cx="1992112" cy="1371600"/>
+            <a:off x="566928" y="1517904"/>
+            <a:ext cx="2558720" cy="1042416"/>
           </a:xfrm>
           <a:prstGeom prst="rect">
             <a:avLst/>
@@ -6023,8 +5975,8 @@
         </p:nvSpPr>
         <p:spPr>
           <a:xfrm>
-            <a:off x="694944" y="1865376"/>
-            <a:ext cx="1736080" cy="310896"/>
+            <a:off x="713232" y="1591056"/>
+            <a:ext cx="365760" cy="237744"/>
           </a:xfrm>
           <a:prstGeom prst="rect">
             <a:avLst/>
@@ -6036,11 +5988,50 @@
           <a:bodyPr wrap="square" rtlCol="0" anchor="ctr"/>
           <a:lstStyle/>
           <a:p>
+            <a:pPr indent="0" marL="0">
+              <a:buNone/>
+            </a:pPr>
+            <a:r>
+              <a:rPr lang="en-US" sz="1100" b="1" dirty="0">
+                <a:solidFill>
+                  <a:srgbClr val="1D4ED8"/>
+                </a:solidFill>
+                <a:latin typeface="Arial" pitchFamily="34" charset="0"/>
+                <a:ea typeface="Arial" pitchFamily="34" charset="-122"/>
+                <a:cs typeface="Arial" pitchFamily="34" charset="-120"/>
+              </a:rPr>
+              <a:t>1</a:t>
+            </a:r>
+            <a:endParaRPr lang="en-US" sz="1100" dirty="0"/>
+          </a:p>
+        </p:txBody>
+      </p:sp>
+      <p:sp>
+        <p:nvSpPr>
+          <p:cNvPr id="7" name="Text 5"/>
+          <p:cNvSpPr/>
+          <p:nvPr/>
+        </p:nvSpPr>
+        <p:spPr>
+          <a:xfrm>
+            <a:off x="694944" y="1819656"/>
+            <a:ext cx="2302688" cy="310896"/>
+          </a:xfrm>
+          <a:prstGeom prst="rect">
+            <a:avLst/>
+          </a:prstGeom>
+          <a:noFill/>
+          <a:ln/>
+        </p:spPr>
+        <p:txBody>
+          <a:bodyPr wrap="square" rtlCol="0" anchor="ctr"/>
+          <a:lstStyle/>
+          <a:p>
             <a:pPr algn="ctr" indent="0" marL="0">
               <a:buNone/>
             </a:pPr>
             <a:r>
-              <a:rPr lang="en-US" sz="1350" b="1" dirty="0">
+              <a:rPr lang="en-US" sz="1300" b="1" dirty="0">
                 <a:solidFill>
                   <a:srgbClr val="14161A"/>
                 </a:solidFill>
@@ -6048,22 +6039,22 @@
                 <a:ea typeface="Arial" pitchFamily="34" charset="-122"/>
                 <a:cs typeface="Arial" pitchFamily="34" charset="-120"/>
               </a:rPr>
-              <a:t>Your answer</a:t>
-            </a:r>
-            <a:endParaRPr lang="en-US" sz="1350" dirty="0"/>
-          </a:p>
-        </p:txBody>
-      </p:sp>
-      <p:sp>
-        <p:nvSpPr>
-          <p:cNvPr id="7" name="Text 5"/>
-          <p:cNvSpPr/>
-          <p:nvPr/>
-        </p:nvSpPr>
-        <p:spPr>
-          <a:xfrm>
-            <a:off x="658368" y="2212848"/>
-            <a:ext cx="1809232" cy="713232"/>
+              <a:t>You answer</a:t>
+            </a:r>
+            <a:endParaRPr lang="en-US" sz="1300" dirty="0"/>
+          </a:p>
+        </p:txBody>
+      </p:sp>
+      <p:sp>
+        <p:nvSpPr>
+          <p:cNvPr id="8" name="Text 6"/>
+          <p:cNvSpPr/>
+          <p:nvPr/>
+        </p:nvSpPr>
+        <p:spPr>
+          <a:xfrm>
+            <a:off x="658368" y="2139696"/>
+            <a:ext cx="2375840" cy="402336"/>
           </a:xfrm>
           <a:prstGeom prst="rect">
             <a:avLst/>
@@ -6077,34 +6068,34 @@
           <a:p>
             <a:pPr algn="ctr" indent="0" marL="0">
               <a:lnSpc>
-                <a:spcPts val="1300"/>
-              </a:lnSpc>
-              <a:buNone/>
-            </a:pPr>
-            <a:r>
-              <a:rPr lang="en-US" sz="950" dirty="0">
+                <a:spcPts val="1350"/>
+              </a:lnSpc>
+              <a:buNone/>
+            </a:pPr>
+            <a:r>
+              <a:rPr lang="en-US" sz="1050" dirty="0">
                 <a:solidFill>
                   <a:srgbClr val="7A8593"/>
                 </a:solidFill>
-                <a:latin typeface="Courier New" pitchFamily="34" charset="0"/>
-                <a:ea typeface="Courier New" pitchFamily="34" charset="-122"/>
-                <a:cs typeface="Courier New" pitchFamily="34" charset="-120"/>
-              </a:rPr>
-              <a:t>POST /api/chat</a:t>
-            </a:r>
-            <a:endParaRPr lang="en-US" sz="950" dirty="0"/>
-          </a:p>
-        </p:txBody>
-      </p:sp>
-      <p:sp>
-        <p:nvSpPr>
-          <p:cNvPr id="8" name="Text 6"/>
-          <p:cNvSpPr/>
-          <p:nvPr/>
-        </p:nvSpPr>
-        <p:spPr>
-          <a:xfrm>
-            <a:off x="2559040" y="2221992"/>
+                <a:latin typeface="Arial" pitchFamily="34" charset="0"/>
+                <a:ea typeface="Arial" pitchFamily="34" charset="-122"/>
+                <a:cs typeface="Arial" pitchFamily="34" charset="-120"/>
+              </a:rPr>
+              <a:t>typed or spoken</a:t>
+            </a:r>
+            <a:endParaRPr lang="en-US" sz="1050" dirty="0"/>
+          </a:p>
+        </p:txBody>
+      </p:sp>
+      <p:sp>
+        <p:nvSpPr>
+          <p:cNvPr id="9" name="Text 7"/>
+          <p:cNvSpPr/>
+          <p:nvPr/>
+        </p:nvSpPr>
+        <p:spPr>
+          <a:xfrm>
+            <a:off x="3125648" y="1929384"/>
             <a:ext cx="274320" cy="292608"/>
           </a:xfrm>
           <a:prstGeom prst="rect">
@@ -6137,14 +6128,14 @@
       </p:sp>
       <p:sp>
         <p:nvSpPr>
-          <p:cNvPr id="9" name="Shape 7"/>
-          <p:cNvSpPr/>
-          <p:nvPr/>
-        </p:nvSpPr>
-        <p:spPr>
-          <a:xfrm>
-            <a:off x="2833360" y="1682496"/>
-            <a:ext cx="1992112" cy="1371600"/>
+          <p:cNvPr id="10" name="Shape 8"/>
+          <p:cNvSpPr/>
+          <p:nvPr/>
+        </p:nvSpPr>
+        <p:spPr>
+          <a:xfrm>
+            <a:off x="3399968" y="1517904"/>
+            <a:ext cx="2558720" cy="1042416"/>
           </a:xfrm>
           <a:prstGeom prst="rect">
             <a:avLst/>
@@ -6162,14 +6153,14 @@
       </p:sp>
       <p:sp>
         <p:nvSpPr>
-          <p:cNvPr id="10" name="Text 8"/>
-          <p:cNvSpPr/>
-          <p:nvPr/>
-        </p:nvSpPr>
-        <p:spPr>
-          <a:xfrm>
-            <a:off x="2961376" y="1865376"/>
-            <a:ext cx="1736080" cy="310896"/>
+          <p:cNvPr id="11" name="Text 9"/>
+          <p:cNvSpPr/>
+          <p:nvPr/>
+        </p:nvSpPr>
+        <p:spPr>
+          <a:xfrm>
+            <a:off x="3546272" y="1591056"/>
+            <a:ext cx="365760" cy="237744"/>
           </a:xfrm>
           <a:prstGeom prst="rect">
             <a:avLst/>
@@ -6181,11 +6172,50 @@
           <a:bodyPr wrap="square" rtlCol="0" anchor="ctr"/>
           <a:lstStyle/>
           <a:p>
+            <a:pPr indent="0" marL="0">
+              <a:buNone/>
+            </a:pPr>
+            <a:r>
+              <a:rPr lang="en-US" sz="1100" b="1" dirty="0">
+                <a:solidFill>
+                  <a:srgbClr val="1D4ED8"/>
+                </a:solidFill>
+                <a:latin typeface="Arial" pitchFamily="34" charset="0"/>
+                <a:ea typeface="Arial" pitchFamily="34" charset="-122"/>
+                <a:cs typeface="Arial" pitchFamily="34" charset="-120"/>
+              </a:rPr>
+              <a:t>2</a:t>
+            </a:r>
+            <a:endParaRPr lang="en-US" sz="1100" dirty="0"/>
+          </a:p>
+        </p:txBody>
+      </p:sp>
+      <p:sp>
+        <p:nvSpPr>
+          <p:cNvPr id="12" name="Text 10"/>
+          <p:cNvSpPr/>
+          <p:nvPr/>
+        </p:nvSpPr>
+        <p:spPr>
+          <a:xfrm>
+            <a:off x="3527984" y="1819656"/>
+            <a:ext cx="2302688" cy="310896"/>
+          </a:xfrm>
+          <a:prstGeom prst="rect">
+            <a:avLst/>
+          </a:prstGeom>
+          <a:noFill/>
+          <a:ln/>
+        </p:spPr>
+        <p:txBody>
+          <a:bodyPr wrap="square" rtlCol="0" anchor="ctr"/>
+          <a:lstStyle/>
+          <a:p>
             <a:pPr algn="ctr" indent="0" marL="0">
               <a:buNone/>
             </a:pPr>
             <a:r>
-              <a:rPr lang="en-US" sz="1350" b="1" dirty="0">
+              <a:rPr lang="en-US" sz="1300" b="1" dirty="0">
                 <a:solidFill>
                   <a:srgbClr val="14161A"/>
                 </a:solidFill>
@@ -6193,22 +6223,22 @@
                 <a:ea typeface="Arial" pitchFamily="34" charset="-122"/>
                 <a:cs typeface="Arial" pitchFamily="34" charset="-120"/>
               </a:rPr>
-              <a:t>Analyzer</a:t>
-            </a:r>
-            <a:endParaRPr lang="en-US" sz="1350" dirty="0"/>
-          </a:p>
-        </p:txBody>
-      </p:sp>
-      <p:sp>
-        <p:nvSpPr>
-          <p:cNvPr id="11" name="Text 9"/>
-          <p:cNvSpPr/>
-          <p:nvPr/>
-        </p:nvSpPr>
-        <p:spPr>
-          <a:xfrm>
-            <a:off x="2924800" y="2212848"/>
-            <a:ext cx="1809232" cy="713232"/>
+              <a:t>It marks the answer</a:t>
+            </a:r>
+            <a:endParaRPr lang="en-US" sz="1300" dirty="0"/>
+          </a:p>
+        </p:txBody>
+      </p:sp>
+      <p:sp>
+        <p:nvSpPr>
+          <p:cNvPr id="13" name="Text 11"/>
+          <p:cNvSpPr/>
+          <p:nvPr/>
+        </p:nvSpPr>
+        <p:spPr>
+          <a:xfrm>
+            <a:off x="3491408" y="2139696"/>
+            <a:ext cx="2375840" cy="402336"/>
           </a:xfrm>
           <a:prstGeom prst="rect">
             <a:avLst/>
@@ -6222,54 +6252,54 @@
           <a:p>
             <a:pPr algn="ctr" indent="0" marL="0">
               <a:lnSpc>
-                <a:spcPts val="1300"/>
-              </a:lnSpc>
-              <a:buNone/>
-            </a:pPr>
-            <a:r>
-              <a:rPr lang="en-US" sz="950" dirty="0">
+                <a:spcPts val="1350"/>
+              </a:lnSpc>
+              <a:buNone/>
+            </a:pPr>
+            <a:r>
+              <a:rPr lang="en-US" sz="1050" dirty="0">
                 <a:solidFill>
                   <a:srgbClr val="1D4ED8"/>
                 </a:solidFill>
-                <a:latin typeface="Courier New" pitchFamily="34" charset="0"/>
-                <a:ea typeface="Courier New" pitchFamily="34" charset="-122"/>
-                <a:cs typeface="Courier New" pitchFamily="34" charset="-120"/>
-              </a:rPr>
-              <a:t>gpt-4o-mini · temp 0.1</a:t>
-            </a:r>
-            <a:endParaRPr lang="en-US" sz="950" dirty="0"/>
+                <a:latin typeface="Arial" pitchFamily="34" charset="0"/>
+                <a:ea typeface="Arial" pitchFamily="34" charset="-122"/>
+                <a:cs typeface="Arial" pitchFamily="34" charset="-120"/>
+              </a:rPr>
+              <a:t>against a checklist for</a:t>
+            </a:r>
+            <a:endParaRPr lang="en-US" sz="1050" dirty="0"/>
           </a:p>
           <a:p>
             <a:pPr algn="ctr" indent="0" marL="0">
               <a:lnSpc>
-                <a:spcPts val="1300"/>
-              </a:lnSpc>
-              <a:buNone/>
-            </a:pPr>
-            <a:r>
-              <a:rPr lang="en-US" sz="950" dirty="0">
+                <a:spcPts val="1350"/>
+              </a:lnSpc>
+              <a:buNone/>
+            </a:pPr>
+            <a:r>
+              <a:rPr lang="en-US" sz="1050" dirty="0">
                 <a:solidFill>
                   <a:srgbClr val="1D4ED8"/>
                 </a:solidFill>
-                <a:latin typeface="Courier New" pitchFamily="34" charset="0"/>
-                <a:ea typeface="Courier New" pitchFamily="34" charset="-122"/>
-                <a:cs typeface="Courier New" pitchFamily="34" charset="-120"/>
-              </a:rPr>
-              <a:t>JSON rubric scores</a:t>
-            </a:r>
-            <a:endParaRPr lang="en-US" sz="950" dirty="0"/>
-          </a:p>
-        </p:txBody>
-      </p:sp>
-      <p:sp>
-        <p:nvSpPr>
-          <p:cNvPr id="12" name="Text 10"/>
-          <p:cNvSpPr/>
-          <p:nvPr/>
-        </p:nvSpPr>
-        <p:spPr>
-          <a:xfrm>
-            <a:off x="4825472" y="2221992"/>
+                <a:latin typeface="Arial" pitchFamily="34" charset="0"/>
+                <a:ea typeface="Arial" pitchFamily="34" charset="-122"/>
+                <a:cs typeface="Arial" pitchFamily="34" charset="-120"/>
+              </a:rPr>
+              <a:t>this kind of question</a:t>
+            </a:r>
+            <a:endParaRPr lang="en-US" sz="1050" dirty="0"/>
+          </a:p>
+        </p:txBody>
+      </p:sp>
+      <p:sp>
+        <p:nvSpPr>
+          <p:cNvPr id="14" name="Text 12"/>
+          <p:cNvSpPr/>
+          <p:nvPr/>
+        </p:nvSpPr>
+        <p:spPr>
+          <a:xfrm>
+            <a:off x="5958688" y="1929384"/>
             <a:ext cx="274320" cy="292608"/>
           </a:xfrm>
           <a:prstGeom prst="rect">
@@ -6302,14 +6332,14 @@
       </p:sp>
       <p:sp>
         <p:nvSpPr>
-          <p:cNvPr id="13" name="Shape 11"/>
-          <p:cNvSpPr/>
-          <p:nvPr/>
-        </p:nvSpPr>
-        <p:spPr>
-          <a:xfrm>
-            <a:off x="5099792" y="1682496"/>
-            <a:ext cx="1992112" cy="1371600"/>
+          <p:cNvPr id="15" name="Shape 13"/>
+          <p:cNvSpPr/>
+          <p:nvPr/>
+        </p:nvSpPr>
+        <p:spPr>
+          <a:xfrm>
+            <a:off x="6233008" y="1517904"/>
+            <a:ext cx="2558720" cy="1042416"/>
           </a:xfrm>
           <a:prstGeom prst="rect">
             <a:avLst/>
@@ -6327,14 +6357,14 @@
       </p:sp>
       <p:sp>
         <p:nvSpPr>
-          <p:cNvPr id="14" name="Text 12"/>
-          <p:cNvSpPr/>
-          <p:nvPr/>
-        </p:nvSpPr>
-        <p:spPr>
-          <a:xfrm>
-            <a:off x="5227808" y="1865376"/>
-            <a:ext cx="1736080" cy="310896"/>
+          <p:cNvPr id="16" name="Text 14"/>
+          <p:cNvSpPr/>
+          <p:nvPr/>
+        </p:nvSpPr>
+        <p:spPr>
+          <a:xfrm>
+            <a:off x="6379312" y="1591056"/>
+            <a:ext cx="365760" cy="237744"/>
           </a:xfrm>
           <a:prstGeom prst="rect">
             <a:avLst/>
@@ -6346,11 +6376,50 @@
           <a:bodyPr wrap="square" rtlCol="0" anchor="ctr"/>
           <a:lstStyle/>
           <a:p>
+            <a:pPr indent="0" marL="0">
+              <a:buNone/>
+            </a:pPr>
+            <a:r>
+              <a:rPr lang="en-US" sz="1100" b="1" dirty="0">
+                <a:solidFill>
+                  <a:srgbClr val="1D4ED8"/>
+                </a:solidFill>
+                <a:latin typeface="Arial" pitchFamily="34" charset="0"/>
+                <a:ea typeface="Arial" pitchFamily="34" charset="-122"/>
+                <a:cs typeface="Arial" pitchFamily="34" charset="-120"/>
+              </a:rPr>
+              <a:t>3</a:t>
+            </a:r>
+            <a:endParaRPr lang="en-US" sz="1100" dirty="0"/>
+          </a:p>
+        </p:txBody>
+      </p:sp>
+      <p:sp>
+        <p:nvSpPr>
+          <p:cNvPr id="17" name="Text 15"/>
+          <p:cNvSpPr/>
+          <p:nvPr/>
+        </p:nvSpPr>
+        <p:spPr>
+          <a:xfrm>
+            <a:off x="6361024" y="1819656"/>
+            <a:ext cx="2302688" cy="310896"/>
+          </a:xfrm>
+          <a:prstGeom prst="rect">
+            <a:avLst/>
+          </a:prstGeom>
+          <a:noFill/>
+          <a:ln/>
+        </p:spPr>
+        <p:txBody>
+          <a:bodyPr wrap="square" rtlCol="0" anchor="ctr"/>
+          <a:lstStyle/>
+          <a:p>
             <a:pPr algn="ctr" indent="0" marL="0">
               <a:buNone/>
             </a:pPr>
             <a:r>
-              <a:rPr lang="en-US" sz="1350" b="1" dirty="0">
+              <a:rPr lang="en-US" sz="1300" b="1" dirty="0">
                 <a:solidFill>
                   <a:srgbClr val="14161A"/>
                 </a:solidFill>
@@ -6358,22 +6427,22 @@
                 <a:ea typeface="Arial" pitchFamily="34" charset="-122"/>
                 <a:cs typeface="Arial" pitchFamily="34" charset="-120"/>
               </a:rPr>
-              <a:t>Decision engine</a:t>
-            </a:r>
-            <a:endParaRPr lang="en-US" sz="1350" dirty="0"/>
-          </a:p>
-        </p:txBody>
-      </p:sp>
-      <p:sp>
-        <p:nvSpPr>
-          <p:cNvPr id="15" name="Text 13"/>
-          <p:cNvSpPr/>
-          <p:nvPr/>
-        </p:nvSpPr>
-        <p:spPr>
-          <a:xfrm>
-            <a:off x="5191232" y="2212848"/>
-            <a:ext cx="1809232" cy="713232"/>
+              <a:t>It decides what to ask next</a:t>
+            </a:r>
+            <a:endParaRPr lang="en-US" sz="1300" dirty="0"/>
+          </a:p>
+        </p:txBody>
+      </p:sp>
+      <p:sp>
+        <p:nvSpPr>
+          <p:cNvPr id="18" name="Text 16"/>
+          <p:cNvSpPr/>
+          <p:nvPr/>
+        </p:nvSpPr>
+        <p:spPr>
+          <a:xfrm>
+            <a:off x="6324448" y="2139696"/>
+            <a:ext cx="2375840" cy="402336"/>
           </a:xfrm>
           <a:prstGeom prst="rect">
             <a:avLst/>
@@ -6387,54 +6456,54 @@
           <a:p>
             <a:pPr algn="ctr" indent="0" marL="0">
               <a:lnSpc>
-                <a:spcPts val="1300"/>
-              </a:lnSpc>
-              <a:buNone/>
-            </a:pPr>
-            <a:r>
-              <a:rPr lang="en-US" sz="950" dirty="0">
+                <a:spcPts val="1350"/>
+              </a:lnSpc>
+              <a:buNone/>
+            </a:pPr>
+            <a:r>
+              <a:rPr lang="en-US" sz="1050" dirty="0">
                 <a:solidFill>
                   <a:srgbClr val="1D4ED8"/>
                 </a:solidFill>
-                <a:latin typeface="Courier New" pitchFamily="34" charset="0"/>
-                <a:ea typeface="Courier New" pitchFamily="34" charset="-122"/>
-                <a:cs typeface="Courier New" pitchFamily="34" charset="-120"/>
-              </a:rPr>
-              <a:t>1 of 7 strategies</a:t>
-            </a:r>
-            <a:endParaRPr lang="en-US" sz="950" dirty="0"/>
+                <a:latin typeface="Arial" pitchFamily="34" charset="0"/>
+                <a:ea typeface="Arial" pitchFamily="34" charset="-122"/>
+                <a:cs typeface="Arial" pitchFamily="34" charset="-120"/>
+              </a:rPr>
+              <a:t>and how hard</a:t>
+            </a:r>
+            <a:endParaRPr lang="en-US" sz="1050" dirty="0"/>
           </a:p>
           <a:p>
             <a:pPr algn="ctr" indent="0" marL="0">
               <a:lnSpc>
-                <a:spcPts val="1300"/>
-              </a:lnSpc>
-              <a:buNone/>
-            </a:pPr>
-            <a:r>
-              <a:rPr lang="en-US" sz="950" dirty="0">
+                <a:spcPts val="1350"/>
+              </a:lnSpc>
+              <a:buNone/>
+            </a:pPr>
+            <a:r>
+              <a:rPr lang="en-US" sz="1050" dirty="0">
                 <a:solidFill>
                   <a:srgbClr val="1D4ED8"/>
                 </a:solidFill>
-                <a:latin typeface="Courier New" pitchFamily="34" charset="0"/>
-                <a:ea typeface="Courier New" pitchFamily="34" charset="-122"/>
-                <a:cs typeface="Courier New" pitchFamily="34" charset="-120"/>
-              </a:rPr>
-              <a:t>+ difficulty N/10</a:t>
-            </a:r>
-            <a:endParaRPr lang="en-US" sz="950" dirty="0"/>
-          </a:p>
-        </p:txBody>
-      </p:sp>
-      <p:sp>
-        <p:nvSpPr>
-          <p:cNvPr id="16" name="Text 14"/>
-          <p:cNvSpPr/>
-          <p:nvPr/>
-        </p:nvSpPr>
-        <p:spPr>
-          <a:xfrm>
-            <a:off x="7091904" y="2221992"/>
+                <a:latin typeface="Arial" pitchFamily="34" charset="0"/>
+                <a:ea typeface="Arial" pitchFamily="34" charset="-122"/>
+                <a:cs typeface="Arial" pitchFamily="34" charset="-120"/>
+              </a:rPr>
+              <a:t>to make it</a:t>
+            </a:r>
+            <a:endParaRPr lang="en-US" sz="1050" dirty="0"/>
+          </a:p>
+        </p:txBody>
+      </p:sp>
+      <p:sp>
+        <p:nvSpPr>
+          <p:cNvPr id="19" name="Text 17"/>
+          <p:cNvSpPr/>
+          <p:nvPr/>
+        </p:nvSpPr>
+        <p:spPr>
+          <a:xfrm>
+            <a:off x="8791727" y="1929384"/>
             <a:ext cx="274320" cy="292608"/>
           </a:xfrm>
           <a:prstGeom prst="rect">
@@ -6467,179 +6536,14 @@
       </p:sp>
       <p:sp>
         <p:nvSpPr>
-          <p:cNvPr id="17" name="Shape 15"/>
-          <p:cNvSpPr/>
-          <p:nvPr/>
-        </p:nvSpPr>
-        <p:spPr>
-          <a:xfrm>
-            <a:off x="7366224" y="1682496"/>
-            <a:ext cx="1992112" cy="1371600"/>
-          </a:xfrm>
-          <a:prstGeom prst="rect">
-            <a:avLst/>
-          </a:prstGeom>
-          <a:solidFill>
-            <a:srgbClr val="EAF0FE"/>
-          </a:solidFill>
-          <a:ln w="15875">
-            <a:solidFill>
-              <a:srgbClr val="1D4ED8"/>
-            </a:solidFill>
-            <a:prstDash val="solid"/>
-          </a:ln>
-        </p:spPr>
-      </p:sp>
-      <p:sp>
-        <p:nvSpPr>
-          <p:cNvPr id="18" name="Text 16"/>
-          <p:cNvSpPr/>
-          <p:nvPr/>
-        </p:nvSpPr>
-        <p:spPr>
-          <a:xfrm>
-            <a:off x="7494240" y="1865376"/>
-            <a:ext cx="1736080" cy="310896"/>
-          </a:xfrm>
-          <a:prstGeom prst="rect">
-            <a:avLst/>
-          </a:prstGeom>
-          <a:noFill/>
-          <a:ln/>
-        </p:spPr>
-        <p:txBody>
-          <a:bodyPr wrap="square" rtlCol="0" anchor="ctr"/>
-          <a:lstStyle/>
-          <a:p>
-            <a:pPr algn="ctr" indent="0" marL="0">
-              <a:buNone/>
-            </a:pPr>
-            <a:r>
-              <a:rPr lang="en-US" sz="1350" b="1" dirty="0">
-                <a:solidFill>
-                  <a:srgbClr val="14161A"/>
-                </a:solidFill>
-                <a:latin typeface="Arial" pitchFamily="34" charset="0"/>
-                <a:ea typeface="Arial" pitchFamily="34" charset="-122"/>
-                <a:cs typeface="Arial" pitchFamily="34" charset="-120"/>
-              </a:rPr>
-              <a:t>Steering block</a:t>
-            </a:r>
-            <a:endParaRPr lang="en-US" sz="1350" dirty="0"/>
-          </a:p>
-        </p:txBody>
-      </p:sp>
-      <p:sp>
-        <p:nvSpPr>
-          <p:cNvPr id="19" name="Text 17"/>
-          <p:cNvSpPr/>
-          <p:nvPr/>
-        </p:nvSpPr>
-        <p:spPr>
-          <a:xfrm>
-            <a:off x="7457664" y="2212848"/>
-            <a:ext cx="1809232" cy="713232"/>
-          </a:xfrm>
-          <a:prstGeom prst="rect">
-            <a:avLst/>
-          </a:prstGeom>
-          <a:noFill/>
-          <a:ln/>
-        </p:spPr>
-        <p:txBody>
-          <a:bodyPr wrap="square" rtlCol="0" anchor="t"/>
-          <a:lstStyle/>
-          <a:p>
-            <a:pPr algn="ctr" indent="0" marL="0">
-              <a:lnSpc>
-                <a:spcPts val="1300"/>
-              </a:lnSpc>
-              <a:buNone/>
-            </a:pPr>
-            <a:r>
-              <a:rPr lang="en-US" sz="950" dirty="0">
-                <a:solidFill>
-                  <a:srgbClr val="1D4ED8"/>
-                </a:solidFill>
-                <a:latin typeface="Courier New" pitchFamily="34" charset="0"/>
-                <a:ea typeface="Courier New" pitchFamily="34" charset="-122"/>
-                <a:cs typeface="Courier New" pitchFamily="34" charset="-120"/>
-              </a:rPr>
-              <a:t>private instruction</a:t>
-            </a:r>
-            <a:endParaRPr lang="en-US" sz="950" dirty="0"/>
-          </a:p>
-          <a:p>
-            <a:pPr algn="ctr" indent="0" marL="0">
-              <a:lnSpc>
-                <a:spcPts val="1300"/>
-              </a:lnSpc>
-              <a:buNone/>
-            </a:pPr>
-            <a:r>
-              <a:rPr lang="en-US" sz="950" dirty="0">
-                <a:solidFill>
-                  <a:srgbClr val="1D4ED8"/>
-                </a:solidFill>
-                <a:latin typeface="Courier New" pitchFamily="34" charset="0"/>
-                <a:ea typeface="Courier New" pitchFamily="34" charset="-122"/>
-                <a:cs typeface="Courier New" pitchFamily="34" charset="-120"/>
-              </a:rPr>
-              <a:t>inside the prompt</a:t>
-            </a:r>
-            <a:endParaRPr lang="en-US" sz="950" dirty="0"/>
-          </a:p>
-        </p:txBody>
-      </p:sp>
-      <p:sp>
-        <p:nvSpPr>
-          <p:cNvPr id="20" name="Text 18"/>
-          <p:cNvSpPr/>
-          <p:nvPr/>
-        </p:nvSpPr>
-        <p:spPr>
-          <a:xfrm>
-            <a:off x="9358335" y="2221992"/>
-            <a:ext cx="274320" cy="292608"/>
-          </a:xfrm>
-          <a:prstGeom prst="rect">
-            <a:avLst/>
-          </a:prstGeom>
-          <a:noFill/>
-          <a:ln/>
-        </p:spPr>
-        <p:txBody>
-          <a:bodyPr wrap="square" rtlCol="0" anchor="ctr"/>
-          <a:lstStyle/>
-          <a:p>
-            <a:pPr algn="ctr" indent="0" marL="0">
-              <a:buNone/>
-            </a:pPr>
-            <a:r>
-              <a:rPr lang="en-US" sz="1600" b="1" dirty="0">
-                <a:solidFill>
-                  <a:srgbClr val="1D4ED8"/>
-                </a:solidFill>
-                <a:latin typeface="Arial" pitchFamily="34" charset="0"/>
-                <a:ea typeface="Arial" pitchFamily="34" charset="-122"/>
-                <a:cs typeface="Arial" pitchFamily="34" charset="-120"/>
-              </a:rPr>
-              <a:t>▸</a:t>
-            </a:r>
-            <a:endParaRPr lang="en-US" sz="1600" dirty="0"/>
-          </a:p>
-        </p:txBody>
-      </p:sp>
-      <p:sp>
-        <p:nvSpPr>
-          <p:cNvPr id="21" name="Shape 19"/>
-          <p:cNvSpPr/>
-          <p:nvPr/>
-        </p:nvSpPr>
-        <p:spPr>
-          <a:xfrm>
-            <a:off x="9632655" y="1682496"/>
-            <a:ext cx="1992112" cy="1371600"/>
+          <p:cNvPr id="20" name="Shape 18"/>
+          <p:cNvSpPr/>
+          <p:nvPr/>
+        </p:nvSpPr>
+        <p:spPr>
+          <a:xfrm>
+            <a:off x="9066047" y="1517904"/>
+            <a:ext cx="2558720" cy="1042416"/>
           </a:xfrm>
           <a:prstGeom prst="rect">
             <a:avLst/>
@@ -6657,14 +6561,53 @@
       </p:sp>
       <p:sp>
         <p:nvSpPr>
+          <p:cNvPr id="21" name="Text 19"/>
+          <p:cNvSpPr/>
+          <p:nvPr/>
+        </p:nvSpPr>
+        <p:spPr>
+          <a:xfrm>
+            <a:off x="9212351" y="1591056"/>
+            <a:ext cx="365760" cy="237744"/>
+          </a:xfrm>
+          <a:prstGeom prst="rect">
+            <a:avLst/>
+          </a:prstGeom>
+          <a:noFill/>
+          <a:ln/>
+        </p:spPr>
+        <p:txBody>
+          <a:bodyPr wrap="square" rtlCol="0" anchor="ctr"/>
+          <a:lstStyle/>
+          <a:p>
+            <a:pPr indent="0" marL="0">
+              <a:buNone/>
+            </a:pPr>
+            <a:r>
+              <a:rPr lang="en-US" sz="1100" b="1" dirty="0">
+                <a:solidFill>
+                  <a:srgbClr val="1D4ED8"/>
+                </a:solidFill>
+                <a:latin typeface="Arial" pitchFamily="34" charset="0"/>
+                <a:ea typeface="Arial" pitchFamily="34" charset="-122"/>
+                <a:cs typeface="Arial" pitchFamily="34" charset="-120"/>
+              </a:rPr>
+              <a:t>4</a:t>
+            </a:r>
+            <a:endParaRPr lang="en-US" sz="1100" dirty="0"/>
+          </a:p>
+        </p:txBody>
+      </p:sp>
+      <p:sp>
+        <p:nvSpPr>
           <p:cNvPr id="22" name="Text 20"/>
           <p:cNvSpPr/>
           <p:nvPr/>
         </p:nvSpPr>
         <p:spPr>
           <a:xfrm>
-            <a:off x="9760671" y="1865376"/>
-            <a:ext cx="1736080" cy="310896"/>
+            <a:off x="9194063" y="1819656"/>
+            <a:ext cx="2302688" cy="310896"/>
           </a:xfrm>
           <a:prstGeom prst="rect">
             <a:avLst/>
@@ -6680,7 +6623,7 @@
               <a:buNone/>
             </a:pPr>
             <a:r>
-              <a:rPr lang="en-US" sz="1350" b="1" dirty="0">
+              <a:rPr lang="en-US" sz="1300" b="1" dirty="0">
                 <a:solidFill>
                   <a:srgbClr val="14161A"/>
                 </a:solidFill>
@@ -6688,9 +6631,9 @@
                 <a:ea typeface="Arial" pitchFamily="34" charset="-122"/>
                 <a:cs typeface="Arial" pitchFamily="34" charset="-120"/>
               </a:rPr>
-              <a:t>Next question</a:t>
-            </a:r>
-            <a:endParaRPr lang="en-US" sz="1350" dirty="0"/>
+              <a:t>It asks the follow-up</a:t>
+            </a:r>
+            <a:endParaRPr lang="en-US" sz="1300" dirty="0"/>
           </a:p>
         </p:txBody>
       </p:sp>
@@ -6702,8 +6645,8 @@
         </p:nvSpPr>
         <p:spPr>
           <a:xfrm>
-            <a:off x="9724095" y="2212848"/>
-            <a:ext cx="1809232" cy="713232"/>
+            <a:off x="9157487" y="2139696"/>
+            <a:ext cx="2375840" cy="402336"/>
           </a:xfrm>
           <a:prstGeom prst="rect">
             <a:avLst/>
@@ -6717,22 +6660,42 @@
           <a:p>
             <a:pPr algn="ctr" indent="0" marL="0">
               <a:lnSpc>
-                <a:spcPts val="1300"/>
-              </a:lnSpc>
-              <a:buNone/>
-            </a:pPr>
-            <a:r>
-              <a:rPr lang="en-US" sz="950" dirty="0">
+                <a:spcPts val="1350"/>
+              </a:lnSpc>
+              <a:buNone/>
+            </a:pPr>
+            <a:r>
+              <a:rPr lang="en-US" sz="1050" dirty="0">
                 <a:solidFill>
                   <a:srgbClr val="7A8593"/>
                 </a:solidFill>
-                <a:latin typeface="Courier New" pitchFamily="34" charset="0"/>
-                <a:ea typeface="Courier New" pitchFamily="34" charset="-122"/>
-                <a:cs typeface="Courier New" pitchFamily="34" charset="-120"/>
-              </a:rPr>
-              <a:t>streamed back</a:t>
-            </a:r>
-            <a:endParaRPr lang="en-US" sz="950" dirty="0"/>
+                <a:latin typeface="Arial" pitchFamily="34" charset="0"/>
+                <a:ea typeface="Arial" pitchFamily="34" charset="-122"/>
+                <a:cs typeface="Arial" pitchFamily="34" charset="-120"/>
+              </a:rPr>
+              <a:t>aimed at what</a:t>
+            </a:r>
+            <a:endParaRPr lang="en-US" sz="1050" dirty="0"/>
+          </a:p>
+          <a:p>
+            <a:pPr algn="ctr" indent="0" marL="0">
+              <a:lnSpc>
+                <a:spcPts val="1350"/>
+              </a:lnSpc>
+              <a:buNone/>
+            </a:pPr>
+            <a:r>
+              <a:rPr lang="en-US" sz="1050" dirty="0">
+                <a:solidFill>
+                  <a:srgbClr val="7A8593"/>
+                </a:solidFill>
+                <a:latin typeface="Arial" pitchFamily="34" charset="0"/>
+                <a:ea typeface="Arial" pitchFamily="34" charset="-122"/>
+                <a:cs typeface="Arial" pitchFamily="34" charset="-120"/>
+              </a:rPr>
+              <a:t>you got wrong</a:t>
+            </a:r>
+            <a:endParaRPr lang="en-US" sz="1050" dirty="0"/>
           </a:p>
         </p:txBody>
       </p:sp>
@@ -6744,18 +6707,18 @@
         </p:nvSpPr>
         <p:spPr>
           <a:xfrm>
-            <a:off x="566928" y="3273552"/>
-            <a:ext cx="5373472" cy="969264"/>
+            <a:off x="566928" y="2651760"/>
+            <a:ext cx="11057839" cy="420624"/>
           </a:xfrm>
           <a:prstGeom prst="rect">
             <a:avLst/>
           </a:prstGeom>
           <a:solidFill>
-            <a:srgbClr val="FDF4E7"/>
+            <a:srgbClr val="FFFFFF"/>
           </a:solidFill>
           <a:ln w="12700">
             <a:solidFill>
-              <a:srgbClr val="FDF4E7"/>
+              <a:srgbClr val="FFFFFF"/>
             </a:solidFill>
             <a:prstDash val="solid"/>
           </a:ln>
@@ -6769,14 +6732,14 @@
         </p:nvSpPr>
         <p:spPr>
           <a:xfrm>
-            <a:off x="566928" y="3273552"/>
-            <a:ext cx="50292" cy="969264"/>
+            <a:off x="566928" y="2651760"/>
+            <a:ext cx="50292" cy="420624"/>
           </a:xfrm>
           <a:prstGeom prst="rect">
             <a:avLst/>
           </a:prstGeom>
           <a:solidFill>
-            <a:srgbClr val="9A5B08"/>
+            <a:srgbClr val="7A8593"/>
           </a:solidFill>
           <a:ln w="12700">
             <a:solidFill>
@@ -6794,44 +6757,38 @@
         </p:nvSpPr>
         <p:spPr>
           <a:xfrm>
-            <a:off x="841248" y="3383280"/>
-            <a:ext cx="4916272" cy="768096"/>
-          </a:xfrm>
-          <a:prstGeom prst="rect">
-            <a:avLst/>
-          </a:prstGeom>
-          <a:noFill/>
-          <a:ln/>
-        </p:spPr>
-        <p:txBody>
-          <a:bodyPr wrap="square" rtlCol="0" anchor="t"/>
-          <a:lstStyle/>
-          <a:p>
-            <a:pPr indent="0" marL="0">
-              <a:lnSpc>
-                <a:spcPts val="1600"/>
-              </a:lnSpc>
-              <a:buNone/>
-            </a:pPr>
-            <a:r>
-              <a:rPr lang="en-US" sz="1150" b="1" dirty="0">
-                <a:solidFill>
-                  <a:srgbClr val="9A5B08"/>
-                </a:solidFill>
-                <a:latin typeface="Arial" pitchFamily="34" charset="0"/>
-                <a:ea typeface="Arial" pitchFamily="34" charset="-122"/>
-                <a:cs typeface="Arial" pitchFamily="34" charset="-120"/>
-              </a:rPr>
-              <a:t>Bounded, not blocking.  </a:t>
-            </a:r>
-            <a:pPr indent="0" marL="0">
-              <a:lnSpc>
-                <a:spcPts val="1600"/>
-              </a:lnSpc>
-              <a:buNone/>
-            </a:pPr>
-            <a:r>
-              <a:rPr lang="en-US" sz="1150" dirty="0">
+            <a:off x="841248" y="2651760"/>
+            <a:ext cx="10600639" cy="420624"/>
+          </a:xfrm>
+          <a:prstGeom prst="rect">
+            <a:avLst/>
+          </a:prstGeom>
+          <a:noFill/>
+          <a:ln/>
+        </p:spPr>
+        <p:txBody>
+          <a:bodyPr wrap="square" rtlCol="0" anchor="ctr"/>
+          <a:lstStyle/>
+          <a:p>
+            <a:pPr indent="0" marL="0">
+              <a:buNone/>
+            </a:pPr>
+            <a:r>
+              <a:rPr lang="en-US" sz="1050" b="1" dirty="0">
+                <a:solidFill>
+                  <a:srgbClr val="14161A"/>
+                </a:solidFill>
+                <a:latin typeface="Arial" pitchFamily="34" charset="0"/>
+                <a:ea typeface="Arial" pitchFamily="34" charset="-122"/>
+                <a:cs typeface="Arial" pitchFamily="34" charset="-120"/>
+              </a:rPr>
+              <a:t>Which checklist?  </a:t>
+            </a:r>
+            <a:pPr indent="0" marL="0">
+              <a:buNone/>
+            </a:pPr>
+            <a:r>
+              <a:rPr lang="en-US" sz="1050" dirty="0">
                 <a:solidFill>
                   <a:srgbClr val="3F4750"/>
                 </a:solidFill>
@@ -6839,9 +6796,37 @@
                 <a:ea typeface="Arial" pitchFamily="34" charset="-122"/>
                 <a:cs typeface="Arial" pitchFamily="34" charset="-120"/>
               </a:rPr>
-              <a:t>Scoring gets 4 s (STEER_DEADLINE_MS). Past it the reply starts unsteered — the verdict is still collected and stored.</a:t>
-            </a:r>
-            <a:endParaRPr lang="en-US" sz="1150" dirty="0"/>
+              <a:t>Story rounds — did you set the scene, was the task clear, what did </a:t>
+            </a:r>
+            <a:pPr indent="0" marL="0">
+              <a:buNone/>
+            </a:pPr>
+            <a:r>
+              <a:rPr lang="en-US" sz="1050" i="1" dirty="0">
+                <a:solidFill>
+                  <a:srgbClr val="3F4750"/>
+                </a:solidFill>
+                <a:latin typeface="Arial" pitchFamily="34" charset="0"/>
+                <a:ea typeface="Arial" pitchFamily="34" charset="-122"/>
+                <a:cs typeface="Arial" pitchFamily="34" charset="-120"/>
+              </a:rPr>
+              <a:t>you</a:t>
+            </a:r>
+            <a:pPr indent="0" marL="0">
+              <a:buNone/>
+            </a:pPr>
+            <a:r>
+              <a:rPr lang="en-US" sz="1050" dirty="0">
+                <a:solidFill>
+                  <a:srgbClr val="3F4750"/>
+                </a:solidFill>
+                <a:latin typeface="Arial" pitchFamily="34" charset="0"/>
+                <a:ea typeface="Arial" pitchFamily="34" charset="-122"/>
+                <a:cs typeface="Arial" pitchFamily="34" charset="-120"/>
+              </a:rPr>
+              <a:t> do, what was the result?      Technical rounds — did you understand the problem, is the answer correct, is it efficient, did you handle the tricky cases?</a:t>
+            </a:r>
+            <a:endParaRPr lang="en-US" sz="1050" dirty="0"/>
           </a:p>
         </p:txBody>
       </p:sp>
@@ -6853,18 +6838,18 @@
         </p:nvSpPr>
         <p:spPr>
           <a:xfrm>
-            <a:off x="6251296" y="3273552"/>
-            <a:ext cx="5373472" cy="969264"/>
+            <a:off x="566928" y="3163824"/>
+            <a:ext cx="11057839" cy="1773936"/>
           </a:xfrm>
           <a:prstGeom prst="rect">
             <a:avLst/>
           </a:prstGeom>
           <a:solidFill>
-            <a:srgbClr val="EAF5EE"/>
+            <a:srgbClr val="F5F7FA"/>
           </a:solidFill>
           <a:ln w="12700">
             <a:solidFill>
-              <a:srgbClr val="EAF5EE"/>
+              <a:srgbClr val="F5F7FA"/>
             </a:solidFill>
             <a:prstDash val="solid"/>
           </a:ln>
@@ -6878,14 +6863,14 @@
         </p:nvSpPr>
         <p:spPr>
           <a:xfrm>
-            <a:off x="6251296" y="3273552"/>
-            <a:ext cx="50292" cy="969264"/>
+            <a:off x="566928" y="3163824"/>
+            <a:ext cx="50292" cy="1773936"/>
           </a:xfrm>
           <a:prstGeom prst="rect">
             <a:avLst/>
           </a:prstGeom>
           <a:solidFill>
-            <a:srgbClr val="15803D"/>
+            <a:srgbClr val="1D4ED8"/>
           </a:solidFill>
           <a:ln w="12700">
             <a:solidFill>
@@ -6903,8 +6888,47 @@
         </p:nvSpPr>
         <p:spPr>
           <a:xfrm>
-            <a:off x="6525616" y="3383280"/>
-            <a:ext cx="4916272" cy="768096"/>
+            <a:off x="877824" y="3236976"/>
+            <a:ext cx="10417759" cy="256032"/>
+          </a:xfrm>
+          <a:prstGeom prst="rect">
+            <a:avLst/>
+          </a:prstGeom>
+          <a:noFill/>
+          <a:ln/>
+        </p:spPr>
+        <p:txBody>
+          <a:bodyPr wrap="square" rtlCol="0" anchor="ctr"/>
+          <a:lstStyle/>
+          <a:p>
+            <a:pPr indent="0" marL="0">
+              <a:buNone/>
+            </a:pPr>
+            <a:r>
+              <a:rPr lang="en-US" sz="1250" b="1" dirty="0">
+                <a:solidFill>
+                  <a:srgbClr val="1D4ED8"/>
+                </a:solidFill>
+                <a:latin typeface="Arial" pitchFamily="34" charset="0"/>
+                <a:ea typeface="Arial" pitchFamily="34" charset="-122"/>
+                <a:cs typeface="Arial" pitchFamily="34" charset="-120"/>
+              </a:rPr>
+              <a:t>A real example</a:t>
+            </a:r>
+            <a:endParaRPr lang="en-US" sz="1250" dirty="0"/>
+          </a:p>
+        </p:txBody>
+      </p:sp>
+      <p:sp>
+        <p:nvSpPr>
+          <p:cNvPr id="30" name="Text 28"/>
+          <p:cNvSpPr/>
+          <p:nvPr/>
+        </p:nvSpPr>
+        <p:spPr>
+          <a:xfrm>
+            <a:off x="877824" y="3529584"/>
+            <a:ext cx="10417759" cy="1316736"/>
           </a:xfrm>
           <a:prstGeom prst="rect">
             <a:avLst/>
@@ -6923,24 +6947,24 @@
               <a:buNone/>
             </a:pPr>
             <a:r>
-              <a:rPr lang="en-US" sz="1150" b="1" dirty="0">
-                <a:solidFill>
-                  <a:srgbClr val="15803D"/>
-                </a:solidFill>
-                <a:latin typeface="Arial" pitchFamily="34" charset="0"/>
-                <a:ea typeface="Arial" pitchFamily="34" charset="-122"/>
-                <a:cs typeface="Arial" pitchFamily="34" charset="-120"/>
-              </a:rPr>
-              <a:t>One transaction.  </a:t>
-            </a:r>
-            <a:pPr indent="0" marL="0">
-              <a:lnSpc>
-                <a:spcPts val="1600"/>
-              </a:lnSpc>
-              <a:buNone/>
-            </a:pPr>
-            <a:r>
-              <a:rPr lang="en-US" sz="1150" dirty="0">
+              <a:rPr lang="en-US" sz="1100" b="1" dirty="0">
+                <a:solidFill>
+                  <a:srgbClr val="14161A"/>
+                </a:solidFill>
+                <a:latin typeface="Arial" pitchFamily="34" charset="0"/>
+                <a:ea typeface="Arial" pitchFamily="34" charset="-122"/>
+                <a:cs typeface="Arial" pitchFamily="34" charset="-120"/>
+              </a:rPr>
+              <a:t>Question   </a:t>
+            </a:r>
+            <a:pPr indent="0" marL="0">
+              <a:lnSpc>
+                <a:spcPts val="1600"/>
+              </a:lnSpc>
+              <a:buNone/>
+            </a:pPr>
+            <a:r>
+              <a:rPr lang="en-US" sz="1100" dirty="0">
                 <a:solidFill>
                   <a:srgbClr val="3F4750"/>
                 </a:solidFill>
@@ -6948,22 +6972,194 @@
                 <a:ea typeface="Arial" pitchFamily="34" charset="-122"/>
                 <a:cs typeface="Arial" pitchFamily="34" charset="-120"/>
               </a:rPr>
-              <a:t>append_interview_turn locks the session row and writes both messages, the analysis and the turn count atomically.</a:t>
-            </a:r>
-            <a:endParaRPr lang="en-US" sz="1150" dirty="0"/>
-          </a:p>
-        </p:txBody>
-      </p:sp>
-      <p:sp>
-        <p:nvSpPr>
-          <p:cNvPr id="30" name="Shape 28"/>
-          <p:cNvSpPr/>
-          <p:nvPr/>
-        </p:nvSpPr>
-        <p:spPr>
-          <a:xfrm>
-            <a:off x="566928" y="4498848"/>
-            <a:ext cx="11057839" cy="786384"/>
+              <a:t>Tell me about a time you had to deliver a project with an unrealistic deadline.</a:t>
+            </a:r>
+            <a:endParaRPr lang="en-US" sz="1100" dirty="0"/>
+          </a:p>
+          <a:p>
+            <a:pPr indent="0" marL="0">
+              <a:lnSpc>
+                <a:spcPts val="1600"/>
+              </a:lnSpc>
+              <a:buNone/>
+            </a:pPr>
+            <a:endParaRPr lang="en-US" sz="1100" dirty="0"/>
+          </a:p>
+          <a:p>
+            <a:pPr indent="0" marL="0">
+              <a:lnSpc>
+                <a:spcPts val="1600"/>
+              </a:lnSpc>
+              <a:buNone/>
+            </a:pPr>
+            <a:r>
+              <a:rPr lang="en-US" sz="1100" b="1" dirty="0">
+                <a:solidFill>
+                  <a:srgbClr val="14161A"/>
+                </a:solidFill>
+                <a:latin typeface="Arial" pitchFamily="34" charset="0"/>
+                <a:ea typeface="Arial" pitchFamily="34" charset="-122"/>
+                <a:cs typeface="Arial" pitchFamily="34" charset="-120"/>
+              </a:rPr>
+              <a:t>Answer   </a:t>
+            </a:r>
+            <a:pPr indent="0" marL="0">
+              <a:lnSpc>
+                <a:spcPts val="1600"/>
+              </a:lnSpc>
+              <a:buNone/>
+            </a:pPr>
+            <a:r>
+              <a:rPr lang="en-US" sz="1100" dirty="0">
+                <a:solidFill>
+                  <a:srgbClr val="3F4750"/>
+                </a:solidFill>
+                <a:latin typeface="Arial" pitchFamily="34" charset="0"/>
+                <a:ea typeface="Arial" pitchFamily="34" charset="-122"/>
+                <a:cs typeface="Arial" pitchFamily="34" charset="-120"/>
+              </a:rPr>
+              <a:t>“We had a launch date that was pretty tight. I worked with the team and we managed to get most of it done on time…”</a:t>
+            </a:r>
+            <a:endParaRPr lang="en-US" sz="1100" dirty="0"/>
+          </a:p>
+          <a:p>
+            <a:pPr indent="0" marL="0">
+              <a:lnSpc>
+                <a:spcPts val="1600"/>
+              </a:lnSpc>
+              <a:buNone/>
+            </a:pPr>
+            <a:endParaRPr lang="en-US" sz="1100" dirty="0"/>
+          </a:p>
+          <a:p>
+            <a:pPr indent="0" marL="0">
+              <a:lnSpc>
+                <a:spcPts val="1600"/>
+              </a:lnSpc>
+              <a:buNone/>
+            </a:pPr>
+            <a:r>
+              <a:rPr lang="en-US" sz="1100" b="1" dirty="0">
+                <a:solidFill>
+                  <a:srgbClr val="14161A"/>
+                </a:solidFill>
+                <a:latin typeface="Arial" pitchFamily="34" charset="0"/>
+                <a:ea typeface="Arial" pitchFamily="34" charset="-122"/>
+                <a:cs typeface="Arial" pitchFamily="34" charset="-120"/>
+              </a:rPr>
+              <a:t>It checks   </a:t>
+            </a:r>
+            <a:pPr indent="0" marL="0">
+              <a:lnSpc>
+                <a:spcPts val="1600"/>
+              </a:lnSpc>
+              <a:buNone/>
+            </a:pPr>
+            <a:r>
+              <a:rPr lang="en-US" sz="1100" dirty="0">
+                <a:solidFill>
+                  <a:srgbClr val="3F4750"/>
+                </a:solidFill>
+                <a:latin typeface="Arial" pitchFamily="34" charset="0"/>
+                <a:ea typeface="Arial" pitchFamily="34" charset="-122"/>
+                <a:cs typeface="Arial" pitchFamily="34" charset="-120"/>
+              </a:rPr>
+              <a:t>Did you set the scene?  Are there any specifics?  Did you say what </a:t>
+            </a:r>
+            <a:pPr indent="0" marL="0">
+              <a:lnSpc>
+                <a:spcPts val="1600"/>
+              </a:lnSpc>
+              <a:buNone/>
+            </a:pPr>
+            <a:r>
+              <a:rPr lang="en-US" sz="1100" i="1" dirty="0">
+                <a:solidFill>
+                  <a:srgbClr val="3F4750"/>
+                </a:solidFill>
+                <a:latin typeface="Arial" pitchFamily="34" charset="0"/>
+                <a:ea typeface="Arial" pitchFamily="34" charset="-122"/>
+                <a:cs typeface="Arial" pitchFamily="34" charset="-120"/>
+              </a:rPr>
+              <a:t>you</a:t>
+            </a:r>
+            <a:pPr indent="0" marL="0">
+              <a:lnSpc>
+                <a:spcPts val="1600"/>
+              </a:lnSpc>
+              <a:buNone/>
+            </a:pPr>
+            <a:r>
+              <a:rPr lang="en-US" sz="1100" dirty="0">
+                <a:solidFill>
+                  <a:srgbClr val="3F4750"/>
+                </a:solidFill>
+                <a:latin typeface="Arial" pitchFamily="34" charset="0"/>
+                <a:ea typeface="Arial" pitchFamily="34" charset="-122"/>
+                <a:cs typeface="Arial" pitchFamily="34" charset="-120"/>
+              </a:rPr>
+              <a:t> did, or what the team did?</a:t>
+            </a:r>
+            <a:endParaRPr lang="en-US" sz="1100" dirty="0"/>
+          </a:p>
+          <a:p>
+            <a:pPr indent="0" marL="0">
+              <a:lnSpc>
+                <a:spcPts val="1600"/>
+              </a:lnSpc>
+              <a:buNone/>
+            </a:pPr>
+            <a:endParaRPr lang="en-US" sz="1100" dirty="0"/>
+          </a:p>
+          <a:p>
+            <a:pPr indent="0" marL="0">
+              <a:lnSpc>
+                <a:spcPts val="1600"/>
+              </a:lnSpc>
+              <a:buNone/>
+            </a:pPr>
+            <a:r>
+              <a:rPr lang="en-US" sz="1100" b="1" dirty="0">
+                <a:solidFill>
+                  <a:srgbClr val="1D4ED8"/>
+                </a:solidFill>
+                <a:latin typeface="Arial" pitchFamily="34" charset="0"/>
+                <a:ea typeface="Arial" pitchFamily="34" charset="-122"/>
+                <a:cs typeface="Arial" pitchFamily="34" charset="-120"/>
+              </a:rPr>
+              <a:t>So next   </a:t>
+            </a:r>
+            <a:pPr indent="0" marL="0">
+              <a:lnSpc>
+                <a:spcPts val="1600"/>
+              </a:lnSpc>
+              <a:buNone/>
+            </a:pPr>
+            <a:r>
+              <a:rPr lang="en-US" sz="1100" dirty="0">
+                <a:solidFill>
+                  <a:srgbClr val="14161A"/>
+                </a:solidFill>
+                <a:latin typeface="Arial" pitchFamily="34" charset="0"/>
+                <a:ea typeface="Arial" pitchFamily="34" charset="-122"/>
+                <a:cs typeface="Arial" pitchFamily="34" charset="-120"/>
+              </a:rPr>
+              <a:t>no specifics, and “we” all the way through — so the follow-up presses for what this person personally did.</a:t>
+            </a:r>
+            <a:endParaRPr lang="en-US" sz="1100" dirty="0"/>
+          </a:p>
+        </p:txBody>
+      </p:sp>
+      <p:sp>
+        <p:nvSpPr>
+          <p:cNvPr id="31" name="Shape 29"/>
+          <p:cNvSpPr/>
+          <p:nvPr/>
+        </p:nvSpPr>
+        <p:spPr>
+          <a:xfrm>
+            <a:off x="566928" y="5047488"/>
+            <a:ext cx="11057839" cy="640080"/>
           </a:xfrm>
           <a:prstGeom prst="rect">
             <a:avLst/>
@@ -6981,14 +7177,14 @@
       </p:sp>
       <p:sp>
         <p:nvSpPr>
-          <p:cNvPr id="31" name="Shape 29"/>
-          <p:cNvSpPr/>
-          <p:nvPr/>
-        </p:nvSpPr>
-        <p:spPr>
-          <a:xfrm>
-            <a:off x="566928" y="4498848"/>
-            <a:ext cx="50292" cy="786384"/>
+          <p:cNvPr id="32" name="Shape 30"/>
+          <p:cNvSpPr/>
+          <p:nvPr/>
+        </p:nvSpPr>
+        <p:spPr>
+          <a:xfrm>
+            <a:off x="566928" y="5047488"/>
+            <a:ext cx="50292" cy="640080"/>
           </a:xfrm>
           <a:prstGeom prst="rect">
             <a:avLst/>
@@ -7006,14 +7202,14 @@
       </p:sp>
       <p:sp>
         <p:nvSpPr>
-          <p:cNvPr id="32" name="Text 30"/>
-          <p:cNvSpPr/>
-          <p:nvPr/>
-        </p:nvSpPr>
-        <p:spPr>
-          <a:xfrm>
-            <a:off x="877824" y="4498848"/>
-            <a:ext cx="10509199" cy="786384"/>
+          <p:cNvPr id="33" name="Text 31"/>
+          <p:cNvSpPr/>
+          <p:nvPr/>
+        </p:nvSpPr>
+        <p:spPr>
+          <a:xfrm>
+            <a:off x="877824" y="5047488"/>
+            <a:ext cx="10509199" cy="640080"/>
           </a:xfrm>
           <a:prstGeom prst="rect">
             <a:avLst/>
@@ -7026,9 +7222,6 @@
           <a:lstStyle/>
           <a:p>
             <a:pPr indent="0" marL="0">
-              <a:lnSpc>
-                <a:spcPts val="1800"/>
-              </a:lnSpc>
               <a:buNone/>
             </a:pPr>
             <a:r>
@@ -7040,12 +7233,9 @@
                 <a:ea typeface="Arial" pitchFamily="34" charset="-122"/>
                 <a:cs typeface="Arial" pitchFamily="34" charset="-120"/>
               </a:rPr>
-              <a:t>Why score before generating?  </a:t>
-            </a:r>
-            <a:pPr indent="0" marL="0">
-              <a:lnSpc>
-                <a:spcPts val="1800"/>
-              </a:lnSpc>
+              <a:t>Why mark it first?  </a:t>
+            </a:r>
+            <a:pPr indent="0" marL="0">
               <a:buNone/>
             </a:pPr>
             <a:r>
@@ -7057,7 +7247,7 @@
                 <a:ea typeface="Arial" pitchFamily="34" charset="-122"/>
                 <a:cs typeface="Arial" pitchFamily="34" charset="-120"/>
               </a:rPr>
-              <a:t>A verdict that only arrives at the end of the interview cannot change the interview. Scoring first is what makes the questioning adaptive rather than scripted — and bounding it at 4 s is what stops that costing a stalled reply.</a:t>
+              <a:t>A score that only arrives at the end of the interview cannot change the interview.</a:t>
             </a:r>
             <a:endParaRPr lang="en-US" sz="1300" dirty="0"/>
           </a:p>
@@ -7065,13 +7255,13 @@
       </p:sp>
       <p:sp>
         <p:nvSpPr>
-          <p:cNvPr id="33" name="Text 31"/>
-          <p:cNvSpPr/>
-          <p:nvPr/>
-        </p:nvSpPr>
-        <p:spPr>
-          <a:xfrm>
-            <a:off x="566928" y="5394960"/>
+          <p:cNvPr id="34" name="Text 32"/>
+          <p:cNvSpPr/>
+          <p:nvPr/>
+        </p:nvSpPr>
+        <p:spPr>
+          <a:xfrm>
+            <a:off x="566928" y="5760720"/>
             <a:ext cx="11057839" cy="256032"/>
           </a:xfrm>
           <a:prstGeom prst="rect">
@@ -7088,23 +7278,23 @@
               <a:buNone/>
             </a:pPr>
             <a:r>
-              <a:rPr lang="en-US" sz="950" dirty="0">
+              <a:rPr lang="en-US" sz="1000" i="1" dirty="0">
                 <a:solidFill>
                   <a:srgbClr val="7A8593"/>
                 </a:solidFill>
-                <a:latin typeface="Courier New" pitchFamily="34" charset="0"/>
-                <a:ea typeface="Courier New" pitchFamily="34" charset="-122"/>
-                <a:cs typeface="Courier New" pitchFamily="34" charset="-120"/>
-              </a:rPr>
-              <a:t>src/app/api/chat/route.ts  ·  src/lib/response-analyzer.ts  ·  src/lib/decision-engine.ts  ·  migration 0005</a:t>
-            </a:r>
-            <a:endParaRPr lang="en-US" sz="950" dirty="0"/>
-          </a:p>
-        </p:txBody>
-      </p:sp>
-      <p:sp>
-        <p:nvSpPr>
-          <p:cNvPr id="35" name="Text 32"/>
+                <a:latin typeface="Arial" pitchFamily="34" charset="0"/>
+                <a:ea typeface="Arial" pitchFamily="34" charset="-122"/>
+                <a:cs typeface="Arial" pitchFamily="34" charset="-120"/>
+              </a:rPr>
+              <a:t>Not an AI agent: the AI writes the questions and marks the answers. My code decides what happens next.</a:t>
+            </a:r>
+            <a:endParaRPr lang="en-US" sz="1000" dirty="0"/>
+          </a:p>
+        </p:txBody>
+      </p:sp>
+      <p:sp>
+        <p:nvSpPr>
+          <p:cNvPr id="36" name="Text 33"/>
           <p:cNvSpPr/>
           <p:nvPr/>
         </p:nvSpPr>
@@ -7143,7 +7333,7 @@
       </p:sp>
       <p:sp>
         <p:nvSpPr>
-          <p:cNvPr id="36" name="Text 33"/>
+          <p:cNvPr id="37" name="Text 34"/>
           <p:cNvSpPr/>
           <p:nvPr/>
         </p:nvSpPr>
@@ -7265,7 +7455,7 @@
                 <a:ea typeface="Arial" pitchFamily="34" charset="-122"/>
                 <a:cs typeface="Arial" pitchFamily="34" charset="-120"/>
               </a:rPr>
-              <a:t>THE CLAIM I CAN PROVE</a:t>
+              <a:t>WHAT IT'S BUILT FROM</a:t>
             </a:r>
             <a:endParaRPr lang="en-US" sz="1100" dirty="0"/>
           </a:p>
@@ -7304,7 +7494,7 @@
                 <a:ea typeface="Arial" pitchFamily="34" charset="-122"/>
                 <a:cs typeface="Arial" pitchFamily="34" charset="-120"/>
               </a:rPr>
-              <a:t>The interviewer's persona changes the questioning — arithmetically.</a:t>
+              <a:t>Four parts, and what each one actually does.</a:t>
             </a:r>
             <a:endParaRPr lang="en-US" sz="3000" dirty="0"/>
           </a:p>
@@ -7312,53 +7502,14 @@
       </p:sp>
       <p:sp>
         <p:nvSpPr>
-          <p:cNvPr id="5" name="Text 3"/>
-          <p:cNvSpPr/>
-          <p:nvPr/>
-        </p:nvSpPr>
-        <p:spPr>
-          <a:xfrm>
-            <a:off x="566928" y="1627632"/>
-            <a:ext cx="5577840" cy="274320"/>
-          </a:xfrm>
-          <a:prstGeom prst="rect">
-            <a:avLst/>
-          </a:prstGeom>
-          <a:noFill/>
-          <a:ln/>
-        </p:spPr>
-        <p:txBody>
-          <a:bodyPr wrap="square" rtlCol="0" anchor="ctr"/>
-          <a:lstStyle/>
-          <a:p>
-            <a:pPr indent="0" marL="0">
-              <a:buNone/>
-            </a:pPr>
-            <a:r>
-              <a:rPr lang="en-US" sz="1300" b="1" dirty="0">
-                <a:solidFill>
-                  <a:srgbClr val="14161A"/>
-                </a:solidFill>
-                <a:latin typeface="Arial" pitchFamily="34" charset="0"/>
-                <a:ea typeface="Arial" pitchFamily="34" charset="-122"/>
-                <a:cs typeface="Arial" pitchFamily="34" charset="-120"/>
-              </a:rPr>
-              <a:t>A persona reaches the model down two paths.</a:t>
-            </a:r>
-            <a:endParaRPr lang="en-US" sz="1300" dirty="0"/>
-          </a:p>
-        </p:txBody>
-      </p:sp>
-      <p:sp>
-        <p:nvSpPr>
-          <p:cNvPr id="6" name="Shape 4"/>
-          <p:cNvSpPr/>
-          <p:nvPr/>
-        </p:nvSpPr>
-        <p:spPr>
-          <a:xfrm>
-            <a:off x="566928" y="1975104"/>
-            <a:ext cx="5577840" cy="841248"/>
+          <p:cNvPr id="5" name="Shape 3"/>
+          <p:cNvSpPr/>
+          <p:nvPr/>
+        </p:nvSpPr>
+        <p:spPr>
+          <a:xfrm>
+            <a:off x="566928" y="1591056"/>
+            <a:ext cx="5373472" cy="1463040"/>
           </a:xfrm>
           <a:prstGeom prst="rect">
             <a:avLst/>
@@ -7376,20 +7527,20 @@
       </p:sp>
       <p:sp>
         <p:nvSpPr>
-          <p:cNvPr id="7" name="Shape 5"/>
-          <p:cNvSpPr/>
-          <p:nvPr/>
-        </p:nvSpPr>
-        <p:spPr>
-          <a:xfrm>
-            <a:off x="566928" y="1975104"/>
-            <a:ext cx="50292" cy="841248"/>
+          <p:cNvPr id="6" name="Shape 4"/>
+          <p:cNvSpPr/>
+          <p:nvPr/>
+        </p:nvSpPr>
+        <p:spPr>
+          <a:xfrm>
+            <a:off x="566928" y="1591056"/>
+            <a:ext cx="50292" cy="1463040"/>
           </a:xfrm>
           <a:prstGeom prst="rect">
             <a:avLst/>
           </a:prstGeom>
           <a:solidFill>
-            <a:srgbClr val="7A8593"/>
+            <a:srgbClr val="1D4ED8"/>
           </a:solidFill>
           <a:ln w="12700">
             <a:solidFill>
@@ -7401,14 +7552,53 @@
       </p:sp>
       <p:sp>
         <p:nvSpPr>
+          <p:cNvPr id="7" name="Text 5"/>
+          <p:cNvSpPr/>
+          <p:nvPr/>
+        </p:nvSpPr>
+        <p:spPr>
+          <a:xfrm>
+            <a:off x="841248" y="1700784"/>
+            <a:ext cx="4916272" cy="274320"/>
+          </a:xfrm>
+          <a:prstGeom prst="rect">
+            <a:avLst/>
+          </a:prstGeom>
+          <a:noFill/>
+          <a:ln/>
+        </p:spPr>
+        <p:txBody>
+          <a:bodyPr wrap="square" rtlCol="0" anchor="ctr"/>
+          <a:lstStyle/>
+          <a:p>
+            <a:pPr indent="0" marL="0">
+              <a:buNone/>
+            </a:pPr>
+            <a:r>
+              <a:rPr lang="en-US" sz="1350" b="1" dirty="0">
+                <a:solidFill>
+                  <a:srgbClr val="14161A"/>
+                </a:solidFill>
+                <a:latin typeface="Arial" pitchFamily="34" charset="0"/>
+                <a:ea typeface="Arial" pitchFamily="34" charset="-122"/>
+                <a:cs typeface="Arial" pitchFamily="34" charset="-120"/>
+              </a:rPr>
+              <a:t>The AI that asks and marks</a:t>
+            </a:r>
+            <a:endParaRPr lang="en-US" sz="1350" dirty="0"/>
+          </a:p>
+        </p:txBody>
+      </p:sp>
+      <p:sp>
+        <p:nvSpPr>
           <p:cNvPr id="8" name="Text 6"/>
           <p:cNvSpPr/>
           <p:nvPr/>
         </p:nvSpPr>
         <p:spPr>
           <a:xfrm>
-            <a:off x="822960" y="2066544"/>
-            <a:ext cx="5157216" cy="658368"/>
+            <a:off x="841248" y="2048256"/>
+            <a:ext cx="4916272" cy="896112"/>
           </a:xfrm>
           <a:prstGeom prst="rect">
             <a:avLst/>
@@ -7422,12 +7612,141 @@
           <a:p>
             <a:pPr indent="0" marL="0">
               <a:lnSpc>
-                <a:spcPts val="1600"/>
-              </a:lnSpc>
-              <a:buNone/>
-            </a:pPr>
-            <a:r>
-              <a:rPr lang="en-US" sz="1150" b="1" dirty="0">
+                <a:spcPts val="1700"/>
+              </a:lnSpc>
+              <a:buNone/>
+            </a:pPr>
+            <a:r>
+              <a:rPr lang="en-US" sz="1150" dirty="0">
+                <a:solidFill>
+                  <a:srgbClr val="3F4750"/>
+                </a:solidFill>
+                <a:latin typeface="Arial" pitchFamily="34" charset="0"/>
+                <a:ea typeface="Arial" pitchFamily="34" charset="-122"/>
+                <a:cs typeface="Arial" pitchFamily="34" charset="-120"/>
+              </a:rPr>
+              <a:t>GPT-4o-mini, from OpenAI</a:t>
+            </a:r>
+            <a:endParaRPr lang="en-US" sz="1150" dirty="0"/>
+          </a:p>
+          <a:p>
+            <a:pPr indent="0" marL="0">
+              <a:lnSpc>
+                <a:spcPts val="1700"/>
+              </a:lnSpc>
+              <a:buNone/>
+            </a:pPr>
+            <a:r>
+              <a:rPr lang="en-US" sz="1150" dirty="0">
+                <a:solidFill>
+                  <a:srgbClr val="3F4750"/>
+                </a:solidFill>
+                <a:latin typeface="Arial" pitchFamily="34" charset="0"/>
+                <a:ea typeface="Arial" pitchFamily="34" charset="-122"/>
+                <a:cs typeface="Arial" pitchFamily="34" charset="-120"/>
+              </a:rPr>
+              <a:t>One model asks the questions, marks the answers and writes the feedback</a:t>
+            </a:r>
+            <a:endParaRPr lang="en-US" sz="1150" dirty="0"/>
+          </a:p>
+          <a:p>
+            <a:pPr indent="0" marL="0">
+              <a:lnSpc>
+                <a:spcPts val="1700"/>
+              </a:lnSpc>
+              <a:buNone/>
+            </a:pPr>
+            <a:r>
+              <a:rPr lang="en-US" sz="1150" dirty="0">
+                <a:solidFill>
+                  <a:srgbClr val="3F4750"/>
+                </a:solidFill>
+                <a:latin typeface="Arial" pitchFamily="34" charset="0"/>
+                <a:ea typeface="Arial" pitchFamily="34" charset="-122"/>
+                <a:cs typeface="Arial" pitchFamily="34" charset="-120"/>
+              </a:rPr>
+              <a:t>Answers appear word by word, not after a long pause</a:t>
+            </a:r>
+            <a:endParaRPr lang="en-US" sz="1150" dirty="0"/>
+          </a:p>
+        </p:txBody>
+      </p:sp>
+      <p:sp>
+        <p:nvSpPr>
+          <p:cNvPr id="9" name="Shape 7"/>
+          <p:cNvSpPr/>
+          <p:nvPr/>
+        </p:nvSpPr>
+        <p:spPr>
+          <a:xfrm>
+            <a:off x="6251296" y="1591056"/>
+            <a:ext cx="5373472" cy="1463040"/>
+          </a:xfrm>
+          <a:prstGeom prst="rect">
+            <a:avLst/>
+          </a:prstGeom>
+          <a:solidFill>
+            <a:srgbClr val="F5F7FA"/>
+          </a:solidFill>
+          <a:ln w="12700">
+            <a:solidFill>
+              <a:srgbClr val="F5F7FA"/>
+            </a:solidFill>
+            <a:prstDash val="solid"/>
+          </a:ln>
+        </p:spPr>
+      </p:sp>
+      <p:sp>
+        <p:nvSpPr>
+          <p:cNvPr id="10" name="Shape 8"/>
+          <p:cNvSpPr/>
+          <p:nvPr/>
+        </p:nvSpPr>
+        <p:spPr>
+          <a:xfrm>
+            <a:off x="6251296" y="1591056"/>
+            <a:ext cx="50292" cy="1463040"/>
+          </a:xfrm>
+          <a:prstGeom prst="rect">
+            <a:avLst/>
+          </a:prstGeom>
+          <a:solidFill>
+            <a:srgbClr val="1D4ED8"/>
+          </a:solidFill>
+          <a:ln w="12700">
+            <a:solidFill>
+              <a:srgbClr val="333333"/>
+            </a:solidFill>
+            <a:prstDash val="solid"/>
+          </a:ln>
+        </p:spPr>
+      </p:sp>
+      <p:sp>
+        <p:nvSpPr>
+          <p:cNvPr id="11" name="Text 9"/>
+          <p:cNvSpPr/>
+          <p:nvPr/>
+        </p:nvSpPr>
+        <p:spPr>
+          <a:xfrm>
+            <a:off x="6525616" y="1700784"/>
+            <a:ext cx="4916272" cy="274320"/>
+          </a:xfrm>
+          <a:prstGeom prst="rect">
+            <a:avLst/>
+          </a:prstGeom>
+          <a:noFill/>
+          <a:ln/>
+        </p:spPr>
+        <p:txBody>
+          <a:bodyPr wrap="square" rtlCol="0" anchor="ctr"/>
+          <a:lstStyle/>
+          <a:p>
+            <a:pPr indent="0" marL="0">
+              <a:buNone/>
+            </a:pPr>
+            <a:r>
+              <a:rPr lang="en-US" sz="1350" b="1" dirty="0">
                 <a:solidFill>
                   <a:srgbClr val="14161A"/>
                 </a:solidFill>
@@ -7435,11 +7754,36 @@
                 <a:ea typeface="Arial" pitchFamily="34" charset="-122"/>
                 <a:cs typeface="Arial" pitchFamily="34" charset="-120"/>
               </a:rPr>
-              <a:t>Textual</a:t>
-            </a:r>
-            <a:pPr indent="0" marL="0">
-              <a:lnSpc>
-                <a:spcPts val="1600"/>
+              <a:t>Speech</a:t>
+            </a:r>
+            <a:endParaRPr lang="en-US" sz="1350" dirty="0"/>
+          </a:p>
+        </p:txBody>
+      </p:sp>
+      <p:sp>
+        <p:nvSpPr>
+          <p:cNvPr id="12" name="Text 10"/>
+          <p:cNvSpPr/>
+          <p:nvPr/>
+        </p:nvSpPr>
+        <p:spPr>
+          <a:xfrm>
+            <a:off x="6525616" y="2048256"/>
+            <a:ext cx="4916272" cy="896112"/>
+          </a:xfrm>
+          <a:prstGeom prst="rect">
+            <a:avLst/>
+          </a:prstGeom>
+          <a:noFill/>
+          <a:ln/>
+        </p:spPr>
+        <p:txBody>
+          <a:bodyPr wrap="square" rtlCol="0" anchor="t"/>
+          <a:lstStyle/>
+          <a:p>
+            <a:pPr indent="0" marL="0">
+              <a:lnSpc>
+                <a:spcPts val="1700"/>
               </a:lnSpc>
               <a:buNone/>
             </a:pPr>
@@ -7452,22 +7796,404 @@
                 <a:ea typeface="Arial" pitchFamily="34" charset="-122"/>
                 <a:cs typeface="Arial" pitchFamily="34" charset="-120"/>
               </a:rPr>
-              <a:t>  — each dial becomes a sentence in the system prompt. Provable only by measuring the output.</a:t>
+              <a:t>Azure Speech, from Microsoft</a:t>
             </a:r>
             <a:endParaRPr lang="en-US" sz="1150" dirty="0"/>
           </a:p>
-        </p:txBody>
-      </p:sp>
-      <p:sp>
-        <p:nvSpPr>
-          <p:cNvPr id="9" name="Shape 7"/>
-          <p:cNvSpPr/>
-          <p:nvPr/>
-        </p:nvSpPr>
-        <p:spPr>
-          <a:xfrm>
-            <a:off x="566928" y="2889504"/>
-            <a:ext cx="5577840" cy="1627632"/>
+          <a:p>
+            <a:pPr indent="0" marL="0">
+              <a:lnSpc>
+                <a:spcPts val="1700"/>
+              </a:lnSpc>
+              <a:buNone/>
+            </a:pPr>
+            <a:r>
+              <a:rPr lang="en-US" sz="1150" dirty="0">
+                <a:solidFill>
+                  <a:srgbClr val="3F4750"/>
+                </a:solidFill>
+                <a:latin typeface="Arial" pitchFamily="34" charset="0"/>
+                <a:ea typeface="Arial" pitchFamily="34" charset="-122"/>
+                <a:cs typeface="Arial" pitchFamily="34" charset="-120"/>
+              </a:rPr>
+              <a:t>Turns your voice into text while you are still talking</a:t>
+            </a:r>
+            <a:endParaRPr lang="en-US" sz="1150" dirty="0"/>
+          </a:p>
+          <a:p>
+            <a:pPr indent="0" marL="0">
+              <a:lnSpc>
+                <a:spcPts val="1700"/>
+              </a:lnSpc>
+              <a:buNone/>
+            </a:pPr>
+            <a:r>
+              <a:rPr lang="en-US" sz="1150" dirty="0">
+                <a:solidFill>
+                  <a:srgbClr val="3F4750"/>
+                </a:solidFill>
+                <a:latin typeface="Arial" pitchFamily="34" charset="0"/>
+                <a:ea typeface="Arial" pitchFamily="34" charset="-122"/>
+                <a:cs typeface="Arial" pitchFamily="34" charset="-120"/>
+              </a:rPr>
+              <a:t>Reads questions aloud in a natural voice — six to pick from</a:t>
+            </a:r>
+            <a:endParaRPr lang="en-US" sz="1150" dirty="0"/>
+          </a:p>
+        </p:txBody>
+      </p:sp>
+      <p:sp>
+        <p:nvSpPr>
+          <p:cNvPr id="13" name="Shape 11"/>
+          <p:cNvSpPr/>
+          <p:nvPr/>
+        </p:nvSpPr>
+        <p:spPr>
+          <a:xfrm>
+            <a:off x="566928" y="3163824"/>
+            <a:ext cx="5373472" cy="1463040"/>
+          </a:xfrm>
+          <a:prstGeom prst="rect">
+            <a:avLst/>
+          </a:prstGeom>
+          <a:solidFill>
+            <a:srgbClr val="F5F7FA"/>
+          </a:solidFill>
+          <a:ln w="12700">
+            <a:solidFill>
+              <a:srgbClr val="F5F7FA"/>
+            </a:solidFill>
+            <a:prstDash val="solid"/>
+          </a:ln>
+        </p:spPr>
+      </p:sp>
+      <p:sp>
+        <p:nvSpPr>
+          <p:cNvPr id="14" name="Shape 12"/>
+          <p:cNvSpPr/>
+          <p:nvPr/>
+        </p:nvSpPr>
+        <p:spPr>
+          <a:xfrm>
+            <a:off x="566928" y="3163824"/>
+            <a:ext cx="50292" cy="1463040"/>
+          </a:xfrm>
+          <a:prstGeom prst="rect">
+            <a:avLst/>
+          </a:prstGeom>
+          <a:solidFill>
+            <a:srgbClr val="1D4ED8"/>
+          </a:solidFill>
+          <a:ln w="12700">
+            <a:solidFill>
+              <a:srgbClr val="333333"/>
+            </a:solidFill>
+            <a:prstDash val="solid"/>
+          </a:ln>
+        </p:spPr>
+      </p:sp>
+      <p:sp>
+        <p:nvSpPr>
+          <p:cNvPr id="15" name="Text 13"/>
+          <p:cNvSpPr/>
+          <p:nvPr/>
+        </p:nvSpPr>
+        <p:spPr>
+          <a:xfrm>
+            <a:off x="841248" y="3273552"/>
+            <a:ext cx="4916272" cy="274320"/>
+          </a:xfrm>
+          <a:prstGeom prst="rect">
+            <a:avLst/>
+          </a:prstGeom>
+          <a:noFill/>
+          <a:ln/>
+        </p:spPr>
+        <p:txBody>
+          <a:bodyPr wrap="square" rtlCol="0" anchor="ctr"/>
+          <a:lstStyle/>
+          <a:p>
+            <a:pPr indent="0" marL="0">
+              <a:buNone/>
+            </a:pPr>
+            <a:r>
+              <a:rPr lang="en-US" sz="1350" b="1" dirty="0">
+                <a:solidFill>
+                  <a:srgbClr val="14161A"/>
+                </a:solidFill>
+                <a:latin typeface="Arial" pitchFamily="34" charset="0"/>
+                <a:ea typeface="Arial" pitchFamily="34" charset="-122"/>
+                <a:cs typeface="Arial" pitchFamily="34" charset="-120"/>
+              </a:rPr>
+              <a:t>Your documents</a:t>
+            </a:r>
+            <a:endParaRPr lang="en-US" sz="1350" dirty="0"/>
+          </a:p>
+        </p:txBody>
+      </p:sp>
+      <p:sp>
+        <p:nvSpPr>
+          <p:cNvPr id="16" name="Text 14"/>
+          <p:cNvSpPr/>
+          <p:nvPr/>
+        </p:nvSpPr>
+        <p:spPr>
+          <a:xfrm>
+            <a:off x="841248" y="3621024"/>
+            <a:ext cx="4916272" cy="896112"/>
+          </a:xfrm>
+          <a:prstGeom prst="rect">
+            <a:avLst/>
+          </a:prstGeom>
+          <a:noFill/>
+          <a:ln/>
+        </p:spPr>
+        <p:txBody>
+          <a:bodyPr wrap="square" rtlCol="0" anchor="t"/>
+          <a:lstStyle/>
+          <a:p>
+            <a:pPr indent="0" marL="0">
+              <a:lnSpc>
+                <a:spcPts val="1700"/>
+              </a:lnSpc>
+              <a:buNone/>
+            </a:pPr>
+            <a:r>
+              <a:rPr lang="en-US" sz="1150" dirty="0">
+                <a:solidFill>
+                  <a:srgbClr val="3F4750"/>
+                </a:solidFill>
+                <a:latin typeface="Arial" pitchFamily="34" charset="0"/>
+                <a:ea typeface="Arial" pitchFamily="34" charset="-122"/>
+                <a:cs typeface="Arial" pitchFamily="34" charset="-120"/>
+              </a:rPr>
+              <a:t>Attach the real job advert and your resume</a:t>
+            </a:r>
+            <a:endParaRPr lang="en-US" sz="1150" dirty="0"/>
+          </a:p>
+          <a:p>
+            <a:pPr indent="0" marL="0">
+              <a:lnSpc>
+                <a:spcPts val="1700"/>
+              </a:lnSpc>
+              <a:buNone/>
+            </a:pPr>
+            <a:r>
+              <a:rPr lang="en-US" sz="1150" dirty="0">
+                <a:solidFill>
+                  <a:srgbClr val="3F4750"/>
+                </a:solidFill>
+                <a:latin typeface="Arial" pitchFamily="34" charset="0"/>
+                <a:ea typeface="Arial" pitchFamily="34" charset="-122"/>
+                <a:cs typeface="Arial" pitchFamily="34" charset="-120"/>
+              </a:rPr>
+              <a:t>Split up and searched by meaning, so “led a team” finds “line management”</a:t>
+            </a:r>
+            <a:endParaRPr lang="en-US" sz="1150" dirty="0"/>
+          </a:p>
+          <a:p>
+            <a:pPr indent="0" marL="0">
+              <a:lnSpc>
+                <a:spcPts val="1700"/>
+              </a:lnSpc>
+              <a:buNone/>
+            </a:pPr>
+            <a:r>
+              <a:rPr lang="en-US" sz="1150" dirty="0">
+                <a:solidFill>
+                  <a:srgbClr val="3F4750"/>
+                </a:solidFill>
+                <a:latin typeface="Arial" pitchFamily="34" charset="0"/>
+                <a:ea typeface="Arial" pitchFamily="34" charset="-122"/>
+                <a:cs typeface="Arial" pitchFamily="34" charset="-120"/>
+              </a:rPr>
+              <a:t>Short documents skip the search and go in whole</a:t>
+            </a:r>
+            <a:endParaRPr lang="en-US" sz="1150" dirty="0"/>
+          </a:p>
+        </p:txBody>
+      </p:sp>
+      <p:sp>
+        <p:nvSpPr>
+          <p:cNvPr id="17" name="Shape 15"/>
+          <p:cNvSpPr/>
+          <p:nvPr/>
+        </p:nvSpPr>
+        <p:spPr>
+          <a:xfrm>
+            <a:off x="6251296" y="3163824"/>
+            <a:ext cx="5373472" cy="1463040"/>
+          </a:xfrm>
+          <a:prstGeom prst="rect">
+            <a:avLst/>
+          </a:prstGeom>
+          <a:solidFill>
+            <a:srgbClr val="F5F7FA"/>
+          </a:solidFill>
+          <a:ln w="12700">
+            <a:solidFill>
+              <a:srgbClr val="F5F7FA"/>
+            </a:solidFill>
+            <a:prstDash val="solid"/>
+          </a:ln>
+        </p:spPr>
+      </p:sp>
+      <p:sp>
+        <p:nvSpPr>
+          <p:cNvPr id="18" name="Shape 16"/>
+          <p:cNvSpPr/>
+          <p:nvPr/>
+        </p:nvSpPr>
+        <p:spPr>
+          <a:xfrm>
+            <a:off x="6251296" y="3163824"/>
+            <a:ext cx="50292" cy="1463040"/>
+          </a:xfrm>
+          <a:prstGeom prst="rect">
+            <a:avLst/>
+          </a:prstGeom>
+          <a:solidFill>
+            <a:srgbClr val="1D4ED8"/>
+          </a:solidFill>
+          <a:ln w="12700">
+            <a:solidFill>
+              <a:srgbClr val="333333"/>
+            </a:solidFill>
+            <a:prstDash val="solid"/>
+          </a:ln>
+        </p:spPr>
+      </p:sp>
+      <p:sp>
+        <p:nvSpPr>
+          <p:cNvPr id="19" name="Text 17"/>
+          <p:cNvSpPr/>
+          <p:nvPr/>
+        </p:nvSpPr>
+        <p:spPr>
+          <a:xfrm>
+            <a:off x="6525616" y="3273552"/>
+            <a:ext cx="4916272" cy="274320"/>
+          </a:xfrm>
+          <a:prstGeom prst="rect">
+            <a:avLst/>
+          </a:prstGeom>
+          <a:noFill/>
+          <a:ln/>
+        </p:spPr>
+        <p:txBody>
+          <a:bodyPr wrap="square" rtlCol="0" anchor="ctr"/>
+          <a:lstStyle/>
+          <a:p>
+            <a:pPr indent="0" marL="0">
+              <a:buNone/>
+            </a:pPr>
+            <a:r>
+              <a:rPr lang="en-US" sz="1350" b="1" dirty="0">
+                <a:solidFill>
+                  <a:srgbClr val="14161A"/>
+                </a:solidFill>
+                <a:latin typeface="Arial" pitchFamily="34" charset="0"/>
+                <a:ea typeface="Arial" pitchFamily="34" charset="-122"/>
+                <a:cs typeface="Arial" pitchFamily="34" charset="-120"/>
+              </a:rPr>
+              <a:t>Where everything is stored</a:t>
+            </a:r>
+            <a:endParaRPr lang="en-US" sz="1350" dirty="0"/>
+          </a:p>
+        </p:txBody>
+      </p:sp>
+      <p:sp>
+        <p:nvSpPr>
+          <p:cNvPr id="20" name="Text 18"/>
+          <p:cNvSpPr/>
+          <p:nvPr/>
+        </p:nvSpPr>
+        <p:spPr>
+          <a:xfrm>
+            <a:off x="6525616" y="3621024"/>
+            <a:ext cx="4916272" cy="896112"/>
+          </a:xfrm>
+          <a:prstGeom prst="rect">
+            <a:avLst/>
+          </a:prstGeom>
+          <a:noFill/>
+          <a:ln/>
+        </p:spPr>
+        <p:txBody>
+          <a:bodyPr wrap="square" rtlCol="0" anchor="t"/>
+          <a:lstStyle/>
+          <a:p>
+            <a:pPr indent="0" marL="0">
+              <a:lnSpc>
+                <a:spcPts val="1700"/>
+              </a:lnSpc>
+              <a:buNone/>
+            </a:pPr>
+            <a:r>
+              <a:rPr lang="en-US" sz="1150" dirty="0">
+                <a:solidFill>
+                  <a:srgbClr val="3F4750"/>
+                </a:solidFill>
+                <a:latin typeface="Arial" pitchFamily="34" charset="0"/>
+                <a:ea typeface="Arial" pitchFamily="34" charset="-122"/>
+                <a:cs typeface="Arial" pitchFamily="34" charset="-120"/>
+              </a:rPr>
+              <a:t>Supabase — a database service, hosted for me</a:t>
+            </a:r>
+            <a:endParaRPr lang="en-US" sz="1150" dirty="0"/>
+          </a:p>
+          <a:p>
+            <a:pPr indent="0" marL="0">
+              <a:lnSpc>
+                <a:spcPts val="1700"/>
+              </a:lnSpc>
+              <a:buNone/>
+            </a:pPr>
+            <a:r>
+              <a:rPr lang="en-US" sz="1150" dirty="0">
+                <a:solidFill>
+                  <a:srgbClr val="3F4750"/>
+                </a:solidFill>
+                <a:latin typeface="Arial" pitchFamily="34" charset="0"/>
+                <a:ea typeface="Arial" pitchFamily="34" charset="-122"/>
+                <a:cs typeface="Arial" pitchFamily="34" charset="-120"/>
+              </a:rPr>
+              <a:t>Every record is locked to the person it belongs to — the database enforces that, not my code</a:t>
+            </a:r>
+            <a:endParaRPr lang="en-US" sz="1150" dirty="0"/>
+          </a:p>
+          <a:p>
+            <a:pPr indent="0" marL="0">
+              <a:lnSpc>
+                <a:spcPts val="1700"/>
+              </a:lnSpc>
+              <a:buNone/>
+            </a:pPr>
+            <a:r>
+              <a:rPr lang="en-US" sz="1150" dirty="0">
+                <a:solidFill>
+                  <a:srgbClr val="3F4750"/>
+                </a:solidFill>
+                <a:latin typeface="Arial" pitchFamily="34" charset="0"/>
+                <a:ea typeface="Arial" pitchFamily="34" charset="-122"/>
+                <a:cs typeface="Arial" pitchFamily="34" charset="-120"/>
+              </a:rPr>
+              <a:t>The website itself is built with Next.js and React</a:t>
+            </a:r>
+            <a:endParaRPr lang="en-US" sz="1150" dirty="0"/>
+          </a:p>
+        </p:txBody>
+      </p:sp>
+      <p:sp>
+        <p:nvSpPr>
+          <p:cNvPr id="21" name="Shape 19"/>
+          <p:cNvSpPr/>
+          <p:nvPr/>
+        </p:nvSpPr>
+        <p:spPr>
+          <a:xfrm>
+            <a:off x="566928" y="4736592"/>
+            <a:ext cx="11057839" cy="603504"/>
           </a:xfrm>
           <a:prstGeom prst="rect">
             <a:avLst/>
@@ -7485,14 +8211,14 @@
       </p:sp>
       <p:sp>
         <p:nvSpPr>
-          <p:cNvPr id="10" name="Shape 8"/>
-          <p:cNvSpPr/>
-          <p:nvPr/>
-        </p:nvSpPr>
-        <p:spPr>
-          <a:xfrm>
-            <a:off x="566928" y="2889504"/>
-            <a:ext cx="50292" cy="1627632"/>
+          <p:cNvPr id="22" name="Shape 20"/>
+          <p:cNvSpPr/>
+          <p:nvPr/>
+        </p:nvSpPr>
+        <p:spPr>
+          <a:xfrm>
+            <a:off x="566928" y="4736592"/>
+            <a:ext cx="50292" cy="603504"/>
           </a:xfrm>
           <a:prstGeom prst="rect">
             <a:avLst/>
@@ -7510,33 +8236,33 @@
       </p:sp>
       <p:sp>
         <p:nvSpPr>
-          <p:cNvPr id="11" name="Text 9"/>
-          <p:cNvSpPr/>
-          <p:nvPr/>
-        </p:nvSpPr>
-        <p:spPr>
-          <a:xfrm>
-            <a:off x="822960" y="2962656"/>
-            <a:ext cx="5157216" cy="457200"/>
-          </a:xfrm>
-          <a:prstGeom prst="rect">
-            <a:avLst/>
-          </a:prstGeom>
-          <a:noFill/>
-          <a:ln/>
-        </p:spPr>
-        <p:txBody>
-          <a:bodyPr wrap="square" rtlCol="0" anchor="t"/>
-          <a:lstStyle/>
-          <a:p>
-            <a:pPr indent="0" marL="0">
-              <a:lnSpc>
-                <a:spcPts val="1600"/>
-              </a:lnSpc>
-              <a:buNone/>
-            </a:pPr>
-            <a:r>
-              <a:rPr lang="en-US" sz="1150" b="1" dirty="0">
+          <p:cNvPr id="23" name="Text 21"/>
+          <p:cNvSpPr/>
+          <p:nvPr/>
+        </p:nvSpPr>
+        <p:spPr>
+          <a:xfrm>
+            <a:off x="877824" y="4736592"/>
+            <a:ext cx="10509199" cy="603504"/>
+          </a:xfrm>
+          <a:prstGeom prst="rect">
+            <a:avLst/>
+          </a:prstGeom>
+          <a:noFill/>
+          <a:ln/>
+        </p:spPr>
+        <p:txBody>
+          <a:bodyPr wrap="square" rtlCol="0" anchor="ctr"/>
+          <a:lstStyle/>
+          <a:p>
+            <a:pPr indent="0" marL="0">
+              <a:lnSpc>
+                <a:spcPts val="1600"/>
+              </a:lnSpc>
+              <a:buNone/>
+            </a:pPr>
+            <a:r>
+              <a:rPr lang="en-US" sz="1200" b="1" dirty="0">
                 <a:solidFill>
                   <a:srgbClr val="1D4ED8"/>
                 </a:solidFill>
@@ -7544,203 +8270,24 @@
                 <a:ea typeface="Arial" pitchFamily="34" charset="-122"/>
                 <a:cs typeface="Arial" pitchFamily="34" charset="-120"/>
               </a:rPr>
-              <a:t>Numeric</a:t>
-            </a:r>
-            <a:pPr indent="0" marL="0">
-              <a:lnSpc>
-                <a:spcPts val="1600"/>
-              </a:lnSpc>
-              <a:buNone/>
-            </a:pPr>
-            <a:r>
-              <a:rPr lang="en-US" sz="1150" dirty="0">
-                <a:solidFill>
-                  <a:srgbClr val="3F4750"/>
-                </a:solidFill>
-                <a:latin typeface="Arial" pitchFamily="34" charset="0"/>
-                <a:ea typeface="Arial" pitchFamily="34" charset="-122"/>
-                <a:cs typeface="Arial" pitchFamily="34" charset="-120"/>
-              </a:rPr>
-              <a:t>  — the dials feed a formula whose result is injected as an explicit instruction:</a:t>
-            </a:r>
-            <a:endParaRPr lang="en-US" sz="1150" dirty="0"/>
-          </a:p>
-        </p:txBody>
-      </p:sp>
-      <p:sp>
-        <p:nvSpPr>
-          <p:cNvPr id="12" name="Text 10"/>
-          <p:cNvSpPr/>
-          <p:nvPr/>
-        </p:nvSpPr>
-        <p:spPr>
-          <a:xfrm>
-            <a:off x="822960" y="3438144"/>
-            <a:ext cx="5157216" cy="457200"/>
-          </a:xfrm>
-          <a:prstGeom prst="rect">
-            <a:avLst/>
-          </a:prstGeom>
-          <a:noFill/>
-          <a:ln/>
-        </p:spPr>
-        <p:txBody>
-          <a:bodyPr wrap="square" rtlCol="0" anchor="t"/>
-          <a:lstStyle/>
-          <a:p>
-            <a:pPr indent="0" marL="0">
-              <a:lnSpc>
-                <a:spcPts val="1400"/>
-              </a:lnSpc>
-              <a:buNone/>
-            </a:pPr>
-            <a:r>
-              <a:rPr lang="en-US" sz="1050" b="1" dirty="0">
+              <a:t>The decision I'd defend hardest:  </a:t>
+            </a:r>
+            <a:pPr indent="0" marL="0">
+              <a:lnSpc>
+                <a:spcPts val="1600"/>
+              </a:lnSpc>
+              <a:buNone/>
+            </a:pPr>
+            <a:r>
+              <a:rPr lang="en-US" sz="1200" dirty="0">
                 <a:solidFill>
                   <a:srgbClr val="14161A"/>
                 </a:solidFill>
-                <a:latin typeface="Courier New" pitchFamily="34" charset="0"/>
-                <a:ea typeface="Courier New" pitchFamily="34" charset="-122"/>
-                <a:cs typeface="Courier New" pitchFamily="34" charset="-120"/>
-              </a:rPr>
-              <a:t>difficulty = clamp 1..10 of</a:t>
-            </a:r>
-            <a:endParaRPr lang="en-US" sz="1050" dirty="0"/>
-          </a:p>
-          <a:p>
-            <a:pPr indent="0" marL="0">
-              <a:lnSpc>
-                <a:spcPts val="1400"/>
-              </a:lnSpc>
-              <a:buNone/>
-            </a:pPr>
-            <a:r>
-              <a:rPr lang="en-US" sz="1050" b="1" dirty="0">
-                <a:solidFill>
-                  <a:srgbClr val="14161A"/>
-                </a:solidFill>
-                <a:latin typeface="Courier New" pitchFamily="34" charset="0"/>
-                <a:ea typeface="Courier New" pitchFamily="34" charset="-122"/>
-                <a:cs typeface="Courier New" pitchFamily="34" charset="-120"/>
-              </a:rPr>
-              <a:t>  round( base + repetitionBoost + (strictness − warmth) / 4 )</a:t>
-            </a:r>
-            <a:endParaRPr lang="en-US" sz="1050" dirty="0"/>
-          </a:p>
-        </p:txBody>
-      </p:sp>
-      <p:sp>
-        <p:nvSpPr>
-          <p:cNvPr id="13" name="Text 11"/>
-          <p:cNvSpPr/>
-          <p:nvPr/>
-        </p:nvSpPr>
-        <p:spPr>
-          <a:xfrm>
-            <a:off x="822960" y="3895344"/>
-            <a:ext cx="5157216" cy="237744"/>
-          </a:xfrm>
-          <a:prstGeom prst="rect">
-            <a:avLst/>
-          </a:prstGeom>
-          <a:noFill/>
-          <a:ln/>
-        </p:spPr>
-        <p:txBody>
-          <a:bodyPr wrap="square" rtlCol="0" anchor="ctr"/>
-          <a:lstStyle/>
-          <a:p>
-            <a:pPr indent="0" marL="0">
-              <a:buNone/>
-            </a:pPr>
-            <a:r>
-              <a:rPr lang="en-US" sz="1100" dirty="0">
-                <a:solidFill>
-                  <a:srgbClr val="1D4ED8"/>
-                </a:solidFill>
-                <a:latin typeface="Courier New" pitchFamily="34" charset="0"/>
-                <a:ea typeface="Courier New" pitchFamily="34" charset="-122"/>
-                <a:cs typeface="Courier New" pitchFamily="34" charset="-120"/>
-              </a:rPr>
-              <a:t>→  “Aim for difficulty N/10”</a:t>
-            </a:r>
-            <a:endParaRPr lang="en-US" sz="1100" dirty="0"/>
-          </a:p>
-        </p:txBody>
-      </p:sp>
-      <p:sp>
-        <p:nvSpPr>
-          <p:cNvPr id="14" name="Text 12"/>
-          <p:cNvSpPr/>
-          <p:nvPr/>
-        </p:nvSpPr>
-        <p:spPr>
-          <a:xfrm>
-            <a:off x="822960" y="4114800"/>
-            <a:ext cx="5157216" cy="237744"/>
-          </a:xfrm>
-          <a:prstGeom prst="rect">
-            <a:avLst/>
-          </a:prstGeom>
-          <a:noFill/>
-          <a:ln/>
-        </p:spPr>
-        <p:txBody>
-          <a:bodyPr wrap="square" rtlCol="0" anchor="ctr"/>
-          <a:lstStyle/>
-          <a:p>
-            <a:pPr indent="0" marL="0">
-              <a:buNone/>
-            </a:pPr>
-            <a:r>
-              <a:rPr lang="en-US" sz="1100" i="1" dirty="0">
-                <a:solidFill>
-                  <a:srgbClr val="3F4750"/>
-                </a:solidFill>
-                <a:latin typeface="Arial" pitchFamily="34" charset="0"/>
-                <a:ea typeface="Arial" pitchFamily="34" charset="-122"/>
-                <a:cs typeface="Arial" pitchFamily="34" charset="-120"/>
-              </a:rPr>
-              <a:t>No model call. Reproduces exactly, offline, every run.</a:t>
-            </a:r>
-            <a:endParaRPr lang="en-US" sz="1100" dirty="0"/>
-          </a:p>
-        </p:txBody>
-      </p:sp>
-      <p:sp>
-        <p:nvSpPr>
-          <p:cNvPr id="15" name="Text 13"/>
-          <p:cNvSpPr/>
-          <p:nvPr/>
-        </p:nvSpPr>
-        <p:spPr>
-          <a:xfrm>
-            <a:off x="6510528" y="1627632"/>
-            <a:ext cx="5114239" cy="274320"/>
-          </a:xfrm>
-          <a:prstGeom prst="rect">
-            <a:avLst/>
-          </a:prstGeom>
-          <a:noFill/>
-          <a:ln/>
-        </p:spPr>
-        <p:txBody>
-          <a:bodyPr wrap="square" rtlCol="0" anchor="ctr"/>
-          <a:lstStyle/>
-          <a:p>
-            <a:pPr indent="0" marL="0">
-              <a:buNone/>
-            </a:pPr>
-            <a:r>
-              <a:rPr lang="en-US" sz="1200" b="1" dirty="0">
-                <a:solidFill>
-                  <a:srgbClr val="14161A"/>
-                </a:solidFill>
-                <a:latin typeface="Courier New" pitchFamily="34" charset="0"/>
-                <a:ea typeface="Courier New" pitchFamily="34" charset="-122"/>
-                <a:cs typeface="Courier New" pitchFamily="34" charset="-120"/>
-              </a:rPr>
-              <a:t>npm run eval:persona</a:t>
+                <a:latin typeface="Arial" pitchFamily="34" charset="0"/>
+                <a:ea typeface="Arial" pitchFamily="34" charset="-122"/>
+                <a:cs typeface="Arial" pitchFamily="34" charset="-120"/>
+              </a:rPr>
+              <a:t>the document search lives inside the same database, so it is covered by the same lock. A separate search product would have been a second place to get security right — and a second place to get it wrong.</a:t>
             </a:r>
             <a:endParaRPr lang="en-US" sz="1200" dirty="0"/>
           </a:p>
@@ -7748,24 +8295,24 @@
       </p:sp>
       <p:sp>
         <p:nvSpPr>
-          <p:cNvPr id="16" name="Shape 14"/>
-          <p:cNvSpPr/>
-          <p:nvPr/>
-        </p:nvSpPr>
-        <p:spPr>
-          <a:xfrm>
-            <a:off x="6510528" y="1975104"/>
-            <a:ext cx="5114239" cy="2468880"/>
+          <p:cNvPr id="24" name="Shape 22"/>
+          <p:cNvSpPr/>
+          <p:nvPr/>
+        </p:nvSpPr>
+        <p:spPr>
+          <a:xfrm>
+            <a:off x="566928" y="5449824"/>
+            <a:ext cx="11057839" cy="512064"/>
           </a:xfrm>
           <a:prstGeom prst="rect">
             <a:avLst/>
           </a:prstGeom>
           <a:solidFill>
-            <a:srgbClr val="111418"/>
+            <a:srgbClr val="F5F7FA"/>
           </a:solidFill>
           <a:ln w="12700">
             <a:solidFill>
-              <a:srgbClr val="333333"/>
+              <a:srgbClr val="F5F7FA"/>
             </a:solidFill>
             <a:prstDash val="solid"/>
           </a:ln>
@@ -7773,255 +8320,14 @@
       </p:sp>
       <p:sp>
         <p:nvSpPr>
-          <p:cNvPr id="17" name="Text 15"/>
-          <p:cNvSpPr/>
-          <p:nvPr/>
-        </p:nvSpPr>
-        <p:spPr>
-          <a:xfrm>
-            <a:off x="6675120" y="2084832"/>
-            <a:ext cx="4785055" cy="2249424"/>
-          </a:xfrm>
-          <a:prstGeom prst="rect">
-            <a:avLst/>
-          </a:prstGeom>
-          <a:noFill/>
-          <a:ln/>
-        </p:spPr>
-        <p:txBody>
-          <a:bodyPr wrap="square" rtlCol="0" anchor="t"/>
-          <a:lstStyle/>
-          <a:p>
-            <a:pPr indent="0" marL="0">
-              <a:lnSpc>
-                <a:spcPts val="1474"/>
-              </a:lnSpc>
-              <a:buNone/>
-            </a:pPr>
-            <a:r>
-              <a:rPr lang="en-US" sz="1100" dirty="0">
-                <a:solidFill>
-                  <a:srgbClr val="E6EAF0"/>
-                </a:solidFill>
-                <a:latin typeface="Courier New" pitchFamily="34" charset="0"/>
-                <a:ea typeface="Courier New" pitchFamily="34" charset="-122"/>
-                <a:cs typeface="Courier New" pitchFamily="34" charset="-120"/>
-              </a:rPr>
-              <a:t>Held constant: same question, same answer,</a:t>
-            </a:r>
-            <a:endParaRPr lang="en-US" sz="1100" dirty="0"/>
-          </a:p>
-          <a:p>
-            <a:pPr indent="0" marL="0">
-              <a:lnSpc>
-                <a:spcPts val="1474"/>
-              </a:lnSpc>
-              <a:buNone/>
-            </a:pPr>
-            <a:r>
-              <a:rPr lang="en-US" sz="1100" dirty="0">
-                <a:solidFill>
-                  <a:srgbClr val="E6EAF0"/>
-                </a:solidFill>
-                <a:latin typeface="Courier New" pitchFamily="34" charset="0"/>
-                <a:ea typeface="Courier New" pitchFamily="34" charset="-122"/>
-                <a:cs typeface="Courier New" pitchFamily="34" charset="-120"/>
-              </a:rPr>
-              <a:t>same round type. Only the persona differs.</a:t>
-            </a:r>
-            <a:endParaRPr lang="en-US" sz="1100" dirty="0"/>
-          </a:p>
-          <a:p>
-            <a:pPr indent="0" marL="0">
-              <a:lnSpc>
-                <a:spcPts val="1474"/>
-              </a:lnSpc>
-              <a:buNone/>
-            </a:pPr>
-            <a:endParaRPr lang="en-US" sz="1100" dirty="0"/>
-          </a:p>
-          <a:p>
-            <a:pPr indent="0" marL="0">
-              <a:lnSpc>
-                <a:spcPts val="1474"/>
-              </a:lnSpc>
-              <a:buNone/>
-            </a:pPr>
-            <a:r>
-              <a:rPr lang="en-US" sz="1100" dirty="0">
-                <a:solidFill>
-                  <a:srgbClr val="E6EAF0"/>
-                </a:solidFill>
-                <a:latin typeface="Courier New" pitchFamily="34" charset="0"/>
-                <a:ea typeface="Courier New" pitchFamily="34" charset="-122"/>
-                <a:cs typeface="Courier New" pitchFamily="34" charset="-120"/>
-              </a:rPr>
-              <a:t>--- follow-up difficulty on the SAME answer ---</a:t>
-            </a:r>
-            <a:endParaRPr lang="en-US" sz="1100" dirty="0"/>
-          </a:p>
-          <a:p>
-            <a:pPr indent="0" marL="0">
-              <a:lnSpc>
-                <a:spcPts val="1474"/>
-              </a:lnSpc>
-              <a:buNone/>
-            </a:pPr>
-            <a:r>
-              <a:rPr lang="en-US" sz="1100" dirty="0">
-                <a:solidFill>
-                  <a:srgbClr val="E6EAF0"/>
-                </a:solidFill>
-                <a:latin typeface="Courier New" pitchFamily="34" charset="0"/>
-                <a:ea typeface="Courier New" pitchFamily="34" charset="-122"/>
-                <a:cs typeface="Courier New" pitchFamily="34" charset="-120"/>
-              </a:rPr>
-              <a:t>  Yuki Tanaka            7/10</a:t>
-            </a:r>
-            <a:endParaRPr lang="en-US" sz="1100" dirty="0"/>
-          </a:p>
-          <a:p>
-            <a:pPr indent="0" marL="0">
-              <a:lnSpc>
-                <a:spcPts val="1474"/>
-              </a:lnSpc>
-              <a:buNone/>
-            </a:pPr>
-            <a:r>
-              <a:rPr lang="en-US" sz="1100" dirty="0">
-                <a:solidFill>
-                  <a:srgbClr val="E6EAF0"/>
-                </a:solidFill>
-                <a:latin typeface="Courier New" pitchFamily="34" charset="0"/>
-                <a:ea typeface="Courier New" pitchFamily="34" charset="-122"/>
-                <a:cs typeface="Courier New" pitchFamily="34" charset="-120"/>
-              </a:rPr>
-              <a:t>    strictness 9 · warmth 4 · pushback 9</a:t>
-            </a:r>
-            <a:endParaRPr lang="en-US" sz="1100" dirty="0"/>
-          </a:p>
-          <a:p>
-            <a:pPr indent="0" marL="0">
-              <a:lnSpc>
-                <a:spcPts val="1474"/>
-              </a:lnSpc>
-              <a:buNone/>
-            </a:pPr>
-            <a:r>
-              <a:rPr lang="en-US" sz="1100" dirty="0">
-                <a:solidFill>
-                  <a:srgbClr val="E6EAF0"/>
-                </a:solidFill>
-                <a:latin typeface="Courier New" pitchFamily="34" charset="0"/>
-                <a:ea typeface="Courier New" pitchFamily="34" charset="-122"/>
-                <a:cs typeface="Courier New" pitchFamily="34" charset="-120"/>
-              </a:rPr>
-              <a:t>  Isabella Rodriguez     5/10</a:t>
-            </a:r>
-            <a:endParaRPr lang="en-US" sz="1100" dirty="0"/>
-          </a:p>
-          <a:p>
-            <a:pPr indent="0" marL="0">
-              <a:lnSpc>
-                <a:spcPts val="1474"/>
-              </a:lnSpc>
-              <a:buNone/>
-            </a:pPr>
-            <a:r>
-              <a:rPr lang="en-US" sz="1100" dirty="0">
-                <a:solidFill>
-                  <a:srgbClr val="E6EAF0"/>
-                </a:solidFill>
-                <a:latin typeface="Courier New" pitchFamily="34" charset="0"/>
-                <a:ea typeface="Courier New" pitchFamily="34" charset="-122"/>
-                <a:cs typeface="Courier New" pitchFamily="34" charset="-120"/>
-              </a:rPr>
-              <a:t>    strictness 6 · warmth 9 · pushback 4</a:t>
-            </a:r>
-            <a:endParaRPr lang="en-US" sz="1100" dirty="0"/>
-          </a:p>
-          <a:p>
-            <a:pPr indent="0" marL="0">
-              <a:lnSpc>
-                <a:spcPts val="1474"/>
-              </a:lnSpc>
-              <a:buNone/>
-            </a:pPr>
-            <a:r>
-              <a:rPr lang="en-US" sz="1100" dirty="0">
-                <a:solidFill>
-                  <a:srgbClr val="E6EAF0"/>
-                </a:solidFill>
-                <a:latin typeface="Courier New" pitchFamily="34" charset="0"/>
-                <a:ea typeface="Courier New" pitchFamily="34" charset="-122"/>
-                <a:cs typeface="Courier New" pitchFamily="34" charset="-120"/>
-              </a:rPr>
-              <a:t>  difference             2 points</a:t>
-            </a:r>
-            <a:endParaRPr lang="en-US" sz="1100" dirty="0"/>
-          </a:p>
-        </p:txBody>
-      </p:sp>
-      <p:sp>
-        <p:nvSpPr>
-          <p:cNvPr id="18" name="Shape 16"/>
-          <p:cNvSpPr/>
-          <p:nvPr/>
-        </p:nvSpPr>
-        <p:spPr>
-          <a:xfrm>
-            <a:off x="566928" y="4590288"/>
-            <a:ext cx="11057839" cy="713232"/>
-          </a:xfrm>
-          <a:prstGeom prst="rect">
-            <a:avLst/>
-          </a:prstGeom>
-          <a:solidFill>
-            <a:srgbClr val="EAF0FE"/>
-          </a:solidFill>
-          <a:ln w="12700">
-            <a:solidFill>
-              <a:srgbClr val="EAF0FE"/>
-            </a:solidFill>
-            <a:prstDash val="solid"/>
-          </a:ln>
-        </p:spPr>
-      </p:sp>
-      <p:sp>
-        <p:nvSpPr>
-          <p:cNvPr id="19" name="Shape 17"/>
-          <p:cNvSpPr/>
-          <p:nvPr/>
-        </p:nvSpPr>
-        <p:spPr>
-          <a:xfrm>
-            <a:off x="566928" y="4590288"/>
-            <a:ext cx="50292" cy="713232"/>
-          </a:xfrm>
-          <a:prstGeom prst="rect">
-            <a:avLst/>
-          </a:prstGeom>
-          <a:solidFill>
-            <a:srgbClr val="1D4ED8"/>
-          </a:solidFill>
-          <a:ln w="12700">
-            <a:solidFill>
-              <a:srgbClr val="333333"/>
-            </a:solidFill>
-            <a:prstDash val="solid"/>
-          </a:ln>
-        </p:spPr>
-      </p:sp>
-      <p:sp>
-        <p:nvSpPr>
-          <p:cNvPr id="20" name="Text 18"/>
-          <p:cNvSpPr/>
-          <p:nvPr/>
-        </p:nvSpPr>
-        <p:spPr>
-          <a:xfrm>
-            <a:off x="877824" y="4590288"/>
-            <a:ext cx="10509199" cy="713232"/>
+          <p:cNvPr id="25" name="Text 23"/>
+          <p:cNvSpPr/>
+          <p:nvPr/>
+        </p:nvSpPr>
+        <p:spPr>
+          <a:xfrm>
+            <a:off x="841248" y="5449824"/>
+            <a:ext cx="10600639" cy="512064"/>
           </a:xfrm>
           <a:prstGeom prst="rect">
             <a:avLst/>
@@ -8034,64 +8340,59 @@
           <a:lstStyle/>
           <a:p>
             <a:pPr indent="0" marL="0">
-              <a:buNone/>
-            </a:pPr>
-            <a:r>
-              <a:rPr lang="en-US" sz="1550" b="1" dirty="0">
-                <a:solidFill>
-                  <a:srgbClr val="14161A"/>
-                </a:solidFill>
-                <a:latin typeface="Arial" pitchFamily="34" charset="0"/>
-                <a:ea typeface="Arial" pitchFamily="34" charset="-122"/>
-                <a:cs typeface="Arial" pitchFamily="34" charset="-120"/>
-              </a:rPr>
-              <a:t>Not a sample from a stochastic model — a computation. You can do the arithmetic by hand and get the same number.</a:t>
-            </a:r>
-            <a:endParaRPr lang="en-US" sz="1550" dirty="0"/>
-          </a:p>
-        </p:txBody>
-      </p:sp>
-      <p:sp>
-        <p:nvSpPr>
-          <p:cNvPr id="21" name="Text 19"/>
-          <p:cNvSpPr/>
-          <p:nvPr/>
-        </p:nvSpPr>
-        <p:spPr>
-          <a:xfrm>
-            <a:off x="566928" y="5431536"/>
-            <a:ext cx="11057839" cy="566928"/>
-          </a:xfrm>
-          <a:prstGeom prst="rect">
-            <a:avLst/>
-          </a:prstGeom>
-          <a:noFill/>
-          <a:ln/>
-        </p:spPr>
-        <p:txBody>
-          <a:bodyPr wrap="square" rtlCol="0" anchor="t"/>
-          <a:lstStyle/>
-          <a:p>
-            <a:pPr indent="0" marL="0">
-              <a:lnSpc>
-                <a:spcPts val="1450"/>
+              <a:lnSpc>
+                <a:spcPts val="1400"/>
               </a:lnSpc>
               <a:buNone/>
             </a:pPr>
             <a:r>
               <a:rPr lang="en-US" sz="1050" b="1" dirty="0">
                 <a:solidFill>
+                  <a:srgbClr val="15803D"/>
+                </a:solidFill>
+                <a:latin typeface="Arial" pitchFamily="34" charset="0"/>
+                <a:ea typeface="Arial" pitchFamily="34" charset="-122"/>
+                <a:cs typeface="Arial" pitchFamily="34" charset="-120"/>
+              </a:rPr>
+              <a:t>Checked on every change:  </a:t>
+            </a:r>
+            <a:pPr indent="0" marL="0">
+              <a:lnSpc>
+                <a:spcPts val="1400"/>
+              </a:lnSpc>
+              <a:buNone/>
+            </a:pPr>
+            <a:r>
+              <a:rPr lang="en-US" sz="1050" dirty="0">
+                <a:solidFill>
+                  <a:srgbClr val="3F4750"/>
+                </a:solidFill>
+                <a:latin typeface="Arial" pitchFamily="34" charset="0"/>
+                <a:ea typeface="Arial" pitchFamily="34" charset="-122"/>
+                <a:cs typeface="Arial" pitchFamily="34" charset="-120"/>
+              </a:rPr>
+              <a:t>482 tests run, the code is checked, and the whole site is built.     </a:t>
+            </a:r>
+            <a:pPr indent="0" marL="0">
+              <a:lnSpc>
+                <a:spcPts val="1400"/>
+              </a:lnSpc>
+              <a:buNone/>
+            </a:pPr>
+            <a:r>
+              <a:rPr lang="en-US" sz="1050" b="1" dirty="0">
+                <a:solidFill>
                   <a:srgbClr val="9A5B08"/>
                 </a:solidFill>
                 <a:latin typeface="Arial" pitchFamily="34" charset="0"/>
                 <a:ea typeface="Arial" pitchFamily="34" charset="-122"/>
                 <a:cs typeface="Arial" pitchFamily="34" charset="-120"/>
               </a:rPr>
-              <a:t>Stated limits:  </a:t>
-            </a:r>
-            <a:pPr indent="0" marL="0">
-              <a:lnSpc>
-                <a:spcPts val="1450"/>
+              <a:t>Not yet done:  </a:t>
+            </a:r>
+            <a:pPr indent="0" marL="0">
+              <a:lnSpc>
+                <a:spcPts val="1400"/>
               </a:lnSpc>
               <a:buNone/>
             </a:pPr>
@@ -8104,41 +8405,7 @@
                 <a:ea typeface="Arial" pitchFamily="34" charset="-122"/>
                 <a:cs typeface="Arial" pitchFamily="34" charset="-120"/>
               </a:rPr>
-              <a:t>the dials are coarse — strictness 1→10 moves difficulty only 5→7, and 5/6/7 emit byte-identical prompts. Scoring is persona-blind </a:t>
-            </a:r>
-            <a:pPr indent="0" marL="0">
-              <a:lnSpc>
-                <a:spcPts val="1450"/>
-              </a:lnSpc>
-              <a:buNone/>
-            </a:pPr>
-            <a:r>
-              <a:rPr lang="en-US" sz="1050" i="1" dirty="0">
-                <a:solidFill>
-                  <a:srgbClr val="3F4750"/>
-                </a:solidFill>
-                <a:latin typeface="Arial" pitchFamily="34" charset="0"/>
-                <a:ea typeface="Arial" pitchFamily="34" charset="-122"/>
-                <a:cs typeface="Arial" pitchFamily="34" charset="-120"/>
-              </a:rPr>
-              <a:t>by design</a:t>
-            </a:r>
-            <a:pPr indent="0" marL="0">
-              <a:lnSpc>
-                <a:spcPts val="1450"/>
-              </a:lnSpc>
-              <a:buNone/>
-            </a:pPr>
-            <a:r>
-              <a:rPr lang="en-US" sz="1050" dirty="0">
-                <a:solidFill>
-                  <a:srgbClr val="3F4750"/>
-                </a:solidFill>
-                <a:latin typeface="Arial" pitchFamily="34" charset="0"/>
-                <a:ea typeface="Arial" pitchFamily="34" charset="-122"/>
-                <a:cs typeface="Arial" pitchFamily="34" charset="-120"/>
-              </a:rPr>
-              <a:t>: a strict interviewer and a warm one grade the same answer identically, because grading should not depend on who asked. Persona changes what gets asked next, never what an answer was worth.</a:t>
+              <a:t>trying it with real users, checking how accurate the marking is, and putting it online.</a:t>
             </a:r>
             <a:endParaRPr lang="en-US" sz="1050" dirty="0"/>
           </a:p>
@@ -8146,7 +8413,7 @@
       </p:sp>
       <p:sp>
         <p:nvSpPr>
-          <p:cNvPr id="23" name="Text 20"/>
+          <p:cNvPr id="27" name="Text 24"/>
           <p:cNvSpPr/>
           <p:nvPr/>
         </p:nvSpPr>
@@ -8185,7 +8452,7 @@
       </p:sp>
       <p:sp>
         <p:nvSpPr>
-          <p:cNvPr id="24" name="Text 21"/>
+          <p:cNvPr id="28" name="Text 25"/>
           <p:cNvSpPr/>
           <p:nvPr/>
         </p:nvSpPr>
@@ -8307,7 +8574,7 @@
                 <a:ea typeface="Arial" pitchFamily="34" charset="-122"/>
                 <a:cs typeface="Arial" pitchFamily="34" charset="-120"/>
               </a:rPr>
-              <a:t>ENGINEERING RIGOUR</a:t>
+              <a:t>WHAT IT COSTS TO RUN</a:t>
             </a:r>
             <a:endParaRPr lang="en-US" sz="1100" dirty="0"/>
           </a:p>
@@ -8346,7 +8613,7 @@
                 <a:ea typeface="Arial" pitchFamily="34" charset="-122"/>
                 <a:cs typeface="Arial" pitchFamily="34" charset="-120"/>
               </a:rPr>
-              <a:t>Every model call is instrumented, so cost is a query — not a claim.</a:t>
+              <a:t>Every AI call is recorded and priced, so the cost is measured — not guessed.</a:t>
             </a:r>
             <a:endParaRPr lang="en-US" sz="3000" dirty="0"/>
           </a:p>
@@ -8360,8 +8627,8 @@
         </p:nvSpPr>
         <p:spPr>
           <a:xfrm>
-            <a:off x="566928" y="1645920"/>
-            <a:ext cx="2021373" cy="603504"/>
+            <a:off x="566928" y="1627632"/>
+            <a:ext cx="3478682" cy="1316736"/>
           </a:xfrm>
           <a:prstGeom prst="rect">
             <a:avLst/>
@@ -8371,7 +8638,7 @@
           </a:solidFill>
           <a:ln w="12700">
             <a:solidFill>
-              <a:srgbClr val="DFE4EA"/>
+              <a:srgbClr val="F5F7FA"/>
             </a:solidFill>
             <a:prstDash val="solid"/>
           </a:ln>
@@ -8379,14 +8646,39 @@
       </p:sp>
       <p:sp>
         <p:nvSpPr>
-          <p:cNvPr id="6" name="Text 4"/>
-          <p:cNvSpPr/>
-          <p:nvPr/>
-        </p:nvSpPr>
-        <p:spPr>
-          <a:xfrm>
-            <a:off x="640080" y="1645920"/>
-            <a:ext cx="1875069" cy="603504"/>
+          <p:cNvPr id="6" name="Shape 4"/>
+          <p:cNvSpPr/>
+          <p:nvPr/>
+        </p:nvSpPr>
+        <p:spPr>
+          <a:xfrm>
+            <a:off x="566928" y="1627632"/>
+            <a:ext cx="50292" cy="1316736"/>
+          </a:xfrm>
+          <a:prstGeom prst="rect">
+            <a:avLst/>
+          </a:prstGeom>
+          <a:solidFill>
+            <a:srgbClr val="1D4ED8"/>
+          </a:solidFill>
+          <a:ln w="12700">
+            <a:solidFill>
+              <a:srgbClr val="333333"/>
+            </a:solidFill>
+            <a:prstDash val="solid"/>
+          </a:ln>
+        </p:spPr>
+      </p:sp>
+      <p:sp>
+        <p:nvSpPr>
+          <p:cNvPr id="7" name="Text 5"/>
+          <p:cNvSpPr/>
+          <p:nvPr/>
+        </p:nvSpPr>
+        <p:spPr>
+          <a:xfrm>
+            <a:off x="822960" y="1719072"/>
+            <a:ext cx="3058058" cy="256032"/>
           </a:xfrm>
           <a:prstGeom prst="rect">
             <a:avLst/>
@@ -8398,76 +8690,76 @@
           <a:bodyPr wrap="square" rtlCol="0" anchor="ctr"/>
           <a:lstStyle/>
           <a:p>
-            <a:pPr algn="ctr" indent="0" marL="0">
-              <a:lnSpc>
-                <a:spcPts val="1200"/>
-              </a:lnSpc>
-              <a:buNone/>
-            </a:pPr>
-            <a:r>
-              <a:rPr lang="en-US" sz="950" dirty="0">
+            <a:pPr indent="0" marL="0">
+              <a:buNone/>
+            </a:pPr>
+            <a:r>
+              <a:rPr lang="en-US" sz="1250" b="1" dirty="0">
+                <a:solidFill>
+                  <a:srgbClr val="14161A"/>
+                </a:solidFill>
+                <a:latin typeface="Arial" pitchFamily="34" charset="0"/>
+                <a:ea typeface="Arial" pitchFamily="34" charset="-122"/>
+                <a:cs typeface="Arial" pitchFamily="34" charset="-120"/>
+              </a:rPr>
+              <a:t>The AI bills by the text</a:t>
+            </a:r>
+            <a:endParaRPr lang="en-US" sz="1250" dirty="0"/>
+          </a:p>
+        </p:txBody>
+      </p:sp>
+      <p:sp>
+        <p:nvSpPr>
+          <p:cNvPr id="8" name="Text 6"/>
+          <p:cNvSpPr/>
+          <p:nvPr/>
+        </p:nvSpPr>
+        <p:spPr>
+          <a:xfrm>
+            <a:off x="822960" y="2011680"/>
+            <a:ext cx="3058058" cy="841248"/>
+          </a:xfrm>
+          <a:prstGeom prst="rect">
+            <a:avLst/>
+          </a:prstGeom>
+          <a:noFill/>
+          <a:ln/>
+        </p:spPr>
+        <p:txBody>
+          <a:bodyPr wrap="square" rtlCol="0" anchor="t"/>
+          <a:lstStyle/>
+          <a:p>
+            <a:pPr indent="0" marL="0">
+              <a:lnSpc>
+                <a:spcPts val="1550"/>
+              </a:lnSpc>
+              <a:buNone/>
+            </a:pPr>
+            <a:r>
+              <a:rPr lang="en-US" sz="1100" dirty="0">
                 <a:solidFill>
                   <a:srgbClr val="3F4750"/>
                 </a:solidFill>
-                <a:latin typeface="Courier New" pitchFamily="34" charset="0"/>
-                <a:ea typeface="Courier New" pitchFamily="34" charset="-122"/>
-                <a:cs typeface="Courier New" pitchFamily="34" charset="-120"/>
-              </a:rPr>
-              <a:t>Every OpenAI call</a:t>
-            </a:r>
-            <a:endParaRPr lang="en-US" sz="950" dirty="0"/>
-          </a:p>
-        </p:txBody>
-      </p:sp>
-      <p:sp>
-        <p:nvSpPr>
-          <p:cNvPr id="7" name="Text 5"/>
-          <p:cNvSpPr/>
-          <p:nvPr/>
-        </p:nvSpPr>
-        <p:spPr>
-          <a:xfrm>
-            <a:off x="2588301" y="1792224"/>
-            <a:ext cx="237744" cy="310896"/>
-          </a:xfrm>
-          <a:prstGeom prst="rect">
-            <a:avLst/>
-          </a:prstGeom>
-          <a:noFill/>
-          <a:ln/>
-        </p:spPr>
-        <p:txBody>
-          <a:bodyPr wrap="square" rtlCol="0" anchor="ctr"/>
-          <a:lstStyle/>
-          <a:p>
-            <a:pPr algn="ctr" indent="0" marL="0">
-              <a:buNone/>
-            </a:pPr>
-            <a:r>
-              <a:rPr lang="en-US" sz="1400" dirty="0">
-                <a:solidFill>
-                  <a:srgbClr val="7A8593"/>
-                </a:solidFill>
-                <a:latin typeface="Arial" pitchFamily="34" charset="0"/>
-                <a:ea typeface="Arial" pitchFamily="34" charset="-122"/>
-                <a:cs typeface="Arial" pitchFamily="34" charset="-120"/>
-              </a:rPr>
-              <a:t>▸</a:t>
-            </a:r>
-            <a:endParaRPr lang="en-US" sz="1400" dirty="0"/>
-          </a:p>
-        </p:txBody>
-      </p:sp>
-      <p:sp>
-        <p:nvSpPr>
-          <p:cNvPr id="8" name="Shape 6"/>
-          <p:cNvSpPr/>
-          <p:nvPr/>
-        </p:nvSpPr>
-        <p:spPr>
-          <a:xfrm>
-            <a:off x="2826045" y="1645920"/>
-            <a:ext cx="2021373" cy="603504"/>
+                <a:latin typeface="Arial" pitchFamily="34" charset="0"/>
+                <a:ea typeface="Arial" pitchFamily="34" charset="-122"/>
+                <a:cs typeface="Arial" pitchFamily="34" charset="-120"/>
+              </a:rPr>
+              <a:t>Text is counted in tokens — roughly four characters each. You pay for everything sent in, and again for everything written back, at different rates.</a:t>
+            </a:r>
+            <a:endParaRPr lang="en-US" sz="1100" dirty="0"/>
+          </a:p>
+        </p:txBody>
+      </p:sp>
+      <p:sp>
+        <p:nvSpPr>
+          <p:cNvPr id="9" name="Shape 7"/>
+          <p:cNvSpPr/>
+          <p:nvPr/>
+        </p:nvSpPr>
+        <p:spPr>
+          <a:xfrm>
+            <a:off x="4356506" y="1627632"/>
+            <a:ext cx="3478682" cy="1316736"/>
           </a:xfrm>
           <a:prstGeom prst="rect">
             <a:avLst/>
@@ -8477,7 +8769,7 @@
           </a:solidFill>
           <a:ln w="12700">
             <a:solidFill>
-              <a:srgbClr val="DFE4EA"/>
+              <a:srgbClr val="F5F7FA"/>
             </a:solidFill>
             <a:prstDash val="solid"/>
           </a:ln>
@@ -8485,14 +8777,39 @@
       </p:sp>
       <p:sp>
         <p:nvSpPr>
-          <p:cNvPr id="9" name="Text 7"/>
-          <p:cNvSpPr/>
-          <p:nvPr/>
-        </p:nvSpPr>
-        <p:spPr>
-          <a:xfrm>
-            <a:off x="2899197" y="1645920"/>
-            <a:ext cx="1875069" cy="603504"/>
+          <p:cNvPr id="10" name="Shape 8"/>
+          <p:cNvSpPr/>
+          <p:nvPr/>
+        </p:nvSpPr>
+        <p:spPr>
+          <a:xfrm>
+            <a:off x="4356506" y="1627632"/>
+            <a:ext cx="50292" cy="1316736"/>
+          </a:xfrm>
+          <a:prstGeom prst="rect">
+            <a:avLst/>
+          </a:prstGeom>
+          <a:solidFill>
+            <a:srgbClr val="1D4ED8"/>
+          </a:solidFill>
+          <a:ln w="12700">
+            <a:solidFill>
+              <a:srgbClr val="333333"/>
+            </a:solidFill>
+            <a:prstDash val="solid"/>
+          </a:ln>
+        </p:spPr>
+      </p:sp>
+      <p:sp>
+        <p:nvSpPr>
+          <p:cNvPr id="11" name="Text 9"/>
+          <p:cNvSpPr/>
+          <p:nvPr/>
+        </p:nvSpPr>
+        <p:spPr>
+          <a:xfrm>
+            <a:off x="4612538" y="1719072"/>
+            <a:ext cx="3058058" cy="256032"/>
           </a:xfrm>
           <a:prstGeom prst="rect">
             <a:avLst/>
@@ -8504,76 +8821,76 @@
           <a:bodyPr wrap="square" rtlCol="0" anchor="ctr"/>
           <a:lstStyle/>
           <a:p>
-            <a:pPr algn="ctr" indent="0" marL="0">
-              <a:lnSpc>
-                <a:spcPts val="1200"/>
-              </a:lnSpc>
-              <a:buNone/>
-            </a:pPr>
-            <a:r>
-              <a:rPr lang="en-US" sz="950" dirty="0">
+            <a:pPr indent="0" marL="0">
+              <a:buNone/>
+            </a:pPr>
+            <a:r>
+              <a:rPr lang="en-US" sz="1250" b="1" dirty="0">
+                <a:solidFill>
+                  <a:srgbClr val="14161A"/>
+                </a:solidFill>
+                <a:latin typeface="Arial" pitchFamily="34" charset="0"/>
+                <a:ea typeface="Arial" pitchFamily="34" charset="-122"/>
+                <a:cs typeface="Arial" pitchFamily="34" charset="-120"/>
+              </a:rPr>
+              <a:t>So a session can be priced</a:t>
+            </a:r>
+            <a:endParaRPr lang="en-US" sz="1250" dirty="0"/>
+          </a:p>
+        </p:txBody>
+      </p:sp>
+      <p:sp>
+        <p:nvSpPr>
+          <p:cNvPr id="12" name="Text 10"/>
+          <p:cNvSpPr/>
+          <p:nvPr/>
+        </p:nvSpPr>
+        <p:spPr>
+          <a:xfrm>
+            <a:off x="4612538" y="2011680"/>
+            <a:ext cx="3058058" cy="841248"/>
+          </a:xfrm>
+          <a:prstGeom prst="rect">
+            <a:avLst/>
+          </a:prstGeom>
+          <a:noFill/>
+          <a:ln/>
+        </p:spPr>
+        <p:txBody>
+          <a:bodyPr wrap="square" rtlCol="0" anchor="t"/>
+          <a:lstStyle/>
+          <a:p>
+            <a:pPr indent="0" marL="0">
+              <a:lnSpc>
+                <a:spcPts val="1550"/>
+              </a:lnSpc>
+              <a:buNone/>
+            </a:pPr>
+            <a:r>
+              <a:rPr lang="en-US" sz="1100" dirty="0">
                 <a:solidFill>
                   <a:srgbClr val="3F4750"/>
                 </a:solidFill>
-                <a:latin typeface="Courier New" pitchFamily="34" charset="0"/>
-                <a:ea typeface="Courier New" pitchFamily="34" charset="-122"/>
-                <a:cs typeface="Courier New" pitchFamily="34" charset="-120"/>
-              </a:rPr>
-              <a:t>UsageCollector.record()</a:t>
-            </a:r>
-            <a:endParaRPr lang="en-US" sz="950" dirty="0"/>
-          </a:p>
-        </p:txBody>
-      </p:sp>
-      <p:sp>
-        <p:nvSpPr>
-          <p:cNvPr id="10" name="Text 8"/>
-          <p:cNvSpPr/>
-          <p:nvPr/>
-        </p:nvSpPr>
-        <p:spPr>
-          <a:xfrm>
-            <a:off x="4847417" y="1792224"/>
-            <a:ext cx="237744" cy="310896"/>
-          </a:xfrm>
-          <a:prstGeom prst="rect">
-            <a:avLst/>
-          </a:prstGeom>
-          <a:noFill/>
-          <a:ln/>
-        </p:spPr>
-        <p:txBody>
-          <a:bodyPr wrap="square" rtlCol="0" anchor="ctr"/>
-          <a:lstStyle/>
-          <a:p>
-            <a:pPr algn="ctr" indent="0" marL="0">
-              <a:buNone/>
-            </a:pPr>
-            <a:r>
-              <a:rPr lang="en-US" sz="1400" dirty="0">
-                <a:solidFill>
-                  <a:srgbClr val="7A8593"/>
-                </a:solidFill>
-                <a:latin typeface="Arial" pitchFamily="34" charset="0"/>
-                <a:ea typeface="Arial" pitchFamily="34" charset="-122"/>
-                <a:cs typeface="Arial" pitchFamily="34" charset="-120"/>
-              </a:rPr>
-              <a:t>▸</a:t>
-            </a:r>
-            <a:endParaRPr lang="en-US" sz="1400" dirty="0"/>
-          </a:p>
-        </p:txBody>
-      </p:sp>
-      <p:sp>
-        <p:nvSpPr>
-          <p:cNvPr id="11" name="Shape 9"/>
-          <p:cNvSpPr/>
-          <p:nvPr/>
-        </p:nvSpPr>
-        <p:spPr>
-          <a:xfrm>
-            <a:off x="5085161" y="1645920"/>
-            <a:ext cx="2021373" cy="603504"/>
+                <a:latin typeface="Arial" pitchFamily="34" charset="0"/>
+                <a:ea typeface="Arial" pitchFamily="34" charset="-122"/>
+                <a:cs typeface="Arial" pitchFamily="34" charset="-120"/>
+              </a:rPr>
+              <a:t>Every call writes down its own token count as it happens. A tool multiplies those by the published rates — so any cost figure is looked up, not guessed.</a:t>
+            </a:r>
+            <a:endParaRPr lang="en-US" sz="1100" dirty="0"/>
+          </a:p>
+        </p:txBody>
+      </p:sp>
+      <p:sp>
+        <p:nvSpPr>
+          <p:cNvPr id="13" name="Shape 11"/>
+          <p:cNvSpPr/>
+          <p:nvPr/>
+        </p:nvSpPr>
+        <p:spPr>
+          <a:xfrm>
+            <a:off x="8146085" y="1627632"/>
+            <a:ext cx="3478682" cy="1316736"/>
           </a:xfrm>
           <a:prstGeom prst="rect">
             <a:avLst/>
@@ -8583,7 +8900,7 @@
           </a:solidFill>
           <a:ln w="12700">
             <a:solidFill>
-              <a:srgbClr val="DFE4EA"/>
+              <a:srgbClr val="F5F7FA"/>
             </a:solidFill>
             <a:prstDash val="solid"/>
           </a:ln>
@@ -8591,105 +8908,24 @@
       </p:sp>
       <p:sp>
         <p:nvSpPr>
-          <p:cNvPr id="12" name="Text 10"/>
-          <p:cNvSpPr/>
-          <p:nvPr/>
-        </p:nvSpPr>
-        <p:spPr>
-          <a:xfrm>
-            <a:off x="5158313" y="1645920"/>
-            <a:ext cx="1875069" cy="603504"/>
-          </a:xfrm>
-          <a:prstGeom prst="rect">
-            <a:avLst/>
-          </a:prstGeom>
-          <a:noFill/>
-          <a:ln/>
-        </p:spPr>
-        <p:txBody>
-          <a:bodyPr wrap="square" rtlCol="0" anchor="ctr"/>
-          <a:lstStyle/>
-          <a:p>
-            <a:pPr algn="ctr" indent="0" marL="0">
-              <a:lnSpc>
-                <a:spcPts val="1200"/>
-              </a:lnSpc>
-              <a:buNone/>
-            </a:pPr>
-            <a:r>
-              <a:rPr lang="en-US" sz="950" dirty="0">
-                <a:solidFill>
-                  <a:srgbClr val="3F4750"/>
-                </a:solidFill>
-                <a:latin typeface="Courier New" pitchFamily="34" charset="0"/>
-                <a:ea typeface="Courier New" pitchFamily="34" charset="-122"/>
-                <a:cs typeface="Courier New" pitchFamily="34" charset="-120"/>
-              </a:rPr>
-              <a:t>one row in llm_usage</a:t>
-            </a:r>
-            <a:endParaRPr lang="en-US" sz="950" dirty="0"/>
-          </a:p>
-        </p:txBody>
-      </p:sp>
-      <p:sp>
-        <p:nvSpPr>
-          <p:cNvPr id="13" name="Text 11"/>
-          <p:cNvSpPr/>
-          <p:nvPr/>
-        </p:nvSpPr>
-        <p:spPr>
-          <a:xfrm>
-            <a:off x="7106534" y="1792224"/>
-            <a:ext cx="237744" cy="310896"/>
-          </a:xfrm>
-          <a:prstGeom prst="rect">
-            <a:avLst/>
-          </a:prstGeom>
-          <a:noFill/>
-          <a:ln/>
-        </p:spPr>
-        <p:txBody>
-          <a:bodyPr wrap="square" rtlCol="0" anchor="ctr"/>
-          <a:lstStyle/>
-          <a:p>
-            <a:pPr algn="ctr" indent="0" marL="0">
-              <a:buNone/>
-            </a:pPr>
-            <a:r>
-              <a:rPr lang="en-US" sz="1400" dirty="0">
-                <a:solidFill>
-                  <a:srgbClr val="7A8593"/>
-                </a:solidFill>
-                <a:latin typeface="Arial" pitchFamily="34" charset="0"/>
-                <a:ea typeface="Arial" pitchFamily="34" charset="-122"/>
-                <a:cs typeface="Arial" pitchFamily="34" charset="-120"/>
-              </a:rPr>
-              <a:t>▸</a:t>
-            </a:r>
-            <a:endParaRPr lang="en-US" sz="1400" dirty="0"/>
-          </a:p>
-        </p:txBody>
-      </p:sp>
-      <p:sp>
-        <p:nvSpPr>
           <p:cNvPr id="14" name="Shape 12"/>
           <p:cNvSpPr/>
           <p:nvPr/>
         </p:nvSpPr>
         <p:spPr>
           <a:xfrm>
-            <a:off x="7344278" y="1645920"/>
-            <a:ext cx="2021373" cy="603504"/>
+            <a:off x="8146085" y="1627632"/>
+            <a:ext cx="50292" cy="1316736"/>
           </a:xfrm>
           <a:prstGeom prst="rect">
             <a:avLst/>
           </a:prstGeom>
           <a:solidFill>
-            <a:srgbClr val="F5F7FA"/>
+            <a:srgbClr val="1D4ED8"/>
           </a:solidFill>
           <a:ln w="12700">
             <a:solidFill>
-              <a:srgbClr val="DFE4EA"/>
+              <a:srgbClr val="333333"/>
             </a:solidFill>
             <a:prstDash val="solid"/>
           </a:ln>
@@ -8703,8 +8939,8 @@
         </p:nvSpPr>
         <p:spPr>
           <a:xfrm>
-            <a:off x="7417430" y="1645920"/>
-            <a:ext cx="1875069" cy="603504"/>
+            <a:off x="8402117" y="1719072"/>
+            <a:ext cx="3058058" cy="256032"/>
           </a:xfrm>
           <a:prstGeom prst="rect">
             <a:avLst/>
@@ -8716,63 +8952,63 @@
           <a:bodyPr wrap="square" rtlCol="0" anchor="ctr"/>
           <a:lstStyle/>
           <a:p>
-            <a:pPr algn="ctr" indent="0" marL="0">
-              <a:lnSpc>
-                <a:spcPts val="1200"/>
-              </a:lnSpc>
-              <a:buNone/>
-            </a:pPr>
-            <a:r>
-              <a:rPr lang="en-US" sz="950" dirty="0">
+            <a:pPr indent="0" marL="0">
+              <a:buNone/>
+            </a:pPr>
+            <a:r>
+              <a:rPr lang="en-US" sz="1250" b="1" dirty="0">
+                <a:solidFill>
+                  <a:srgbClr val="14161A"/>
+                </a:solidFill>
+                <a:latin typeface="Arial" pitchFamily="34" charset="0"/>
+                <a:ea typeface="Arial" pitchFamily="34" charset="-122"/>
+                <a:cs typeface="Arial" pitchFamily="34" charset="-120"/>
+              </a:rPr>
+              <a:t>What that let me cut</a:t>
+            </a:r>
+            <a:endParaRPr lang="en-US" sz="1250" dirty="0"/>
+          </a:p>
+        </p:txBody>
+      </p:sp>
+      <p:sp>
+        <p:nvSpPr>
+          <p:cNvPr id="16" name="Text 14"/>
+          <p:cNvSpPr/>
+          <p:nvPr/>
+        </p:nvSpPr>
+        <p:spPr>
+          <a:xfrm>
+            <a:off x="8402117" y="2011680"/>
+            <a:ext cx="3058058" cy="841248"/>
+          </a:xfrm>
+          <a:prstGeom prst="rect">
+            <a:avLst/>
+          </a:prstGeom>
+          <a:noFill/>
+          <a:ln/>
+        </p:spPr>
+        <p:txBody>
+          <a:bodyPr wrap="square" rtlCol="0" anchor="t"/>
+          <a:lstStyle/>
+          <a:p>
+            <a:pPr indent="0" marL="0">
+              <a:lnSpc>
+                <a:spcPts val="1550"/>
+              </a:lnSpc>
+              <a:buNone/>
+            </a:pPr>
+            <a:r>
+              <a:rPr lang="en-US" sz="1100" dirty="0">
                 <a:solidFill>
                   <a:srgbClr val="3F4750"/>
                 </a:solidFill>
-                <a:latin typeface="Courier New" pitchFamily="34" charset="0"/>
-                <a:ea typeface="Courier New" pitchFamily="34" charset="-122"/>
-                <a:cs typeface="Courier New" pitchFamily="34" charset="-120"/>
-              </a:rPr>
-              <a:t>npm run cost-report</a:t>
-            </a:r>
-            <a:endParaRPr lang="en-US" sz="950" dirty="0"/>
-          </a:p>
-        </p:txBody>
-      </p:sp>
-      <p:sp>
-        <p:nvSpPr>
-          <p:cNvPr id="16" name="Text 14"/>
-          <p:cNvSpPr/>
-          <p:nvPr/>
-        </p:nvSpPr>
-        <p:spPr>
-          <a:xfrm>
-            <a:off x="9365651" y="1792224"/>
-            <a:ext cx="237744" cy="310896"/>
-          </a:xfrm>
-          <a:prstGeom prst="rect">
-            <a:avLst/>
-          </a:prstGeom>
-          <a:noFill/>
-          <a:ln/>
-        </p:spPr>
-        <p:txBody>
-          <a:bodyPr wrap="square" rtlCol="0" anchor="ctr"/>
-          <a:lstStyle/>
-          <a:p>
-            <a:pPr algn="ctr" indent="0" marL="0">
-              <a:buNone/>
-            </a:pPr>
-            <a:r>
-              <a:rPr lang="en-US" sz="1400" dirty="0">
-                <a:solidFill>
-                  <a:srgbClr val="7A8593"/>
-                </a:solidFill>
-                <a:latin typeface="Arial" pitchFamily="34" charset="0"/>
-                <a:ea typeface="Arial" pitchFamily="34" charset="-122"/>
-                <a:cs typeface="Arial" pitchFamily="34" charset="-120"/>
-              </a:rPr>
-              <a:t>▸</a:t>
-            </a:r>
-            <a:endParaRPr lang="en-US" sz="1400" dirty="0"/>
+                <a:latin typeface="Arial" pitchFamily="34" charset="0"/>
+                <a:ea typeface="Arial" pitchFamily="34" charset="-122"/>
+                <a:cs typeface="Arial" pitchFamily="34" charset="-120"/>
+              </a:rPr>
+              <a:t>One-word answers aren't marked · counting is done in ordinary code, not by the AI · feedback already written is reused, not bought twice</a:t>
+            </a:r>
+            <a:endParaRPr lang="en-US" sz="1100" dirty="0"/>
           </a:p>
         </p:txBody>
       </p:sp>
@@ -8784,75 +9020,8 @@
         </p:nvSpPr>
         <p:spPr>
           <a:xfrm>
-            <a:off x="9603395" y="1645920"/>
-            <a:ext cx="2021373" cy="603504"/>
-          </a:xfrm>
-          <a:prstGeom prst="rect">
-            <a:avLst/>
-          </a:prstGeom>
-          <a:solidFill>
-            <a:srgbClr val="EAF0FE"/>
-          </a:solidFill>
-          <a:ln w="12700">
-            <a:solidFill>
-              <a:srgbClr val="1D4ED8"/>
-            </a:solidFill>
-            <a:prstDash val="solid"/>
-          </a:ln>
-        </p:spPr>
-      </p:sp>
-      <p:sp>
-        <p:nvSpPr>
-          <p:cNvPr id="18" name="Text 16"/>
-          <p:cNvSpPr/>
-          <p:nvPr/>
-        </p:nvSpPr>
-        <p:spPr>
-          <a:xfrm>
-            <a:off x="9676547" y="1645920"/>
-            <a:ext cx="1875069" cy="603504"/>
-          </a:xfrm>
-          <a:prstGeom prst="rect">
-            <a:avLst/>
-          </a:prstGeom>
-          <a:noFill/>
-          <a:ln/>
-        </p:spPr>
-        <p:txBody>
-          <a:bodyPr wrap="square" rtlCol="0" anchor="ctr"/>
-          <a:lstStyle/>
-          <a:p>
-            <a:pPr algn="ctr" indent="0" marL="0">
-              <a:lnSpc>
-                <a:spcPts val="1200"/>
-              </a:lnSpc>
-              <a:buNone/>
-            </a:pPr>
-            <a:r>
-              <a:rPr lang="en-US" sz="950" dirty="0">
-                <a:solidFill>
-                  <a:srgbClr val="1D4ED8"/>
-                </a:solidFill>
-                <a:latin typeface="Courier New" pitchFamily="34" charset="0"/>
-                <a:ea typeface="Courier New" pitchFamily="34" charset="-122"/>
-                <a:cs typeface="Courier New" pitchFamily="34" charset="-120"/>
-              </a:rPr>
-              <a:t>tokens · cache hits · $</a:t>
-            </a:r>
-            <a:endParaRPr lang="en-US" sz="950" dirty="0"/>
-          </a:p>
-        </p:txBody>
-      </p:sp>
-      <p:sp>
-        <p:nvSpPr>
-          <p:cNvPr id="19" name="Shape 17"/>
-          <p:cNvSpPr/>
-          <p:nvPr/>
-        </p:nvSpPr>
-        <p:spPr>
-          <a:xfrm>
-            <a:off x="566928" y="2487168"/>
-            <a:ext cx="11057839" cy="1755648"/>
+            <a:off x="566928" y="3127248"/>
+            <a:ext cx="11057839" cy="1700784"/>
           </a:xfrm>
           <a:prstGeom prst="rect">
             <a:avLst/>
@@ -8870,14 +9039,14 @@
       </p:sp>
       <p:sp>
         <p:nvSpPr>
-          <p:cNvPr id="20" name="Shape 18"/>
-          <p:cNvSpPr/>
-          <p:nvPr/>
-        </p:nvSpPr>
-        <p:spPr>
-          <a:xfrm>
-            <a:off x="566928" y="2487168"/>
-            <a:ext cx="50292" cy="1755648"/>
+          <p:cNvPr id="18" name="Shape 16"/>
+          <p:cNvSpPr/>
+          <p:nvPr/>
+        </p:nvSpPr>
+        <p:spPr>
+          <a:xfrm>
+            <a:off x="566928" y="3127248"/>
+            <a:ext cx="50292" cy="1700784"/>
           </a:xfrm>
           <a:prstGeom prst="rect">
             <a:avLst/>
@@ -8895,53 +9064,95 @@
       </p:sp>
       <p:sp>
         <p:nvSpPr>
+          <p:cNvPr id="19" name="Text 17"/>
+          <p:cNvSpPr/>
+          <p:nvPr/>
+        </p:nvSpPr>
+        <p:spPr>
+          <a:xfrm>
+            <a:off x="877824" y="3236976"/>
+            <a:ext cx="10417759" cy="292608"/>
+          </a:xfrm>
+          <a:prstGeom prst="rect">
+            <a:avLst/>
+          </a:prstGeom>
+          <a:noFill/>
+          <a:ln/>
+        </p:spPr>
+        <p:txBody>
+          <a:bodyPr wrap="square" rtlCol="0" anchor="ctr"/>
+          <a:lstStyle/>
+          <a:p>
+            <a:pPr indent="0" marL="0">
+              <a:buNone/>
+            </a:pPr>
+            <a:r>
+              <a:rPr lang="en-US" sz="1500" b="1" dirty="0">
+                <a:solidFill>
+                  <a:srgbClr val="9A5B08"/>
+                </a:solidFill>
+                <a:latin typeface="Arial" pitchFamily="34" charset="0"/>
+                <a:ea typeface="Arial" pitchFamily="34" charset="-122"/>
+                <a:cs typeface="Arial" pitchFamily="34" charset="-120"/>
+              </a:rPr>
+              <a:t>The finding I didn't expect</a:t>
+            </a:r>
+            <a:endParaRPr lang="en-US" sz="1500" dirty="0"/>
+          </a:p>
+        </p:txBody>
+      </p:sp>
+      <p:sp>
+        <p:nvSpPr>
+          <p:cNvPr id="20" name="Text 18"/>
+          <p:cNvSpPr/>
+          <p:nvPr/>
+        </p:nvSpPr>
+        <p:spPr>
+          <a:xfrm>
+            <a:off x="877824" y="3566160"/>
+            <a:ext cx="10417759" cy="694944"/>
+          </a:xfrm>
+          <a:prstGeom prst="rect">
+            <a:avLst/>
+          </a:prstGeom>
+          <a:noFill/>
+          <a:ln/>
+        </p:spPr>
+        <p:txBody>
+          <a:bodyPr wrap="square" rtlCol="0" anchor="t"/>
+          <a:lstStyle/>
+          <a:p>
+            <a:pPr indent="0" marL="0">
+              <a:lnSpc>
+                <a:spcPts val="1800"/>
+              </a:lnSpc>
+              <a:buNone/>
+            </a:pPr>
+            <a:r>
+              <a:rPr lang="en-US" sz="1250" dirty="0">
+                <a:solidFill>
+                  <a:srgbClr val="3F4750"/>
+                </a:solidFill>
+                <a:latin typeface="Arial" pitchFamily="34" charset="0"/>
+                <a:ea typeface="Arial" pitchFamily="34" charset="-122"/>
+                <a:cs typeface="Arial" pitchFamily="34" charset="-120"/>
+              </a:rPr>
+              <a:t>OpenAI halves the price of the opening chunk of your instructions if it is identical every time — but only once that chunk reaches 1,024 tokens. That threshold is theirs, not mine. So I arranged my instructions with the unchanging part first, to qualify. Then I checked: mine comes to about 590 tokens. Too short, so the discount never applies — and the report confirms it, because every reply tells you how many tokens were reused, and that count is zero.</a:t>
+            </a:r>
+            <a:endParaRPr lang="en-US" sz="1250" dirty="0"/>
+          </a:p>
+        </p:txBody>
+      </p:sp>
+      <p:sp>
+        <p:nvSpPr>
           <p:cNvPr id="21" name="Text 19"/>
           <p:cNvSpPr/>
           <p:nvPr/>
         </p:nvSpPr>
         <p:spPr>
           <a:xfrm>
-            <a:off x="877824" y="2633472"/>
-            <a:ext cx="10417759" cy="292608"/>
-          </a:xfrm>
-          <a:prstGeom prst="rect">
-            <a:avLst/>
-          </a:prstGeom>
-          <a:noFill/>
-          <a:ln/>
-        </p:spPr>
-        <p:txBody>
-          <a:bodyPr wrap="square" rtlCol="0" anchor="ctr"/>
-          <a:lstStyle/>
-          <a:p>
-            <a:pPr indent="0" marL="0">
-              <a:buNone/>
-            </a:pPr>
-            <a:r>
-              <a:rPr lang="en-US" sz="1500" b="1" dirty="0">
-                <a:solidFill>
-                  <a:srgbClr val="9A5B08"/>
-                </a:solidFill>
-                <a:latin typeface="Arial" pitchFamily="34" charset="0"/>
-                <a:ea typeface="Arial" pitchFamily="34" charset="-122"/>
-                <a:cs typeface="Arial" pitchFamily="34" charset="-120"/>
-              </a:rPr>
-              <a:t>The most useful result is a negative one</a:t>
-            </a:r>
-            <a:endParaRPr lang="en-US" sz="1500" dirty="0"/>
-          </a:p>
-        </p:txBody>
-      </p:sp>
-      <p:sp>
-        <p:nvSpPr>
-          <p:cNvPr id="22" name="Text 20"/>
-          <p:cNvSpPr/>
-          <p:nvPr/>
-        </p:nvSpPr>
-        <p:spPr>
-          <a:xfrm>
-            <a:off x="877824" y="2962656"/>
-            <a:ext cx="10417759" cy="786384"/>
+            <a:off x="877824" y="4261104"/>
+            <a:ext cx="10417759" cy="457200"/>
           </a:xfrm>
           <a:prstGeom prst="rect">
             <a:avLst/>
@@ -8955,82 +9166,6 @@
           <a:p>
             <a:pPr indent="0" marL="0">
               <a:lnSpc>
-                <a:spcPts val="1800"/>
-              </a:lnSpc>
-              <a:buNone/>
-            </a:pPr>
-            <a:r>
-              <a:rPr lang="en-US" sz="1250" dirty="0">
-                <a:solidFill>
-                  <a:srgbClr val="3F4750"/>
-                </a:solidFill>
-                <a:latin typeface="Arial" pitchFamily="34" charset="0"/>
-                <a:ea typeface="Arial" pitchFamily="34" charset="-122"/>
-                <a:cs typeface="Arial" pitchFamily="34" charset="-120"/>
-              </a:rPr>
-              <a:t>OpenAI caches a prompt prefix only when it reaches 1,024 tokens. I ordered the prompt into a stable layer and a volatile layer so caching </a:t>
-            </a:r>
-            <a:pPr indent="0" marL="0">
-              <a:lnSpc>
-                <a:spcPts val="1800"/>
-              </a:lnSpc>
-              <a:buNone/>
-            </a:pPr>
-            <a:r>
-              <a:rPr lang="en-US" sz="1250" b="1" i="1" dirty="0">
-                <a:solidFill>
-                  <a:srgbClr val="14161A"/>
-                </a:solidFill>
-                <a:latin typeface="Arial" pitchFamily="34" charset="0"/>
-                <a:ea typeface="Arial" pitchFamily="34" charset="-122"/>
-                <a:cs typeface="Arial" pitchFamily="34" charset="-120"/>
-              </a:rPr>
-              <a:t>can</a:t>
-            </a:r>
-            <a:pPr indent="0" marL="0">
-              <a:lnSpc>
-                <a:spcPts val="1800"/>
-              </a:lnSpc>
-              <a:buNone/>
-            </a:pPr>
-            <a:r>
-              <a:rPr lang="en-US" sz="1250" dirty="0">
-                <a:solidFill>
-                  <a:srgbClr val="3F4750"/>
-                </a:solidFill>
-                <a:latin typeface="Arial" pitchFamily="34" charset="0"/>
-                <a:ea typeface="Arial" pitchFamily="34" charset="-122"/>
-                <a:cs typeface="Arial" pitchFamily="34" charset="-120"/>
-              </a:rPr>
-              <a:t> engage. On a bare session the stable prefix is about 590 tokens — under the floor — so it does not fire at all. The tool reports that in words, rather than printing a zero for me to reinterpret.</a:t>
-            </a:r>
-            <a:endParaRPr lang="en-US" sz="1250" dirty="0"/>
-          </a:p>
-        </p:txBody>
-      </p:sp>
-      <p:sp>
-        <p:nvSpPr>
-          <p:cNvPr id="23" name="Text 21"/>
-          <p:cNvSpPr/>
-          <p:nvPr/>
-        </p:nvSpPr>
-        <p:spPr>
-          <a:xfrm>
-            <a:off x="877824" y="3749040"/>
-            <a:ext cx="10417759" cy="402336"/>
-          </a:xfrm>
-          <a:prstGeom prst="rect">
-            <a:avLst/>
-          </a:prstGeom>
-          <a:noFill/>
-          <a:ln/>
-        </p:spPr>
-        <p:txBody>
-          <a:bodyPr wrap="square" rtlCol="0" anchor="t"/>
-          <a:lstStyle/>
-          <a:p>
-            <a:pPr indent="0" marL="0">
-              <a:lnSpc>
                 <a:spcPts val="1500"/>
               </a:lnSpc>
               <a:buNone/>
@@ -9044,7 +9179,7 @@
                 <a:ea typeface="Arial" pitchFamily="34" charset="-122"/>
                 <a:cs typeface="Arial" pitchFamily="34" charset="-120"/>
               </a:rPr>
-              <a:t>Attach a job description and the prompt clears the floor — which is exactly when caching is worth having. Padding the prompt to reach it would cost more than the discount returns.</a:t>
+              <a:t>It does start applying once you attach a job advert, which is exactly when there is enough text for it to be worth having. Padding it out with filler to reach 1,024 would cost more than the discount returns.</a:t>
             </a:r>
             <a:endParaRPr lang="en-US" sz="1100" dirty="0"/>
           </a:p>
@@ -9052,101 +9187,14 @@
       </p:sp>
       <p:sp>
         <p:nvSpPr>
-          <p:cNvPr id="24" name="Shape 22"/>
-          <p:cNvSpPr/>
-          <p:nvPr/>
-        </p:nvSpPr>
-        <p:spPr>
-          <a:xfrm>
-            <a:off x="566928" y="4407408"/>
-            <a:ext cx="5373472" cy="914400"/>
-          </a:xfrm>
-          <a:prstGeom prst="rect">
-            <a:avLst/>
-          </a:prstGeom>
-          <a:solidFill>
-            <a:srgbClr val="F5F7FA"/>
-          </a:solidFill>
-          <a:ln w="12700">
-            <a:solidFill>
-              <a:srgbClr val="F5F7FA"/>
-            </a:solidFill>
-            <a:prstDash val="solid"/>
-          </a:ln>
-        </p:spPr>
-      </p:sp>
-      <p:sp>
-        <p:nvSpPr>
-          <p:cNvPr id="25" name="Text 23"/>
-          <p:cNvSpPr/>
-          <p:nvPr/>
-        </p:nvSpPr>
-        <p:spPr>
-          <a:xfrm>
-            <a:off x="822960" y="4517136"/>
-            <a:ext cx="4916272" cy="731520"/>
-          </a:xfrm>
-          <a:prstGeom prst="rect">
-            <a:avLst/>
-          </a:prstGeom>
-          <a:noFill/>
-          <a:ln/>
-        </p:spPr>
-        <p:txBody>
-          <a:bodyPr wrap="square" rtlCol="0" anchor="t"/>
-          <a:lstStyle/>
-          <a:p>
-            <a:pPr indent="0" marL="0">
-              <a:lnSpc>
-                <a:spcPts val="1500"/>
-              </a:lnSpc>
-              <a:buNone/>
-            </a:pPr>
-            <a:r>
-              <a:rPr lang="en-US" sz="1100" b="1" dirty="0">
-                <a:solidFill>
-                  <a:srgbClr val="14161A"/>
-                </a:solidFill>
-                <a:latin typeface="Arial" pitchFamily="34" charset="0"/>
-                <a:ea typeface="Arial" pitchFamily="34" charset="-122"/>
-                <a:cs typeface="Arial" pitchFamily="34" charset="-120"/>
-              </a:rPr>
-              <a:t>Also cut, and measured:</a:t>
-            </a:r>
-            <a:endParaRPr lang="en-US" sz="1100" dirty="0"/>
-          </a:p>
-          <a:p>
-            <a:pPr indent="0" marL="0">
-              <a:lnSpc>
-                <a:spcPts val="1500"/>
-              </a:lnSpc>
-              <a:buNone/>
-            </a:pPr>
-            <a:r>
-              <a:rPr lang="en-US" sz="1100" dirty="0">
-                <a:solidFill>
-                  <a:srgbClr val="3F4750"/>
-                </a:solidFill>
-                <a:latin typeface="Arial" pitchFamily="34" charset="0"/>
-                <a:ea typeface="Arial" pitchFamily="34" charset="-122"/>
-                <a:cs typeface="Arial" pitchFamily="34" charset="-120"/>
-              </a:rPr>
-              <a:t>trivial answers skip analysis · six countable fields moved out of the model into plain code · coach answers cached in Postgres</a:t>
-            </a:r>
-            <a:endParaRPr lang="en-US" sz="1100" dirty="0"/>
-          </a:p>
-        </p:txBody>
-      </p:sp>
-      <p:sp>
-        <p:nvSpPr>
-          <p:cNvPr id="26" name="Shape 24"/>
-          <p:cNvSpPr/>
-          <p:nvPr/>
-        </p:nvSpPr>
-        <p:spPr>
-          <a:xfrm>
-            <a:off x="6251296" y="4407408"/>
-            <a:ext cx="5373472" cy="914400"/>
+          <p:cNvPr id="22" name="Shape 20"/>
+          <p:cNvSpPr/>
+          <p:nvPr/>
+        </p:nvSpPr>
+        <p:spPr>
+          <a:xfrm>
+            <a:off x="566928" y="4974336"/>
+            <a:ext cx="11057839" cy="768096"/>
           </a:xfrm>
           <a:prstGeom prst="rect">
             <a:avLst/>
@@ -9164,14 +9212,14 @@
       </p:sp>
       <p:sp>
         <p:nvSpPr>
-          <p:cNvPr id="27" name="Shape 25"/>
-          <p:cNvSpPr/>
-          <p:nvPr/>
-        </p:nvSpPr>
-        <p:spPr>
-          <a:xfrm>
-            <a:off x="6251296" y="4407408"/>
-            <a:ext cx="50292" cy="914400"/>
+          <p:cNvPr id="23" name="Shape 21"/>
+          <p:cNvSpPr/>
+          <p:nvPr/>
+        </p:nvSpPr>
+        <p:spPr>
+          <a:xfrm>
+            <a:off x="566928" y="4974336"/>
+            <a:ext cx="50292" cy="768096"/>
           </a:xfrm>
           <a:prstGeom prst="rect">
             <a:avLst/>
@@ -9189,33 +9237,33 @@
       </p:sp>
       <p:sp>
         <p:nvSpPr>
-          <p:cNvPr id="28" name="Text 26"/>
-          <p:cNvSpPr/>
-          <p:nvPr/>
-        </p:nvSpPr>
-        <p:spPr>
-          <a:xfrm>
-            <a:off x="6507328" y="4517136"/>
-            <a:ext cx="4916272" cy="731520"/>
-          </a:xfrm>
-          <a:prstGeom prst="rect">
-            <a:avLst/>
-          </a:prstGeom>
-          <a:noFill/>
-          <a:ln/>
-        </p:spPr>
-        <p:txBody>
-          <a:bodyPr wrap="square" rtlCol="0" anchor="t"/>
-          <a:lstStyle/>
-          <a:p>
-            <a:pPr indent="0" marL="0">
-              <a:lnSpc>
-                <a:spcPts val="1600"/>
-              </a:lnSpc>
-              <a:buNone/>
-            </a:pPr>
-            <a:r>
-              <a:rPr lang="en-US" sz="1150" b="1" dirty="0">
+          <p:cNvPr id="24" name="Text 22"/>
+          <p:cNvSpPr/>
+          <p:nvPr/>
+        </p:nvSpPr>
+        <p:spPr>
+          <a:xfrm>
+            <a:off x="877824" y="4974336"/>
+            <a:ext cx="10509199" cy="768096"/>
+          </a:xfrm>
+          <a:prstGeom prst="rect">
+            <a:avLst/>
+          </a:prstGeom>
+          <a:noFill/>
+          <a:ln/>
+        </p:spPr>
+        <p:txBody>
+          <a:bodyPr wrap="square" rtlCol="0" anchor="ctr"/>
+          <a:lstStyle/>
+          <a:p>
+            <a:pPr indent="0" marL="0">
+              <a:lnSpc>
+                <a:spcPts val="1700"/>
+              </a:lnSpc>
+              <a:buNone/>
+            </a:pPr>
+            <a:r>
+              <a:rPr lang="en-US" sz="1250" b="1" dirty="0">
                 <a:solidFill>
                   <a:srgbClr val="1D4ED8"/>
                 </a:solidFill>
@@ -9223,19 +9271,16 @@
                 <a:ea typeface="Arial" pitchFamily="34" charset="-122"/>
                 <a:cs typeface="Arial" pitchFamily="34" charset="-120"/>
               </a:rPr>
-              <a:t>The claim is not “this is cheap.”</a:t>
-            </a:r>
-            <a:endParaRPr lang="en-US" sz="1150" dirty="0"/>
-          </a:p>
-          <a:p>
-            <a:pPr indent="0" marL="0">
-              <a:lnSpc>
-                <a:spcPts val="1600"/>
-              </a:lnSpc>
-              <a:buNone/>
-            </a:pPr>
-            <a:r>
-              <a:rPr lang="en-US" sz="1150" dirty="0">
+              <a:t>The claim isn't that it's cheap.  </a:t>
+            </a:r>
+            <a:pPr indent="0" marL="0">
+              <a:lnSpc>
+                <a:spcPts val="1700"/>
+              </a:lnSpc>
+              <a:buNone/>
+            </a:pPr>
+            <a:r>
+              <a:rPr lang="en-US" sz="1250" dirty="0">
                 <a:solidFill>
                   <a:srgbClr val="14161A"/>
                 </a:solidFill>
@@ -9243,15 +9288,15 @@
                 <a:ea typeface="Arial" pitchFamily="34" charset="-122"/>
                 <a:cs typeface="Arial" pitchFamily="34" charset="-120"/>
               </a:rPr>
-              <a:t>It is that every call is instrumented, priced and checkable — including the optimisation that provably does not fire.</a:t>
-            </a:r>
-            <a:endParaRPr lang="en-US" sz="1150" dirty="0"/>
-          </a:p>
-        </p:txBody>
-      </p:sp>
-      <p:sp>
-        <p:nvSpPr>
-          <p:cNvPr id="30" name="Text 27"/>
+              <a:t>It's that it's measured — including the optimisation that turned out not to work. A ten-question round costs roughly a penny, and even that is an estimate until I run the report on real traffic.</a:t>
+            </a:r>
+            <a:endParaRPr lang="en-US" sz="1250" dirty="0"/>
+          </a:p>
+        </p:txBody>
+      </p:sp>
+      <p:sp>
+        <p:nvSpPr>
+          <p:cNvPr id="26" name="Text 23"/>
           <p:cNvSpPr/>
           <p:nvPr/>
         </p:nvSpPr>
@@ -9290,7 +9335,7 @@
       </p:sp>
       <p:sp>
         <p:nvSpPr>
-          <p:cNvPr id="31" name="Text 28"/>
+          <p:cNvPr id="27" name="Text 24"/>
           <p:cNvSpPr/>
           <p:nvPr/>
         </p:nvSpPr>
@@ -9412,7 +9457,7 @@
                 <a:ea typeface="Arial" pitchFamily="34" charset="-122"/>
                 <a:cs typeface="Arial" pitchFamily="34" charset="-120"/>
               </a:rPr>
-              <a:t>WHERE IT STANDS</a:t>
+              <a:t>INSIDE THE MARKING</a:t>
             </a:r>
             <a:endParaRPr lang="en-US" sz="1100" dirty="0"/>
           </a:p>
@@ -9451,7 +9496,7 @@
                 <a:ea typeface="Arial" pitchFamily="34" charset="-122"/>
                 <a:cs typeface="Arial" pitchFamily="34" charset="-120"/>
               </a:rPr>
-              <a:t>Built, measured, and not yet — then the demo.</a:t>
+              <a:t>How an answer is marked, how the next question is chosen, what you control.</a:t>
             </a:r>
             <a:endParaRPr lang="en-US" sz="3000" dirty="0"/>
           </a:p>
@@ -9466,17 +9511,17 @@
         <p:spPr>
           <a:xfrm>
             <a:off x="566928" y="1591056"/>
-            <a:ext cx="3478682" cy="2377440"/>
+            <a:ext cx="3478682" cy="2615184"/>
           </a:xfrm>
           <a:prstGeom prst="rect">
             <a:avLst/>
           </a:prstGeom>
           <a:solidFill>
-            <a:srgbClr val="EAF5EE"/>
+            <a:srgbClr val="F5F7FA"/>
           </a:solidFill>
           <a:ln w="12700">
             <a:solidFill>
-              <a:srgbClr val="EAF5EE"/>
+              <a:srgbClr val="F5F7FA"/>
             </a:solidFill>
             <a:prstDash val="solid"/>
           </a:ln>
@@ -9491,7 +9536,472 @@
         <p:spPr>
           <a:xfrm>
             <a:off x="566928" y="1591056"/>
-            <a:ext cx="50292" cy="2377440"/>
+            <a:ext cx="50292" cy="2615184"/>
+          </a:xfrm>
+          <a:prstGeom prst="rect">
+            <a:avLst/>
+          </a:prstGeom>
+          <a:solidFill>
+            <a:srgbClr val="1D4ED8"/>
+          </a:solidFill>
+          <a:ln w="12700">
+            <a:solidFill>
+              <a:srgbClr val="333333"/>
+            </a:solidFill>
+            <a:prstDash val="solid"/>
+          </a:ln>
+        </p:spPr>
+      </p:sp>
+      <p:sp>
+        <p:nvSpPr>
+          <p:cNvPr id="7" name="Text 5"/>
+          <p:cNvSpPr/>
+          <p:nvPr/>
+        </p:nvSpPr>
+        <p:spPr>
+          <a:xfrm>
+            <a:off x="822960" y="1700784"/>
+            <a:ext cx="3058058" cy="274320"/>
+          </a:xfrm>
+          <a:prstGeom prst="rect">
+            <a:avLst/>
+          </a:prstGeom>
+          <a:noFill/>
+          <a:ln/>
+        </p:spPr>
+        <p:txBody>
+          <a:bodyPr wrap="square" rtlCol="0" anchor="ctr"/>
+          <a:lstStyle/>
+          <a:p>
+            <a:pPr indent="0" marL="0">
+              <a:buNone/>
+            </a:pPr>
+            <a:r>
+              <a:rPr lang="en-US" sz="1250" b="1" dirty="0">
+                <a:solidFill>
+                  <a:srgbClr val="1D4ED8"/>
+                </a:solidFill>
+                <a:latin typeface="Arial" pitchFamily="34" charset="0"/>
+                <a:ea typeface="Arial" pitchFamily="34" charset="-122"/>
+                <a:cs typeface="Arial" pitchFamily="34" charset="-120"/>
+              </a:rPr>
+              <a:t>How it marks your answer</a:t>
+            </a:r>
+            <a:endParaRPr lang="en-US" sz="1250" dirty="0"/>
+          </a:p>
+        </p:txBody>
+      </p:sp>
+      <p:sp>
+        <p:nvSpPr>
+          <p:cNvPr id="8" name="Text 6"/>
+          <p:cNvSpPr/>
+          <p:nvPr/>
+        </p:nvSpPr>
+        <p:spPr>
+          <a:xfrm>
+            <a:off x="822960" y="2029968"/>
+            <a:ext cx="3058058" cy="2084832"/>
+          </a:xfrm>
+          <a:prstGeom prst="rect">
+            <a:avLst/>
+          </a:prstGeom>
+          <a:noFill/>
+          <a:ln/>
+        </p:spPr>
+        <p:txBody>
+          <a:bodyPr wrap="square" rtlCol="0" anchor="t"/>
+          <a:lstStyle/>
+          <a:p>
+            <a:pPr indent="0" marL="0">
+              <a:lnSpc>
+                <a:spcPts val="1450"/>
+              </a:lnSpc>
+              <a:buNone/>
+            </a:pPr>
+            <a:r>
+              <a:rPr lang="en-US" sz="1050" dirty="0">
+                <a:solidFill>
+                  <a:srgbClr val="3F4750"/>
+                </a:solidFill>
+                <a:latin typeface="Arial" pitchFamily="34" charset="0"/>
+                <a:ea typeface="Arial" pitchFamily="34" charset="-122"/>
+                <a:cs typeface="Arial" pitchFamily="34" charset="-120"/>
+              </a:rPr>
+              <a:t>A different checklist for each kind of round</a:t>
+            </a:r>
+            <a:endParaRPr lang="en-US" sz="1050" dirty="0"/>
+          </a:p>
+          <a:p>
+            <a:pPr indent="0" marL="0">
+              <a:lnSpc>
+                <a:spcPts val="1450"/>
+              </a:lnSpc>
+              <a:buNone/>
+            </a:pPr>
+            <a:endParaRPr lang="en-US" sz="1050" dirty="0"/>
+          </a:p>
+          <a:p>
+            <a:pPr indent="0" marL="0">
+              <a:lnSpc>
+                <a:spcPts val="1450"/>
+              </a:lnSpc>
+              <a:buNone/>
+            </a:pPr>
+            <a:r>
+              <a:rPr lang="en-US" sz="1050" dirty="0">
+                <a:solidFill>
+                  <a:srgbClr val="3F4750"/>
+                </a:solidFill>
+                <a:latin typeface="Arial" pitchFamily="34" charset="0"/>
+                <a:ea typeface="Arial" pitchFamily="34" charset="-122"/>
+                <a:cs typeface="Arial" pitchFamily="34" charset="-120"/>
+              </a:rPr>
+              <a:t>“Tell me about a time…” — did you set the scene, say what you did, say how it turned out?</a:t>
+            </a:r>
+            <a:endParaRPr lang="en-US" sz="1050" dirty="0"/>
+          </a:p>
+          <a:p>
+            <a:pPr indent="0" marL="0">
+              <a:lnSpc>
+                <a:spcPts val="1450"/>
+              </a:lnSpc>
+              <a:buNone/>
+            </a:pPr>
+            <a:endParaRPr lang="en-US" sz="1050" dirty="0"/>
+          </a:p>
+          <a:p>
+            <a:pPr indent="0" marL="0">
+              <a:lnSpc>
+                <a:spcPts val="1450"/>
+              </a:lnSpc>
+              <a:buNone/>
+            </a:pPr>
+            <a:r>
+              <a:rPr lang="en-US" sz="1050" dirty="0">
+                <a:solidFill>
+                  <a:srgbClr val="3F4750"/>
+                </a:solidFill>
+                <a:latin typeface="Arial" pitchFamily="34" charset="0"/>
+                <a:ea typeface="Arial" pitchFamily="34" charset="-122"/>
+                <a:cs typeface="Arial" pitchFamily="34" charset="-120"/>
+              </a:rPr>
+              <a:t>Coding — is it correct, is it efficient, does it handle the awkward cases?</a:t>
+            </a:r>
+            <a:endParaRPr lang="en-US" sz="1050" dirty="0"/>
+          </a:p>
+          <a:p>
+            <a:pPr indent="0" marL="0">
+              <a:lnSpc>
+                <a:spcPts val="1450"/>
+              </a:lnSpc>
+              <a:buNone/>
+            </a:pPr>
+            <a:endParaRPr lang="en-US" sz="1050" dirty="0"/>
+          </a:p>
+          <a:p>
+            <a:pPr indent="0" marL="0">
+              <a:lnSpc>
+                <a:spcPts val="1450"/>
+              </a:lnSpc>
+              <a:buNone/>
+            </a:pPr>
+            <a:r>
+              <a:rPr lang="en-US" sz="1050" dirty="0">
+                <a:solidFill>
+                  <a:srgbClr val="3F4750"/>
+                </a:solidFill>
+                <a:latin typeface="Arial" pitchFamily="34" charset="0"/>
+                <a:ea typeface="Arial" pitchFamily="34" charset="-122"/>
+                <a:cs typeface="Arial" pitchFamily="34" charset="-120"/>
+              </a:rPr>
+              <a:t>It never knows who asked. A tough and a friendly interviewer mark the same answer identically</a:t>
+            </a:r>
+            <a:endParaRPr lang="en-US" sz="1050" dirty="0"/>
+          </a:p>
+        </p:txBody>
+      </p:sp>
+      <p:sp>
+        <p:nvSpPr>
+          <p:cNvPr id="9" name="Shape 7"/>
+          <p:cNvSpPr/>
+          <p:nvPr/>
+        </p:nvSpPr>
+        <p:spPr>
+          <a:xfrm>
+            <a:off x="4356506" y="1591056"/>
+            <a:ext cx="3478682" cy="2615184"/>
+          </a:xfrm>
+          <a:prstGeom prst="rect">
+            <a:avLst/>
+          </a:prstGeom>
+          <a:solidFill>
+            <a:srgbClr val="F5F7FA"/>
+          </a:solidFill>
+          <a:ln w="12700">
+            <a:solidFill>
+              <a:srgbClr val="F5F7FA"/>
+            </a:solidFill>
+            <a:prstDash val="solid"/>
+          </a:ln>
+        </p:spPr>
+      </p:sp>
+      <p:sp>
+        <p:nvSpPr>
+          <p:cNvPr id="10" name="Shape 8"/>
+          <p:cNvSpPr/>
+          <p:nvPr/>
+        </p:nvSpPr>
+        <p:spPr>
+          <a:xfrm>
+            <a:off x="4356506" y="1591056"/>
+            <a:ext cx="50292" cy="2615184"/>
+          </a:xfrm>
+          <a:prstGeom prst="rect">
+            <a:avLst/>
+          </a:prstGeom>
+          <a:solidFill>
+            <a:srgbClr val="1D4ED8"/>
+          </a:solidFill>
+          <a:ln w="12700">
+            <a:solidFill>
+              <a:srgbClr val="333333"/>
+            </a:solidFill>
+            <a:prstDash val="solid"/>
+          </a:ln>
+        </p:spPr>
+      </p:sp>
+      <p:sp>
+        <p:nvSpPr>
+          <p:cNvPr id="11" name="Text 9"/>
+          <p:cNvSpPr/>
+          <p:nvPr/>
+        </p:nvSpPr>
+        <p:spPr>
+          <a:xfrm>
+            <a:off x="4612538" y="1700784"/>
+            <a:ext cx="3058058" cy="274320"/>
+          </a:xfrm>
+          <a:prstGeom prst="rect">
+            <a:avLst/>
+          </a:prstGeom>
+          <a:noFill/>
+          <a:ln/>
+        </p:spPr>
+        <p:txBody>
+          <a:bodyPr wrap="square" rtlCol="0" anchor="ctr"/>
+          <a:lstStyle/>
+          <a:p>
+            <a:pPr indent="0" marL="0">
+              <a:buNone/>
+            </a:pPr>
+            <a:r>
+              <a:rPr lang="en-US" sz="1250" b="1" dirty="0">
+                <a:solidFill>
+                  <a:srgbClr val="1D4ED8"/>
+                </a:solidFill>
+                <a:latin typeface="Arial" pitchFamily="34" charset="0"/>
+                <a:ea typeface="Arial" pitchFamily="34" charset="-122"/>
+                <a:cs typeface="Arial" pitchFamily="34" charset="-120"/>
+              </a:rPr>
+              <a:t>How it chooses the next question</a:t>
+            </a:r>
+            <a:endParaRPr lang="en-US" sz="1250" dirty="0"/>
+          </a:p>
+        </p:txBody>
+      </p:sp>
+      <p:sp>
+        <p:nvSpPr>
+          <p:cNvPr id="12" name="Text 10"/>
+          <p:cNvSpPr/>
+          <p:nvPr/>
+        </p:nvSpPr>
+        <p:spPr>
+          <a:xfrm>
+            <a:off x="4612538" y="2029968"/>
+            <a:ext cx="3058058" cy="2084832"/>
+          </a:xfrm>
+          <a:prstGeom prst="rect">
+            <a:avLst/>
+          </a:prstGeom>
+          <a:noFill/>
+          <a:ln/>
+        </p:spPr>
+        <p:txBody>
+          <a:bodyPr wrap="square" rtlCol="0" anchor="t"/>
+          <a:lstStyle/>
+          <a:p>
+            <a:pPr indent="0" marL="0">
+              <a:lnSpc>
+                <a:spcPts val="1450"/>
+              </a:lnSpc>
+              <a:buNone/>
+            </a:pPr>
+            <a:r>
+              <a:rPr lang="en-US" sz="1050" dirty="0">
+                <a:solidFill>
+                  <a:srgbClr val="3F4750"/>
+                </a:solidFill>
+                <a:latin typeface="Arial" pitchFamily="34" charset="0"/>
+                <a:ea typeface="Arial" pitchFamily="34" charset="-122"/>
+                <a:cs typeface="Arial" pitchFamily="34" charset="-120"/>
+              </a:rPr>
+              <a:t>No scene set  →  asks you to start again with the context</a:t>
+            </a:r>
+            <a:endParaRPr lang="en-US" sz="1050" dirty="0"/>
+          </a:p>
+          <a:p>
+            <a:pPr indent="0" marL="0">
+              <a:lnSpc>
+                <a:spcPts val="1450"/>
+              </a:lnSpc>
+              <a:buNone/>
+            </a:pPr>
+            <a:endParaRPr lang="en-US" sz="1050" dirty="0"/>
+          </a:p>
+          <a:p>
+            <a:pPr indent="0" marL="0">
+              <a:lnSpc>
+                <a:spcPts val="1450"/>
+              </a:lnSpc>
+              <a:buNone/>
+            </a:pPr>
+            <a:r>
+              <a:rPr lang="en-US" sz="1050" dirty="0">
+                <a:solidFill>
+                  <a:srgbClr val="3F4750"/>
+                </a:solidFill>
+                <a:latin typeface="Arial" pitchFamily="34" charset="0"/>
+                <a:ea typeface="Arial" pitchFamily="34" charset="-122"/>
+                <a:cs typeface="Arial" pitchFamily="34" charset="-120"/>
+              </a:rPr>
+              <a:t>Vague  →  presses for specifics</a:t>
+            </a:r>
+            <a:endParaRPr lang="en-US" sz="1050" dirty="0"/>
+          </a:p>
+          <a:p>
+            <a:pPr indent="0" marL="0">
+              <a:lnSpc>
+                <a:spcPts val="1450"/>
+              </a:lnSpc>
+              <a:buNone/>
+            </a:pPr>
+            <a:endParaRPr lang="en-US" sz="1050" dirty="0"/>
+          </a:p>
+          <a:p>
+            <a:pPr indent="0" marL="0">
+              <a:lnSpc>
+                <a:spcPts val="1450"/>
+              </a:lnSpc>
+              <a:buNone/>
+            </a:pPr>
+            <a:r>
+              <a:rPr lang="en-US" sz="1050" dirty="0">
+                <a:solidFill>
+                  <a:srgbClr val="3F4750"/>
+                </a:solidFill>
+                <a:latin typeface="Arial" pitchFamily="34" charset="0"/>
+                <a:ea typeface="Arial" pitchFamily="34" charset="-122"/>
+                <a:cs typeface="Arial" pitchFamily="34" charset="-120"/>
+              </a:rPr>
+              <a:t>You said “we”  →  asks what you did</a:t>
+            </a:r>
+            <a:endParaRPr lang="en-US" sz="1050" dirty="0"/>
+          </a:p>
+          <a:p>
+            <a:pPr indent="0" marL="0">
+              <a:lnSpc>
+                <a:spcPts val="1450"/>
+              </a:lnSpc>
+              <a:buNone/>
+            </a:pPr>
+            <a:endParaRPr lang="en-US" sz="1050" dirty="0"/>
+          </a:p>
+          <a:p>
+            <a:pPr indent="0" marL="0">
+              <a:lnSpc>
+                <a:spcPts val="1450"/>
+              </a:lnSpc>
+              <a:buNone/>
+            </a:pPr>
+            <a:r>
+              <a:rPr lang="en-US" sz="1050" dirty="0">
+                <a:solidFill>
+                  <a:srgbClr val="3F4750"/>
+                </a:solidFill>
+                <a:latin typeface="Arial" pitchFamily="34" charset="0"/>
+                <a:ea typeface="Arial" pitchFamily="34" charset="-122"/>
+                <a:cs typeface="Arial" pitchFamily="34" charset="-120"/>
+              </a:rPr>
+              <a:t>Same tactic twice  →  gets harder</a:t>
+            </a:r>
+            <a:endParaRPr lang="en-US" sz="1050" dirty="0"/>
+          </a:p>
+          <a:p>
+            <a:pPr indent="0" marL="0">
+              <a:lnSpc>
+                <a:spcPts val="1450"/>
+              </a:lnSpc>
+              <a:buNone/>
+            </a:pPr>
+            <a:endParaRPr lang="en-US" sz="1050" dirty="0"/>
+          </a:p>
+          <a:p>
+            <a:pPr indent="0" marL="0">
+              <a:lnSpc>
+                <a:spcPts val="1450"/>
+              </a:lnSpc>
+              <a:buNone/>
+            </a:pPr>
+            <a:r>
+              <a:rPr lang="en-US" sz="1050" dirty="0">
+                <a:solidFill>
+                  <a:srgbClr val="3F4750"/>
+                </a:solidFill>
+                <a:latin typeface="Arial" pitchFamily="34" charset="0"/>
+                <a:ea typeface="Arial" pitchFamily="34" charset="-122"/>
+                <a:cs typeface="Arial" pitchFamily="34" charset="-120"/>
+              </a:rPr>
+              <a:t>It is told what it has already asked, so it doesn't repeat itself</a:t>
+            </a:r>
+            <a:endParaRPr lang="en-US" sz="1050" dirty="0"/>
+          </a:p>
+        </p:txBody>
+      </p:sp>
+      <p:sp>
+        <p:nvSpPr>
+          <p:cNvPr id="13" name="Shape 11"/>
+          <p:cNvSpPr/>
+          <p:nvPr/>
+        </p:nvSpPr>
+        <p:spPr>
+          <a:xfrm>
+            <a:off x="8146085" y="1591056"/>
+            <a:ext cx="3478682" cy="2615184"/>
+          </a:xfrm>
+          <a:prstGeom prst="rect">
+            <a:avLst/>
+          </a:prstGeom>
+          <a:solidFill>
+            <a:srgbClr val="F5F7FA"/>
+          </a:solidFill>
+          <a:ln w="12700">
+            <a:solidFill>
+              <a:srgbClr val="F5F7FA"/>
+            </a:solidFill>
+            <a:prstDash val="solid"/>
+          </a:ln>
+        </p:spPr>
+      </p:sp>
+      <p:sp>
+        <p:nvSpPr>
+          <p:cNvPr id="14" name="Shape 12"/>
+          <p:cNvSpPr/>
+          <p:nvPr/>
+        </p:nvSpPr>
+        <p:spPr>
+          <a:xfrm>
+            <a:off x="8146085" y="1591056"/>
+            <a:ext cx="50292" cy="2615184"/>
           </a:xfrm>
           <a:prstGeom prst="rect">
             <a:avLst/>
@@ -9509,13 +10019,13 @@
       </p:sp>
       <p:sp>
         <p:nvSpPr>
-          <p:cNvPr id="7" name="Text 5"/>
-          <p:cNvSpPr/>
-          <p:nvPr/>
-        </p:nvSpPr>
-        <p:spPr>
-          <a:xfrm>
-            <a:off x="822960" y="1700784"/>
+          <p:cNvPr id="15" name="Text 13"/>
+          <p:cNvSpPr/>
+          <p:nvPr/>
+        </p:nvSpPr>
+        <p:spPr>
+          <a:xfrm>
+            <a:off x="8402117" y="1700784"/>
             <a:ext cx="3058058" cy="274320"/>
           </a:xfrm>
           <a:prstGeom prst="rect">
@@ -9532,7 +10042,7 @@
               <a:buNone/>
             </a:pPr>
             <a:r>
-              <a:rPr lang="en-US" sz="1300" b="1" dirty="0">
+              <a:rPr lang="en-US" sz="1250" b="1" dirty="0">
                 <a:solidFill>
                   <a:srgbClr val="15803D"/>
                 </a:solidFill>
@@ -9540,22 +10050,22 @@
                 <a:ea typeface="Arial" pitchFamily="34" charset="-122"/>
                 <a:cs typeface="Arial" pitchFamily="34" charset="-120"/>
               </a:rPr>
-              <a:t>✔  Built and verified</a:t>
-            </a:r>
-            <a:endParaRPr lang="en-US" sz="1300" dirty="0"/>
-          </a:p>
-        </p:txBody>
-      </p:sp>
-      <p:sp>
-        <p:nvSpPr>
-          <p:cNvPr id="8" name="Text 6"/>
-          <p:cNvSpPr/>
-          <p:nvPr/>
-        </p:nvSpPr>
-        <p:spPr>
-          <a:xfrm>
-            <a:off x="822960" y="2029968"/>
-            <a:ext cx="3058058" cy="1463040"/>
+              <a:t>What you can change</a:t>
+            </a:r>
+            <a:endParaRPr lang="en-US" sz="1250" dirty="0"/>
+          </a:p>
+        </p:txBody>
+      </p:sp>
+      <p:sp>
+        <p:nvSpPr>
+          <p:cNvPr id="16" name="Text 14"/>
+          <p:cNvSpPr/>
+          <p:nvPr/>
+        </p:nvSpPr>
+        <p:spPr>
+          <a:xfrm>
+            <a:off x="8402117" y="2029968"/>
+            <a:ext cx="3058058" cy="2084832"/>
           </a:xfrm>
           <a:prstGeom prst="rect">
             <a:avLst/>
@@ -9582,7 +10092,7 @@
                 <a:ea typeface="Arial" pitchFamily="34" charset="-122"/>
                 <a:cs typeface="Arial" pitchFamily="34" charset="-120"/>
               </a:rPr>
-              <a:t>299 tests across 31 files, all passing</a:t>
+              <a:t>The rounds — kind, length, focus, how many</a:t>
             </a:r>
             <a:endParaRPr lang="en-US" sz="1050" dirty="0"/>
           </a:p>
@@ -9611,7 +10121,7 @@
                 <a:ea typeface="Arial" pitchFamily="34" charset="-122"/>
                 <a:cs typeface="Arial" pitchFamily="34" charset="-120"/>
               </a:rPr>
-              <a:t>CI: typecheck + lint + test on every push</a:t>
+              <a:t>The interviewer — background, and how strict, warm, fast and challenging</a:t>
             </a:r>
             <a:endParaRPr lang="en-US" sz="1050" dirty="0"/>
           </a:p>
@@ -9640,7 +10150,7 @@
                 <a:ea typeface="Arial" pitchFamily="34" charset="-122"/>
                 <a:cs typeface="Arial" pitchFamily="34" charset="-120"/>
               </a:rPr>
-              <a:t>10 migrations; RLS on every table</a:t>
+              <a:t>Type or speak, and which voice</a:t>
             </a:r>
             <a:endParaRPr lang="en-US" sz="1050" dirty="0"/>
           </a:p>
@@ -9669,93 +10179,131 @@
                 <a:ea typeface="Arial" pitchFamily="34" charset="-122"/>
                 <a:cs typeface="Arial" pitchFamily="34" charset="-120"/>
               </a:rPr>
-              <a:t>Six round types, text and voice</a:t>
+              <a:t>Your own job advert and resume</a:t>
             </a:r>
             <a:endParaRPr lang="en-US" sz="1050" dirty="0"/>
           </a:p>
-          <a:p>
-            <a:pPr indent="0" marL="0">
-              <a:lnSpc>
-                <a:spcPts val="1450"/>
-              </a:lnSpc>
-              <a:buNone/>
-            </a:pPr>
-            <a:endParaRPr lang="en-US" sz="1050" dirty="0"/>
-          </a:p>
-          <a:p>
-            <a:pPr indent="0" marL="0">
-              <a:lnSpc>
-                <a:spcPts val="1450"/>
-              </a:lnSpc>
-              <a:buNone/>
-            </a:pPr>
-            <a:r>
-              <a:rPr lang="en-US" sz="1050" dirty="0">
-                <a:solidFill>
-                  <a:srgbClr val="3F4750"/>
-                </a:solidFill>
-                <a:latin typeface="Arial" pitchFamily="34" charset="0"/>
-                <a:ea typeface="Arial" pitchFamily="34" charset="-122"/>
-                <a:cs typeface="Arial" pitchFamily="34" charset="-120"/>
-              </a:rPr>
-              <a:t>JD + CV grounding via pgvector, inside Postgres</a:t>
-            </a:r>
-            <a:endParaRPr lang="en-US" sz="1050" dirty="0"/>
-          </a:p>
-        </p:txBody>
-      </p:sp>
-      <p:sp>
-        <p:nvSpPr>
-          <p:cNvPr id="9" name="Text 7"/>
-          <p:cNvSpPr/>
-          <p:nvPr/>
-        </p:nvSpPr>
-        <p:spPr>
-          <a:xfrm>
-            <a:off x="822960" y="3529584"/>
-            <a:ext cx="3058058" cy="384048"/>
-          </a:xfrm>
-          <a:prstGeom prst="rect">
-            <a:avLst/>
-          </a:prstGeom>
-          <a:noFill/>
-          <a:ln/>
-        </p:spPr>
-        <p:txBody>
-          <a:bodyPr wrap="square" rtlCol="0" anchor="t"/>
-          <a:lstStyle/>
-          <a:p>
-            <a:pPr indent="0" marL="0">
-              <a:lnSpc>
-                <a:spcPts val="1300"/>
-              </a:lnSpc>
-              <a:buNone/>
-            </a:pPr>
-            <a:r>
-              <a:rPr lang="en-US" sz="950" i="1" dirty="0">
-                <a:solidFill>
-                  <a:srgbClr val="15803D"/>
-                </a:solidFill>
-                <a:latin typeface="Arial" pitchFamily="34" charset="0"/>
-                <a:ea typeface="Arial" pitchFamily="34" charset="-122"/>
-                <a:cs typeface="Arial" pitchFamily="34" charset="-120"/>
-              </a:rPr>
-              <a:t>“Verified” means a command you can run, or a test that fails when the claim stops being true.</a:t>
-            </a:r>
-            <a:endParaRPr lang="en-US" sz="950" dirty="0"/>
-          </a:p>
-        </p:txBody>
-      </p:sp>
-      <p:sp>
-        <p:nvSpPr>
-          <p:cNvPr id="10" name="Shape 8"/>
-          <p:cNvSpPr/>
-          <p:nvPr/>
-        </p:nvSpPr>
-        <p:spPr>
-          <a:xfrm>
-            <a:off x="4356506" y="1591056"/>
-            <a:ext cx="3478682" cy="2377440"/>
+        </p:txBody>
+      </p:sp>
+      <p:sp>
+        <p:nvSpPr>
+          <p:cNvPr id="17" name="Shape 15"/>
+          <p:cNvSpPr/>
+          <p:nvPr/>
+        </p:nvSpPr>
+        <p:spPr>
+          <a:xfrm>
+            <a:off x="566928" y="4315968"/>
+            <a:ext cx="11057839" cy="768096"/>
+          </a:xfrm>
+          <a:prstGeom prst="rect">
+            <a:avLst/>
+          </a:prstGeom>
+          <a:solidFill>
+            <a:srgbClr val="EAF0FE"/>
+          </a:solidFill>
+          <a:ln w="12700">
+            <a:solidFill>
+              <a:srgbClr val="EAF0FE"/>
+            </a:solidFill>
+            <a:prstDash val="solid"/>
+          </a:ln>
+        </p:spPr>
+      </p:sp>
+      <p:sp>
+        <p:nvSpPr>
+          <p:cNvPr id="18" name="Shape 16"/>
+          <p:cNvSpPr/>
+          <p:nvPr/>
+        </p:nvSpPr>
+        <p:spPr>
+          <a:xfrm>
+            <a:off x="566928" y="4315968"/>
+            <a:ext cx="50292" cy="768096"/>
+          </a:xfrm>
+          <a:prstGeom prst="rect">
+            <a:avLst/>
+          </a:prstGeom>
+          <a:solidFill>
+            <a:srgbClr val="1D4ED8"/>
+          </a:solidFill>
+          <a:ln w="12700">
+            <a:solidFill>
+              <a:srgbClr val="333333"/>
+            </a:solidFill>
+            <a:prstDash val="solid"/>
+          </a:ln>
+        </p:spPr>
+      </p:sp>
+      <p:sp>
+        <p:nvSpPr>
+          <p:cNvPr id="19" name="Text 17"/>
+          <p:cNvSpPr/>
+          <p:nvPr/>
+        </p:nvSpPr>
+        <p:spPr>
+          <a:xfrm>
+            <a:off x="877824" y="4315968"/>
+            <a:ext cx="10509199" cy="768096"/>
+          </a:xfrm>
+          <a:prstGeom prst="rect">
+            <a:avLst/>
+          </a:prstGeom>
+          <a:noFill/>
+          <a:ln/>
+        </p:spPr>
+        <p:txBody>
+          <a:bodyPr wrap="square" rtlCol="0" anchor="ctr"/>
+          <a:lstStyle/>
+          <a:p>
+            <a:pPr indent="0" marL="0">
+              <a:lnSpc>
+                <a:spcPts val="1700"/>
+              </a:lnSpc>
+              <a:buNone/>
+            </a:pPr>
+            <a:r>
+              <a:rPr lang="en-US" sz="1250" b="1" dirty="0">
+                <a:solidFill>
+                  <a:srgbClr val="1D4ED8"/>
+                </a:solidFill>
+                <a:latin typeface="Arial" pitchFamily="34" charset="0"/>
+                <a:ea typeface="Arial" pitchFamily="34" charset="-122"/>
+                <a:cs typeface="Arial" pitchFamily="34" charset="-120"/>
+              </a:rPr>
+              <a:t>The settings really do change the interview.  </a:t>
+            </a:r>
+            <a:pPr indent="0" marL="0">
+              <a:lnSpc>
+                <a:spcPts val="1700"/>
+              </a:lnSpc>
+              <a:buNone/>
+            </a:pPr>
+            <a:r>
+              <a:rPr lang="en-US" sz="1250" dirty="0">
+                <a:solidFill>
+                  <a:srgbClr val="14161A"/>
+                </a:solidFill>
+                <a:latin typeface="Arial" pitchFamily="34" charset="0"/>
+                <a:ea typeface="Arial" pitchFamily="34" charset="-122"/>
+                <a:cs typeface="Arial" pitchFamily="34" charset="-120"/>
+              </a:rPr>
+              <a:t>Same question, same answer — change only the interviewer. A strict one aims at 7 out of 10 for the next question; a warm one aims at 5. That is a formula, not the AI's mood: you can work it out on paper and get the same two numbers every run.</a:t>
+            </a:r>
+            <a:endParaRPr lang="en-US" sz="1250" dirty="0"/>
+          </a:p>
+        </p:txBody>
+      </p:sp>
+      <p:sp>
+        <p:nvSpPr>
+          <p:cNvPr id="20" name="Shape 18"/>
+          <p:cNvSpPr/>
+          <p:nvPr/>
+        </p:nvSpPr>
+        <p:spPr>
+          <a:xfrm>
+            <a:off x="566928" y="5193792"/>
+            <a:ext cx="11057839" cy="621792"/>
           </a:xfrm>
           <a:prstGeom prst="rect">
             <a:avLst/>
@@ -9773,14 +10321,14 @@
       </p:sp>
       <p:sp>
         <p:nvSpPr>
-          <p:cNvPr id="11" name="Shape 9"/>
-          <p:cNvSpPr/>
-          <p:nvPr/>
-        </p:nvSpPr>
-        <p:spPr>
-          <a:xfrm>
-            <a:off x="4356506" y="1591056"/>
-            <a:ext cx="50292" cy="2377440"/>
+          <p:cNvPr id="21" name="Shape 19"/>
+          <p:cNvSpPr/>
+          <p:nvPr/>
+        </p:nvSpPr>
+        <p:spPr>
+          <a:xfrm>
+            <a:off x="566928" y="5193792"/>
+            <a:ext cx="50292" cy="621792"/>
           </a:xfrm>
           <a:prstGeom prst="rect">
             <a:avLst/>
@@ -9798,14 +10346,14 @@
       </p:sp>
       <p:sp>
         <p:nvSpPr>
-          <p:cNvPr id="12" name="Text 10"/>
-          <p:cNvSpPr/>
-          <p:nvPr/>
-        </p:nvSpPr>
-        <p:spPr>
-          <a:xfrm>
-            <a:off x="4612538" y="1700784"/>
-            <a:ext cx="3058058" cy="274320"/>
+          <p:cNvPr id="22" name="Text 20"/>
+          <p:cNvSpPr/>
+          <p:nvPr/>
+        </p:nvSpPr>
+        <p:spPr>
+          <a:xfrm>
+            <a:off x="877824" y="5193792"/>
+            <a:ext cx="10509199" cy="621792"/>
           </a:xfrm>
           <a:prstGeom prst="rect">
             <a:avLst/>
@@ -9818,10 +10366,13 @@
           <a:lstStyle/>
           <a:p>
             <a:pPr indent="0" marL="0">
-              <a:buNone/>
-            </a:pPr>
-            <a:r>
-              <a:rPr lang="en-US" sz="1300" b="1" dirty="0">
+              <a:lnSpc>
+                <a:spcPts val="1600"/>
+              </a:lnSpc>
+              <a:buNone/>
+            </a:pPr>
+            <a:r>
+              <a:rPr lang="en-US" sz="1200" b="1" dirty="0">
                 <a:solidFill>
                   <a:srgbClr val="9A5B08"/>
                 </a:solidFill>
@@ -9829,504 +10380,16 @@
                 <a:ea typeface="Arial" pitchFamily="34" charset="-122"/>
                 <a:cs typeface="Arial" pitchFamily="34" charset="-120"/>
               </a:rPr>
-              <a:t>◑  Built, not yet measured</a:t>
-            </a:r>
-            <a:endParaRPr lang="en-US" sz="1300" dirty="0"/>
-          </a:p>
-        </p:txBody>
-      </p:sp>
-      <p:sp>
-        <p:nvSpPr>
-          <p:cNvPr id="13" name="Text 11"/>
-          <p:cNvSpPr/>
-          <p:nvPr/>
-        </p:nvSpPr>
-        <p:spPr>
-          <a:xfrm>
-            <a:off x="4612538" y="2029968"/>
-            <a:ext cx="3058058" cy="1463040"/>
-          </a:xfrm>
-          <a:prstGeom prst="rect">
-            <a:avLst/>
-          </a:prstGeom>
-          <a:noFill/>
-          <a:ln/>
-        </p:spPr>
-        <p:txBody>
-          <a:bodyPr wrap="square" rtlCol="0" anchor="t"/>
-          <a:lstStyle/>
-          <a:p>
-            <a:pPr indent="0" marL="0">
-              <a:lnSpc>
-                <a:spcPts val="1450"/>
-              </a:lnSpc>
-              <a:buNone/>
-            </a:pPr>
-            <a:r>
-              <a:rPr lang="en-US" sz="1050" dirty="0">
-                <a:solidFill>
-                  <a:srgbClr val="3F4750"/>
-                </a:solidFill>
-                <a:latin typeface="Arial" pitchFamily="34" charset="0"/>
-                <a:ea typeface="Arial" pitchFamily="34" charset="-122"/>
-                <a:cs typeface="Arial" pitchFamily="34" charset="-120"/>
-              </a:rPr>
-              <a:t>Scoring-accuracy eval — harness and 18 fixtures written, results not yet collected</a:t>
-            </a:r>
-            <a:endParaRPr lang="en-US" sz="1050" dirty="0"/>
-          </a:p>
-          <a:p>
-            <a:pPr indent="0" marL="0">
-              <a:lnSpc>
-                <a:spcPts val="1450"/>
-              </a:lnSpc>
-              <a:buNone/>
-            </a:pPr>
-            <a:endParaRPr lang="en-US" sz="1050" dirty="0"/>
-          </a:p>
-          <a:p>
-            <a:pPr indent="0" marL="0">
-              <a:lnSpc>
-                <a:spcPts val="1450"/>
-              </a:lnSpc>
-              <a:buNone/>
-            </a:pPr>
-            <a:r>
-              <a:rPr lang="en-US" sz="1050" dirty="0">
-                <a:solidFill>
-                  <a:srgbClr val="3F4750"/>
-                </a:solidFill>
-                <a:latin typeface="Arial" pitchFamily="34" charset="0"/>
-                <a:ea typeface="Arial" pitchFamily="34" charset="-122"/>
-                <a:cs typeface="Arial" pitchFamily="34" charset="-120"/>
-              </a:rPr>
-              <a:t>UAT — plan, handout and exit criteria written, no participants run yet</a:t>
-            </a:r>
-            <a:endParaRPr lang="en-US" sz="1050" dirty="0"/>
-          </a:p>
-          <a:p>
-            <a:pPr indent="0" marL="0">
-              <a:lnSpc>
-                <a:spcPts val="1450"/>
-              </a:lnSpc>
-              <a:buNone/>
-            </a:pPr>
-            <a:endParaRPr lang="en-US" sz="1050" dirty="0"/>
-          </a:p>
-          <a:p>
-            <a:pPr indent="0" marL="0">
-              <a:lnSpc>
-                <a:spcPts val="1450"/>
-              </a:lnSpc>
-              <a:buNone/>
-            </a:pPr>
-            <a:r>
-              <a:rPr lang="en-US" sz="1050" dirty="0">
-                <a:solidFill>
-                  <a:srgbClr val="3F4750"/>
-                </a:solidFill>
-                <a:latin typeface="Arial" pitchFamily="34" charset="0"/>
-                <a:ea typeface="Arial" pitchFamily="34" charset="-122"/>
-                <a:cs typeface="Arial" pitchFamily="34" charset="-120"/>
-              </a:rPr>
-              <a:t>The blind-judge arm of the persona eval has not been run live</a:t>
-            </a:r>
-            <a:endParaRPr lang="en-US" sz="1050" dirty="0"/>
-          </a:p>
-        </p:txBody>
-      </p:sp>
-      <p:sp>
-        <p:nvSpPr>
-          <p:cNvPr id="14" name="Text 12"/>
-          <p:cNvSpPr/>
-          <p:nvPr/>
-        </p:nvSpPr>
-        <p:spPr>
-          <a:xfrm>
-            <a:off x="4612538" y="3529584"/>
-            <a:ext cx="3058058" cy="384048"/>
-          </a:xfrm>
-          <a:prstGeom prst="rect">
-            <a:avLst/>
-          </a:prstGeom>
-          <a:noFill/>
-          <a:ln/>
-        </p:spPr>
-        <p:txBody>
-          <a:bodyPr wrap="square" rtlCol="0" anchor="t"/>
-          <a:lstStyle/>
-          <a:p>
-            <a:pPr indent="0" marL="0">
-              <a:lnSpc>
-                <a:spcPts val="1300"/>
-              </a:lnSpc>
-              <a:buNone/>
-            </a:pPr>
-            <a:r>
-              <a:rPr lang="en-US" sz="950" i="1" dirty="0">
-                <a:solidFill>
-                  <a:srgbClr val="9A5B08"/>
-                </a:solidFill>
-                <a:latin typeface="Arial" pitchFamily="34" charset="0"/>
-                <a:ea typeface="Arial" pitchFamily="34" charset="-122"/>
-                <a:cs typeface="Arial" pitchFamily="34" charset="-120"/>
-              </a:rPr>
-              <a:t>Every run is billed, so I settled the metrics and fixtures first — the first run is the real one, not a pilot.</a:t>
-            </a:r>
-            <a:endParaRPr lang="en-US" sz="950" dirty="0"/>
-          </a:p>
-        </p:txBody>
-      </p:sp>
-      <p:sp>
-        <p:nvSpPr>
-          <p:cNvPr id="15" name="Shape 13"/>
-          <p:cNvSpPr/>
-          <p:nvPr/>
-        </p:nvSpPr>
-        <p:spPr>
-          <a:xfrm>
-            <a:off x="8146085" y="1591056"/>
-            <a:ext cx="3478682" cy="2377440"/>
-          </a:xfrm>
-          <a:prstGeom prst="rect">
-            <a:avLst/>
-          </a:prstGeom>
-          <a:solidFill>
-            <a:srgbClr val="F5F7FA"/>
-          </a:solidFill>
-          <a:ln w="12700">
-            <a:solidFill>
-              <a:srgbClr val="F5F7FA"/>
-            </a:solidFill>
-            <a:prstDash val="solid"/>
-          </a:ln>
-        </p:spPr>
-      </p:sp>
-      <p:sp>
-        <p:nvSpPr>
-          <p:cNvPr id="16" name="Shape 14"/>
-          <p:cNvSpPr/>
-          <p:nvPr/>
-        </p:nvSpPr>
-        <p:spPr>
-          <a:xfrm>
-            <a:off x="8146085" y="1591056"/>
-            <a:ext cx="50292" cy="2377440"/>
-          </a:xfrm>
-          <a:prstGeom prst="rect">
-            <a:avLst/>
-          </a:prstGeom>
-          <a:solidFill>
-            <a:srgbClr val="7A8593"/>
-          </a:solidFill>
-          <a:ln w="12700">
-            <a:solidFill>
-              <a:srgbClr val="333333"/>
-            </a:solidFill>
-            <a:prstDash val="solid"/>
-          </a:ln>
-        </p:spPr>
-      </p:sp>
-      <p:sp>
-        <p:nvSpPr>
-          <p:cNvPr id="17" name="Text 15"/>
-          <p:cNvSpPr/>
-          <p:nvPr/>
-        </p:nvSpPr>
-        <p:spPr>
-          <a:xfrm>
-            <a:off x="8402117" y="1700784"/>
-            <a:ext cx="3058058" cy="274320"/>
-          </a:xfrm>
-          <a:prstGeom prst="rect">
-            <a:avLst/>
-          </a:prstGeom>
-          <a:noFill/>
-          <a:ln/>
-        </p:spPr>
-        <p:txBody>
-          <a:bodyPr wrap="square" rtlCol="0" anchor="ctr"/>
-          <a:lstStyle/>
-          <a:p>
-            <a:pPr indent="0" marL="0">
-              <a:buNone/>
-            </a:pPr>
-            <a:r>
-              <a:rPr lang="en-US" sz="1300" b="1" dirty="0">
-                <a:solidFill>
-                  <a:srgbClr val="7A8593"/>
-                </a:solidFill>
-                <a:latin typeface="Arial" pitchFamily="34" charset="0"/>
-                <a:ea typeface="Arial" pitchFamily="34" charset="-122"/>
-                <a:cs typeface="Arial" pitchFamily="34" charset="-120"/>
-              </a:rPr>
-              <a:t>✖  Out of scope, on purpose</a:t>
-            </a:r>
-            <a:endParaRPr lang="en-US" sz="1300" dirty="0"/>
-          </a:p>
-        </p:txBody>
-      </p:sp>
-      <p:sp>
-        <p:nvSpPr>
-          <p:cNvPr id="18" name="Text 16"/>
-          <p:cNvSpPr/>
-          <p:nvPr/>
-        </p:nvSpPr>
-        <p:spPr>
-          <a:xfrm>
-            <a:off x="8402117" y="2029968"/>
-            <a:ext cx="3058058" cy="1463040"/>
-          </a:xfrm>
-          <a:prstGeom prst="rect">
-            <a:avLst/>
-          </a:prstGeom>
-          <a:noFill/>
-          <a:ln/>
-        </p:spPr>
-        <p:txBody>
-          <a:bodyPr wrap="square" rtlCol="0" anchor="t"/>
-          <a:lstStyle/>
-          <a:p>
-            <a:pPr indent="0" marL="0">
-              <a:lnSpc>
-                <a:spcPts val="1450"/>
-              </a:lnSpc>
-              <a:buNone/>
-            </a:pPr>
-            <a:r>
-              <a:rPr lang="en-US" sz="1050" dirty="0">
-                <a:solidFill>
-                  <a:srgbClr val="3F4750"/>
-                </a:solidFill>
-                <a:latin typeface="Arial" pitchFamily="34" charset="0"/>
-                <a:ea typeface="Arial" pitchFamily="34" charset="-122"/>
-                <a:cs typeface="Arial" pitchFamily="34" charset="-120"/>
-              </a:rPr>
-              <a:t>Code is reviewed, never executed</a:t>
-            </a:r>
-            <a:endParaRPr lang="en-US" sz="1050" dirty="0"/>
-          </a:p>
-          <a:p>
-            <a:pPr indent="0" marL="0">
-              <a:lnSpc>
-                <a:spcPts val="1450"/>
-              </a:lnSpc>
-              <a:buNone/>
-            </a:pPr>
-            <a:endParaRPr lang="en-US" sz="1050" dirty="0"/>
-          </a:p>
-          <a:p>
-            <a:pPr indent="0" marL="0">
-              <a:lnSpc>
-                <a:spcPts val="1450"/>
-              </a:lnSpc>
-              <a:buNone/>
-            </a:pPr>
-            <a:r>
-              <a:rPr lang="en-US" sz="1050" dirty="0">
-                <a:solidFill>
-                  <a:srgbClr val="3F4750"/>
-                </a:solidFill>
-                <a:latin typeface="Arial" pitchFamily="34" charset="0"/>
-                <a:ea typeface="Arial" pitchFamily="34" charset="-122"/>
-                <a:cs typeface="Arial" pitchFamily="34" charset="-120"/>
-              </a:rPr>
-              <a:t>English only</a:t>
-            </a:r>
-            <a:endParaRPr lang="en-US" sz="1050" dirty="0"/>
-          </a:p>
-          <a:p>
-            <a:pPr indent="0" marL="0">
-              <a:lnSpc>
-                <a:spcPts val="1450"/>
-              </a:lnSpc>
-              <a:buNone/>
-            </a:pPr>
-            <a:endParaRPr lang="en-US" sz="1050" dirty="0"/>
-          </a:p>
-          <a:p>
-            <a:pPr indent="0" marL="0">
-              <a:lnSpc>
-                <a:spcPts val="1450"/>
-              </a:lnSpc>
-              <a:buNone/>
-            </a:pPr>
-            <a:r>
-              <a:rPr lang="en-US" sz="1050" dirty="0">
-                <a:solidFill>
-                  <a:srgbClr val="3F4750"/>
-                </a:solidFill>
-                <a:latin typeface="Arial" pitchFamily="34" charset="0"/>
-                <a:ea typeface="Arial" pitchFamily="34" charset="-122"/>
-                <a:cs typeface="Arial" pitchFamily="34" charset="-120"/>
-              </a:rPr>
-              <a:t>No CSP yet — pending an audit of the speech websocket origins</a:t>
-            </a:r>
-            <a:endParaRPr lang="en-US" sz="1050" dirty="0"/>
-          </a:p>
-          <a:p>
-            <a:pPr indent="0" marL="0">
-              <a:lnSpc>
-                <a:spcPts val="1450"/>
-              </a:lnSpc>
-              <a:buNone/>
-            </a:pPr>
-            <a:endParaRPr lang="en-US" sz="1050" dirty="0"/>
-          </a:p>
-          <a:p>
-            <a:pPr indent="0" marL="0">
-              <a:lnSpc>
-                <a:spcPts val="1450"/>
-              </a:lnSpc>
-              <a:buNone/>
-            </a:pPr>
-            <a:r>
-              <a:rPr lang="en-US" sz="1050" dirty="0">
-                <a:solidFill>
-                  <a:srgbClr val="3F4750"/>
-                </a:solidFill>
-                <a:latin typeface="Arial" pitchFamily="34" charset="0"/>
-                <a:ea typeface="Arial" pitchFamily="34" charset="-122"/>
-                <a:cs typeface="Arial" pitchFamily="34" charset="-120"/>
-              </a:rPr>
-              <a:t>Rate limiter is in-process</a:t>
-            </a:r>
-            <a:endParaRPr lang="en-US" sz="1050" dirty="0"/>
-          </a:p>
-        </p:txBody>
-      </p:sp>
-      <p:sp>
-        <p:nvSpPr>
-          <p:cNvPr id="19" name="Text 17"/>
-          <p:cNvSpPr/>
-          <p:nvPr/>
-        </p:nvSpPr>
-        <p:spPr>
-          <a:xfrm>
-            <a:off x="8402117" y="3529584"/>
-            <a:ext cx="3058058" cy="384048"/>
-          </a:xfrm>
-          <a:prstGeom prst="rect">
-            <a:avLst/>
-          </a:prstGeom>
-          <a:noFill/>
-          <a:ln/>
-        </p:spPr>
-        <p:txBody>
-          <a:bodyPr wrap="square" rtlCol="0" anchor="t"/>
-          <a:lstStyle/>
-          <a:p>
-            <a:pPr indent="0" marL="0">
-              <a:lnSpc>
-                <a:spcPts val="1300"/>
-              </a:lnSpc>
-              <a:buNone/>
-            </a:pPr>
-            <a:r>
-              <a:rPr lang="en-US" sz="950" i="1" dirty="0">
-                <a:solidFill>
-                  <a:srgbClr val="7A8593"/>
-                </a:solidFill>
-                <a:latin typeface="Arial" pitchFamily="34" charset="0"/>
-                <a:ea typeface="Arial" pitchFamily="34" charset="-122"/>
-                <a:cs typeface="Arial" pitchFamily="34" charset="-120"/>
-              </a:rPr>
-              <a:t>Each is a bounded, documented trade-off — recorded here rather than found by someone else.</a:t>
-            </a:r>
-            <a:endParaRPr lang="en-US" sz="950" dirty="0"/>
-          </a:p>
-        </p:txBody>
-      </p:sp>
-      <p:sp>
-        <p:nvSpPr>
-          <p:cNvPr id="20" name="Shape 18"/>
-          <p:cNvSpPr/>
-          <p:nvPr/>
-        </p:nvSpPr>
-        <p:spPr>
-          <a:xfrm>
-            <a:off x="566928" y="4078224"/>
-            <a:ext cx="11057839" cy="548640"/>
-          </a:xfrm>
-          <a:prstGeom prst="rect">
-            <a:avLst/>
-          </a:prstGeom>
-          <a:solidFill>
-            <a:srgbClr val="EAF0FE"/>
-          </a:solidFill>
-          <a:ln w="12700">
-            <a:solidFill>
-              <a:srgbClr val="EAF0FE"/>
-            </a:solidFill>
-            <a:prstDash val="solid"/>
-          </a:ln>
-        </p:spPr>
-      </p:sp>
-      <p:sp>
-        <p:nvSpPr>
-          <p:cNvPr id="21" name="Shape 19"/>
-          <p:cNvSpPr/>
-          <p:nvPr/>
-        </p:nvSpPr>
-        <p:spPr>
-          <a:xfrm>
-            <a:off x="566928" y="4078224"/>
-            <a:ext cx="50292" cy="548640"/>
-          </a:xfrm>
-          <a:prstGeom prst="rect">
-            <a:avLst/>
-          </a:prstGeom>
-          <a:solidFill>
-            <a:srgbClr val="1D4ED8"/>
-          </a:solidFill>
-          <a:ln w="12700">
-            <a:solidFill>
-              <a:srgbClr val="333333"/>
-            </a:solidFill>
-            <a:prstDash val="solid"/>
-          </a:ln>
-        </p:spPr>
-      </p:sp>
-      <p:sp>
-        <p:nvSpPr>
-          <p:cNvPr id="22" name="Text 20"/>
-          <p:cNvSpPr/>
-          <p:nvPr/>
-        </p:nvSpPr>
-        <p:spPr>
-          <a:xfrm>
-            <a:off x="877824" y="4078224"/>
-            <a:ext cx="10509199" cy="548640"/>
-          </a:xfrm>
-          <a:prstGeom prst="rect">
-            <a:avLst/>
-          </a:prstGeom>
-          <a:noFill/>
-          <a:ln/>
-        </p:spPr>
-        <p:txBody>
-          <a:bodyPr wrap="square" rtlCol="0" anchor="ctr"/>
-          <a:lstStyle/>
-          <a:p>
-            <a:pPr indent="0" marL="0">
-              <a:buNone/>
-            </a:pPr>
-            <a:r>
-              <a:rPr lang="en-US" sz="1250" b="1" dirty="0">
-                <a:solidFill>
-                  <a:srgbClr val="1D4ED8"/>
-                </a:solidFill>
-                <a:latin typeface="Arial" pitchFamily="34" charset="0"/>
-                <a:ea typeface="Arial" pitchFamily="34" charset="-122"/>
-                <a:cs typeface="Arial" pitchFamily="34" charset="-120"/>
-              </a:rPr>
-              <a:t>The rule I held to:  </a:t>
-            </a:r>
-            <a:pPr indent="0" marL="0">
-              <a:buNone/>
-            </a:pPr>
-            <a:r>
-              <a:rPr lang="en-US" sz="1250" dirty="0">
+              <a:t>What you cannot change:  </a:t>
+            </a:r>
+            <a:pPr indent="0" marL="0">
+              <a:lnSpc>
+                <a:spcPts val="1600"/>
+              </a:lnSpc>
+              <a:buNone/>
+            </a:pPr>
+            <a:r>
+              <a:rPr lang="en-US" sz="1200" dirty="0">
                 <a:solidFill>
                   <a:srgbClr val="14161A"/>
                 </a:solidFill>
@@ -10334,46 +10397,7 @@
                 <a:ea typeface="Arial" pitchFamily="34" charset="-122"/>
                 <a:cs typeface="Arial" pitchFamily="34" charset="-120"/>
               </a:rPr>
-              <a:t>never claim a number I have not run. That is why the middle column is on this slide rather than left off it.</a:t>
-            </a:r>
-            <a:endParaRPr lang="en-US" sz="1250" dirty="0"/>
-          </a:p>
-        </p:txBody>
-      </p:sp>
-      <p:sp>
-        <p:nvSpPr>
-          <p:cNvPr id="23" name="Text 21"/>
-          <p:cNvSpPr/>
-          <p:nvPr/>
-        </p:nvSpPr>
-        <p:spPr>
-          <a:xfrm>
-            <a:off x="566928" y="4718304"/>
-            <a:ext cx="11057839" cy="256032"/>
-          </a:xfrm>
-          <a:prstGeom prst="rect">
-            <a:avLst/>
-          </a:prstGeom>
-          <a:noFill/>
-          <a:ln/>
-        </p:spPr>
-        <p:txBody>
-          <a:bodyPr wrap="square" rtlCol="0" anchor="ctr"/>
-          <a:lstStyle/>
-          <a:p>
-            <a:pPr indent="0" marL="0">
-              <a:buNone/>
-            </a:pPr>
-            <a:r>
-              <a:rPr lang="en-US" sz="1200" b="1" dirty="0">
-                <a:solidFill>
-                  <a:srgbClr val="14161A"/>
-                </a:solidFill>
-                <a:latin typeface="Arial" pitchFamily="34" charset="0"/>
-                <a:ea typeface="Arial" pitchFamily="34" charset="-122"/>
-                <a:cs typeface="Arial" pitchFamily="34" charset="-120"/>
-              </a:rPr>
-              <a:t>Now the demo — three things, in increasing order of what can go wrong.</a:t>
+              <a:t>the marking rules themselves. Those are fixed numbers in the code — and fixing them is exactly what makes the same answer get the same mark twice, and lets me test each rule on its own.</a:t>
             </a:r>
             <a:endParaRPr lang="en-US" sz="1200" dirty="0"/>
           </a:p>
@@ -10381,508 +10405,7 @@
       </p:sp>
       <p:sp>
         <p:nvSpPr>
-          <p:cNvPr id="24" name="Shape 22"/>
-          <p:cNvSpPr/>
-          <p:nvPr/>
-        </p:nvSpPr>
-        <p:spPr>
-          <a:xfrm>
-            <a:off x="566928" y="5029200"/>
-            <a:ext cx="3478682" cy="859536"/>
-          </a:xfrm>
-          <a:prstGeom prst="rect">
-            <a:avLst/>
-          </a:prstGeom>
-          <a:solidFill>
-            <a:srgbClr val="EAF5EE"/>
-          </a:solidFill>
-          <a:ln w="12700">
-            <a:solidFill>
-              <a:srgbClr val="EAF5EE"/>
-            </a:solidFill>
-            <a:prstDash val="solid"/>
-          </a:ln>
-        </p:spPr>
-      </p:sp>
-      <p:sp>
-        <p:nvSpPr>
-          <p:cNvPr id="25" name="Shape 23"/>
-          <p:cNvSpPr/>
-          <p:nvPr/>
-        </p:nvSpPr>
-        <p:spPr>
-          <a:xfrm>
-            <a:off x="566928" y="5029200"/>
-            <a:ext cx="50292" cy="859536"/>
-          </a:xfrm>
-          <a:prstGeom prst="rect">
-            <a:avLst/>
-          </a:prstGeom>
-          <a:solidFill>
-            <a:srgbClr val="15803D"/>
-          </a:solidFill>
-          <a:ln w="12700">
-            <a:solidFill>
-              <a:srgbClr val="333333"/>
-            </a:solidFill>
-            <a:prstDash val="solid"/>
-          </a:ln>
-        </p:spPr>
-      </p:sp>
-      <p:sp>
-        <p:nvSpPr>
-          <p:cNvPr id="26" name="Text 24"/>
-          <p:cNvSpPr/>
-          <p:nvPr/>
-        </p:nvSpPr>
-        <p:spPr>
-          <a:xfrm>
-            <a:off x="822960" y="5120640"/>
-            <a:ext cx="3058058" cy="237744"/>
-          </a:xfrm>
-          <a:prstGeom prst="rect">
-            <a:avLst/>
-          </a:prstGeom>
-          <a:noFill/>
-          <a:ln/>
-        </p:spPr>
-        <p:txBody>
-          <a:bodyPr wrap="square" rtlCol="0" anchor="ctr"/>
-          <a:lstStyle/>
-          <a:p>
-            <a:pPr indent="0" marL="0">
-              <a:buNone/>
-            </a:pPr>
-            <a:r>
-              <a:rPr lang="en-US" sz="1200" b="1" dirty="0">
-                <a:solidFill>
-                  <a:srgbClr val="14161A"/>
-                </a:solidFill>
-                <a:latin typeface="Arial" pitchFamily="34" charset="0"/>
-                <a:ea typeface="Arial" pitchFamily="34" charset="-122"/>
-                <a:cs typeface="Arial" pitchFamily="34" charset="-120"/>
-              </a:rPr>
-              <a:t>01  ·  Personas actually differ</a:t>
-            </a:r>
-            <a:endParaRPr lang="en-US" sz="1200" dirty="0"/>
-          </a:p>
-        </p:txBody>
-      </p:sp>
-      <p:sp>
-        <p:nvSpPr>
-          <p:cNvPr id="27" name="Text 25"/>
-          <p:cNvSpPr/>
-          <p:nvPr/>
-        </p:nvSpPr>
-        <p:spPr>
-          <a:xfrm>
-            <a:off x="822960" y="5376672"/>
-            <a:ext cx="3058058" cy="219456"/>
-          </a:xfrm>
-          <a:prstGeom prst="rect">
-            <a:avLst/>
-          </a:prstGeom>
-          <a:noFill/>
-          <a:ln/>
-        </p:spPr>
-        <p:txBody>
-          <a:bodyPr wrap="square" rtlCol="0" anchor="ctr"/>
-          <a:lstStyle/>
-          <a:p>
-            <a:pPr indent="0" marL="0">
-              <a:buNone/>
-            </a:pPr>
-            <a:r>
-              <a:rPr lang="en-US" sz="1000" dirty="0">
-                <a:solidFill>
-                  <a:srgbClr val="1D4ED8"/>
-                </a:solidFill>
-                <a:latin typeface="Courier New" pitchFamily="34" charset="0"/>
-                <a:ea typeface="Courier New" pitchFamily="34" charset="-122"/>
-                <a:cs typeface="Courier New" pitchFamily="34" charset="-120"/>
-              </a:rPr>
-              <a:t>npm run eval:persona</a:t>
-            </a:r>
-            <a:endParaRPr lang="en-US" sz="1000" dirty="0"/>
-          </a:p>
-        </p:txBody>
-      </p:sp>
-      <p:sp>
-        <p:nvSpPr>
-          <p:cNvPr id="28" name="Text 26"/>
-          <p:cNvSpPr/>
-          <p:nvPr/>
-        </p:nvSpPr>
-        <p:spPr>
-          <a:xfrm>
-            <a:off x="822960" y="5596128"/>
-            <a:ext cx="3058058" cy="219456"/>
-          </a:xfrm>
-          <a:prstGeom prst="rect">
-            <a:avLst/>
-          </a:prstGeom>
-          <a:noFill/>
-          <a:ln/>
-        </p:spPr>
-        <p:txBody>
-          <a:bodyPr wrap="square" rtlCol="0" anchor="ctr"/>
-          <a:lstStyle/>
-          <a:p>
-            <a:pPr indent="0" marL="0">
-              <a:buNone/>
-            </a:pPr>
-            <a:r>
-              <a:rPr lang="en-US" sz="950" i="1" dirty="0">
-                <a:solidFill>
-                  <a:srgbClr val="15803D"/>
-                </a:solidFill>
-                <a:latin typeface="Arial" pitchFamily="34" charset="0"/>
-                <a:ea typeface="Arial" pitchFamily="34" charset="-122"/>
-                <a:cs typeface="Arial" pitchFamily="34" charset="-120"/>
-              </a:rPr>
-              <a:t>Deterministic — cannot fail</a:t>
-            </a:r>
-            <a:endParaRPr lang="en-US" sz="950" dirty="0"/>
-          </a:p>
-        </p:txBody>
-      </p:sp>
-      <p:sp>
-        <p:nvSpPr>
-          <p:cNvPr id="29" name="Shape 27"/>
-          <p:cNvSpPr/>
-          <p:nvPr/>
-        </p:nvSpPr>
-        <p:spPr>
-          <a:xfrm>
-            <a:off x="4356506" y="5029200"/>
-            <a:ext cx="3478682" cy="859536"/>
-          </a:xfrm>
-          <a:prstGeom prst="rect">
-            <a:avLst/>
-          </a:prstGeom>
-          <a:solidFill>
-            <a:srgbClr val="FDF4E7"/>
-          </a:solidFill>
-          <a:ln w="12700">
-            <a:solidFill>
-              <a:srgbClr val="FDF4E7"/>
-            </a:solidFill>
-            <a:prstDash val="solid"/>
-          </a:ln>
-        </p:spPr>
-      </p:sp>
-      <p:sp>
-        <p:nvSpPr>
-          <p:cNvPr id="30" name="Shape 28"/>
-          <p:cNvSpPr/>
-          <p:nvPr/>
-        </p:nvSpPr>
-        <p:spPr>
-          <a:xfrm>
-            <a:off x="4356506" y="5029200"/>
-            <a:ext cx="50292" cy="859536"/>
-          </a:xfrm>
-          <a:prstGeom prst="rect">
-            <a:avLst/>
-          </a:prstGeom>
-          <a:solidFill>
-            <a:srgbClr val="9A5B08"/>
-          </a:solidFill>
-          <a:ln w="12700">
-            <a:solidFill>
-              <a:srgbClr val="333333"/>
-            </a:solidFill>
-            <a:prstDash val="solid"/>
-          </a:ln>
-        </p:spPr>
-      </p:sp>
-      <p:sp>
-        <p:nvSpPr>
-          <p:cNvPr id="31" name="Text 29"/>
-          <p:cNvSpPr/>
-          <p:nvPr/>
-        </p:nvSpPr>
-        <p:spPr>
-          <a:xfrm>
-            <a:off x="4612538" y="5120640"/>
-            <a:ext cx="3058058" cy="237744"/>
-          </a:xfrm>
-          <a:prstGeom prst="rect">
-            <a:avLst/>
-          </a:prstGeom>
-          <a:noFill/>
-          <a:ln/>
-        </p:spPr>
-        <p:txBody>
-          <a:bodyPr wrap="square" rtlCol="0" anchor="ctr"/>
-          <a:lstStyle/>
-          <a:p>
-            <a:pPr indent="0" marL="0">
-              <a:buNone/>
-            </a:pPr>
-            <a:r>
-              <a:rPr lang="en-US" sz="1200" b="1" dirty="0">
-                <a:solidFill>
-                  <a:srgbClr val="14161A"/>
-                </a:solidFill>
-                <a:latin typeface="Arial" pitchFamily="34" charset="0"/>
-                <a:ea typeface="Arial" pitchFamily="34" charset="-122"/>
-                <a:cs typeface="Arial" pitchFamily="34" charset="-120"/>
-              </a:rPr>
-              <a:t>02  ·  What it has cost</a:t>
-            </a:r>
-            <a:endParaRPr lang="en-US" sz="1200" dirty="0"/>
-          </a:p>
-        </p:txBody>
-      </p:sp>
-      <p:sp>
-        <p:nvSpPr>
-          <p:cNvPr id="32" name="Text 30"/>
-          <p:cNvSpPr/>
-          <p:nvPr/>
-        </p:nvSpPr>
-        <p:spPr>
-          <a:xfrm>
-            <a:off x="4612538" y="5376672"/>
-            <a:ext cx="3058058" cy="219456"/>
-          </a:xfrm>
-          <a:prstGeom prst="rect">
-            <a:avLst/>
-          </a:prstGeom>
-          <a:noFill/>
-          <a:ln/>
-        </p:spPr>
-        <p:txBody>
-          <a:bodyPr wrap="square" rtlCol="0" anchor="ctr"/>
-          <a:lstStyle/>
-          <a:p>
-            <a:pPr indent="0" marL="0">
-              <a:buNone/>
-            </a:pPr>
-            <a:r>
-              <a:rPr lang="en-US" sz="1000" dirty="0">
-                <a:solidFill>
-                  <a:srgbClr val="1D4ED8"/>
-                </a:solidFill>
-                <a:latin typeface="Courier New" pitchFamily="34" charset="0"/>
-                <a:ea typeface="Courier New" pitchFamily="34" charset="-122"/>
-                <a:cs typeface="Courier New" pitchFamily="34" charset="-120"/>
-              </a:rPr>
-              <a:t>npm run cost-report</a:t>
-            </a:r>
-            <a:endParaRPr lang="en-US" sz="1000" dirty="0"/>
-          </a:p>
-        </p:txBody>
-      </p:sp>
-      <p:sp>
-        <p:nvSpPr>
-          <p:cNvPr id="33" name="Text 31"/>
-          <p:cNvSpPr/>
-          <p:nvPr/>
-        </p:nvSpPr>
-        <p:spPr>
-          <a:xfrm>
-            <a:off x="4612538" y="5596128"/>
-            <a:ext cx="3058058" cy="219456"/>
-          </a:xfrm>
-          <a:prstGeom prst="rect">
-            <a:avLst/>
-          </a:prstGeom>
-          <a:noFill/>
-          <a:ln/>
-        </p:spPr>
-        <p:txBody>
-          <a:bodyPr wrap="square" rtlCol="0" anchor="ctr"/>
-          <a:lstStyle/>
-          <a:p>
-            <a:pPr indent="0" marL="0">
-              <a:buNone/>
-            </a:pPr>
-            <a:r>
-              <a:rPr lang="en-US" sz="950" i="1" dirty="0">
-                <a:solidFill>
-                  <a:srgbClr val="9A5B08"/>
-                </a:solidFill>
-                <a:latin typeface="Arial" pitchFamily="34" charset="0"/>
-                <a:ea typeface="Arial" pitchFamily="34" charset="-122"/>
-                <a:cs typeface="Arial" pitchFamily="34" charset="-120"/>
-              </a:rPr>
-              <a:t>Reads llm_usage</a:t>
-            </a:r>
-            <a:endParaRPr lang="en-US" sz="950" dirty="0"/>
-          </a:p>
-        </p:txBody>
-      </p:sp>
-      <p:sp>
-        <p:nvSpPr>
-          <p:cNvPr id="34" name="Shape 32"/>
-          <p:cNvSpPr/>
-          <p:nvPr/>
-        </p:nvSpPr>
-        <p:spPr>
-          <a:xfrm>
-            <a:off x="8146085" y="5029200"/>
-            <a:ext cx="3478682" cy="859536"/>
-          </a:xfrm>
-          <a:prstGeom prst="rect">
-            <a:avLst/>
-          </a:prstGeom>
-          <a:solidFill>
-            <a:srgbClr val="FDF4E7"/>
-          </a:solidFill>
-          <a:ln w="12700">
-            <a:solidFill>
-              <a:srgbClr val="FDF4E7"/>
-            </a:solidFill>
-            <a:prstDash val="solid"/>
-          </a:ln>
-        </p:spPr>
-      </p:sp>
-      <p:sp>
-        <p:nvSpPr>
-          <p:cNvPr id="35" name="Shape 33"/>
-          <p:cNvSpPr/>
-          <p:nvPr/>
-        </p:nvSpPr>
-        <p:spPr>
-          <a:xfrm>
-            <a:off x="8146085" y="5029200"/>
-            <a:ext cx="50292" cy="859536"/>
-          </a:xfrm>
-          <a:prstGeom prst="rect">
-            <a:avLst/>
-          </a:prstGeom>
-          <a:solidFill>
-            <a:srgbClr val="9A5B08"/>
-          </a:solidFill>
-          <a:ln w="12700">
-            <a:solidFill>
-              <a:srgbClr val="333333"/>
-            </a:solidFill>
-            <a:prstDash val="solid"/>
-          </a:ln>
-        </p:spPr>
-      </p:sp>
-      <p:sp>
-        <p:nvSpPr>
-          <p:cNvPr id="36" name="Text 34"/>
-          <p:cNvSpPr/>
-          <p:nvPr/>
-        </p:nvSpPr>
-        <p:spPr>
-          <a:xfrm>
-            <a:off x="8402117" y="5120640"/>
-            <a:ext cx="3058058" cy="237744"/>
-          </a:xfrm>
-          <a:prstGeom prst="rect">
-            <a:avLst/>
-          </a:prstGeom>
-          <a:noFill/>
-          <a:ln/>
-        </p:spPr>
-        <p:txBody>
-          <a:bodyPr wrap="square" rtlCol="0" anchor="ctr"/>
-          <a:lstStyle/>
-          <a:p>
-            <a:pPr indent="0" marL="0">
-              <a:buNone/>
-            </a:pPr>
-            <a:r>
-              <a:rPr lang="en-US" sz="1200" b="1" dirty="0">
-                <a:solidFill>
-                  <a:srgbClr val="14161A"/>
-                </a:solidFill>
-                <a:latin typeface="Arial" pitchFamily="34" charset="0"/>
-                <a:ea typeface="Arial" pitchFamily="34" charset="-122"/>
-                <a:cs typeface="Arial" pitchFamily="34" charset="-120"/>
-              </a:rPr>
-              <a:t>03  ·  A live interview</a:t>
-            </a:r>
-            <a:endParaRPr lang="en-US" sz="1200" dirty="0"/>
-          </a:p>
-        </p:txBody>
-      </p:sp>
-      <p:sp>
-        <p:nvSpPr>
-          <p:cNvPr id="37" name="Text 35"/>
-          <p:cNvSpPr/>
-          <p:nvPr/>
-        </p:nvSpPr>
-        <p:spPr>
-          <a:xfrm>
-            <a:off x="8402117" y="5376672"/>
-            <a:ext cx="3058058" cy="219456"/>
-          </a:xfrm>
-          <a:prstGeom prst="rect">
-            <a:avLst/>
-          </a:prstGeom>
-          <a:noFill/>
-          <a:ln/>
-        </p:spPr>
-        <p:txBody>
-          <a:bodyPr wrap="square" rtlCol="0" anchor="ctr"/>
-          <a:lstStyle/>
-          <a:p>
-            <a:pPr indent="0" marL="0">
-              <a:buNone/>
-            </a:pPr>
-            <a:r>
-              <a:rPr lang="en-US" sz="1000" dirty="0">
-                <a:solidFill>
-                  <a:srgbClr val="1D4ED8"/>
-                </a:solidFill>
-                <a:latin typeface="Courier New" pitchFamily="34" charset="0"/>
-                <a:ea typeface="Courier New" pitchFamily="34" charset="-122"/>
-                <a:cs typeface="Courier New" pitchFamily="34" charset="-120"/>
-              </a:rPr>
-              <a:t>npm run dev</a:t>
-            </a:r>
-            <a:endParaRPr lang="en-US" sz="1000" dirty="0"/>
-          </a:p>
-        </p:txBody>
-      </p:sp>
-      <p:sp>
-        <p:nvSpPr>
-          <p:cNvPr id="38" name="Text 36"/>
-          <p:cNvSpPr/>
-          <p:nvPr/>
-        </p:nvSpPr>
-        <p:spPr>
-          <a:xfrm>
-            <a:off x="8402117" y="5596128"/>
-            <a:ext cx="3058058" cy="219456"/>
-          </a:xfrm>
-          <a:prstGeom prst="rect">
-            <a:avLst/>
-          </a:prstGeom>
-          <a:noFill/>
-          <a:ln/>
-        </p:spPr>
-        <p:txBody>
-          <a:bodyPr wrap="square" rtlCol="0" anchor="ctr"/>
-          <a:lstStyle/>
-          <a:p>
-            <a:pPr indent="0" marL="0">
-              <a:buNone/>
-            </a:pPr>
-            <a:r>
-              <a:rPr lang="en-US" sz="950" i="1" dirty="0">
-                <a:solidFill>
-                  <a:srgbClr val="9A5B08"/>
-                </a:solidFill>
-                <a:latin typeface="Arial" pitchFamily="34" charset="0"/>
-                <a:ea typeface="Arial" pitchFamily="34" charset="-122"/>
-                <a:cs typeface="Arial" pitchFamily="34" charset="-120"/>
-              </a:rPr>
-              <a:t>Strict persona, short round</a:t>
-            </a:r>
-            <a:endParaRPr lang="en-US" sz="950" dirty="0"/>
-          </a:p>
-        </p:txBody>
-      </p:sp>
-      <p:sp>
-        <p:nvSpPr>
-          <p:cNvPr id="40" name="Text 37"/>
+          <p:cNvPr id="24" name="Text 21"/>
           <p:cNvSpPr/>
           <p:nvPr/>
         </p:nvSpPr>
@@ -10921,7 +10444,7 @@
       </p:sp>
       <p:sp>
         <p:nvSpPr>
-          <p:cNvPr id="41" name="Text 38"/>
+          <p:cNvPr id="25" name="Text 22"/>
           <p:cNvSpPr/>
           <p:nvPr/>
         </p:nvSpPr>
@@ -11432,7 +10955,7 @@
                 <a:ea typeface="Arial" pitchFamily="34" charset="-122"/>
                 <a:cs typeface="Arial" pitchFamily="34" charset="-120"/>
               </a:rPr>
-              <a:t>  18 route files — auth-gated, rate-limited, RLS-backed</a:t>
+              <a:t>  22 route files — auth-gated, rate-limited, RLS-backed</a:t>
             </a:r>
             <a:endParaRPr lang="en-US" sz="1150" dirty="0"/>
           </a:p>
@@ -11718,7 +11241,7 @@
                 <a:ea typeface="Arial" pitchFamily="34" charset="-122"/>
                 <a:cs typeface="Arial" pitchFamily="34" charset="-120"/>
               </a:rPr>
-              <a:t>  so it can be tested without a network or a database. That is why there are 299 tests and no mocking framework.</a:t>
+              <a:t>  so it can be tested without a network or a database. That is why there are 482 tests and no mocking framework.</a:t>
             </a:r>
             <a:endParaRPr lang="en-US" sz="1150" dirty="0"/>
           </a:p>
@@ -12195,7 +11718,7 @@
                 <a:ea typeface="Arial" pitchFamily="34" charset="-122"/>
                 <a:cs typeface="Arial" pitchFamily="34" charset="-120"/>
               </a:rPr>
-              <a:t>10 migrations</a:t>
+              <a:t>15 migrations</a:t>
             </a:r>
             <a:pPr indent="0" marL="0">
               <a:lnSpc>
@@ -12212,7 +11735,7 @@
                 <a:ea typeface="Arial" pitchFamily="34" charset="-122"/>
                 <a:cs typeface="Arial" pitchFamily="34" charset="-120"/>
               </a:rPr>
-              <a:t>  sessions, messages, personas, job descriptions, resumes, usage, coach answers</a:t>
+              <a:t>  sessions, messages, personas, job descriptions, resumes, turn analyses, usage, coach answers, integrity constraints, server-owned writes, document metadata</a:t>
             </a:r>
             <a:endParaRPr lang="en-US" sz="1150" dirty="0"/>
           </a:p>
@@ -12573,7 +12096,7 @@
                 <a:ea typeface="Arial" pitchFamily="34" charset="-122"/>
                 <a:cs typeface="Arial" pitchFamily="34" charset="-120"/>
               </a:rPr>
-              <a:t>A CV is distilled once at upload</a:t>
+              <a:t>The resume is read directly, not searched</a:t>
             </a:r>
             <a:pPr indent="0" marL="0">
               <a:lnSpc>
@@ -12590,7 +12113,7 @@
                 <a:ea typeface="Arial" pitchFamily="34" charset="-122"/>
                 <a:cs typeface="Arial" pitchFamily="34" charset="-120"/>
               </a:rPr>
-              <a:t>  into a compact profile, capped at 400 tokens, rather than re-read every turn</a:t>
+              <a:t>  short enough to fit whole, so splitting and indexing it would cost more than it saves. An earlier version boiled it down to a summary; that was removed so the interviewer reads what the candidate actually wrote</a:t>
             </a:r>
             <a:endParaRPr lang="en-US" sz="1150" dirty="0"/>
           </a:p>
